--- a/decks/ppt-generator-intro-report.pptx
+++ b/decks/ppt-generator-intro-report.pptx
@@ -5,20 +5,22 @@
     <p:sldMasterId id="2147483648" r:id="rId1"/>
   </p:sldMasterIdLst>
   <p:sldIdLst>
-    <p:sldId id="256" r:id="rId7"/>
-    <p:sldId id="257" r:id="rId8"/>
-    <p:sldId id="258" r:id="rId9"/>
-    <p:sldId id="259" r:id="rId10"/>
-    <p:sldId id="260" r:id="rId11"/>
-    <p:sldId id="261" r:id="rId12"/>
-    <p:sldId id="262" r:id="rId13"/>
-    <p:sldId id="263" r:id="rId14"/>
-    <p:sldId id="264" r:id="rId15"/>
-    <p:sldId id="265" r:id="rId16"/>
-    <p:sldId id="266" r:id="rId17"/>
-    <p:sldId id="267" r:id="rId18"/>
+    <p:sldId id="256" r:id="rId2"/>
+    <p:sldId id="257" r:id="rId3"/>
+    <p:sldId id="268" r:id="rId4"/>
+    <p:sldId id="258" r:id="rId5"/>
+    <p:sldId id="269" r:id="rId6"/>
+    <p:sldId id="259" r:id="rId7"/>
+    <p:sldId id="260" r:id="rId8"/>
+    <p:sldId id="261" r:id="rId9"/>
+    <p:sldId id="262" r:id="rId10"/>
+    <p:sldId id="263" r:id="rId11"/>
+    <p:sldId id="264" r:id="rId12"/>
+    <p:sldId id="265" r:id="rId13"/>
+    <p:sldId id="266" r:id="rId14"/>
+    <p:sldId id="267" r:id="rId15"/>
   </p:sldIdLst>
-  <p:sldSz cx="12191695" cy="6858000" type="screen4x3"/>
+  <p:sldSz cx="12192000" cy="6858000"/>
   <p:notesSz cx="6858000" cy="9144000"/>
   <p:defaultTextStyle>
     <a:defPPr>
@@ -115,18 +117,39 @@
       </a:defRPr>
     </a:lvl9pPr>
   </p:defaultTextStyle>
+  <p:extLst>
+    <p:ext uri="{EFAFB233-063F-42B5-8137-9DF3F51BA10A}">
+      <p15:sldGuideLst xmlns:p15="http://schemas.microsoft.com/office/powerpoint/2012/main">
+        <p15:guide id="1" orient="horz" pos="2160">
+          <p15:clr>
+            <a:srgbClr val="A4A3A4"/>
+          </p15:clr>
+        </p15:guide>
+        <p15:guide id="2" pos="2880">
+          <p15:clr>
+            <a:srgbClr val="A4A3A4"/>
+          </p15:clr>
+        </p15:guide>
+      </p15:sldGuideLst>
+    </p:ext>
+  </p:extLst>
 </p:presentation>
 </file>
 
 <file path=ppt/charts/chart1.xml><?xml version="1.0" encoding="utf-8"?>
-<c:chartSpace xmlns:c="http://schemas.openxmlformats.org/drawingml/2006/chart" xmlns:a="http://schemas.openxmlformats.org/drawingml/2006/main" xmlns:r="http://schemas.openxmlformats.org/officeDocument/2006/relationships">
+<c:chartSpace xmlns:c="http://schemas.openxmlformats.org/drawingml/2006/chart" xmlns:a="http://schemas.openxmlformats.org/drawingml/2006/main" xmlns:r="http://schemas.openxmlformats.org/officeDocument/2006/relationships" xmlns:c16r2="http://schemas.microsoft.com/office/drawing/2015/06/chart">
   <c:date1904 val="0"/>
+  <c:lang val="ko-KR"/>
+  <c:roundedCorners val="1"/>
+  <c:style val="2"/>
   <c:chart>
     <c:autoTitleDeleted val="1"/>
     <c:plotArea>
+      <c:layout/>
       <c:barChart>
         <c:barDir val="col"/>
         <c:grouping val="clustered"/>
+        <c:varyColors val="1"/>
         <c:ser>
           <c:idx val="0"/>
           <c:order val="0"/>
@@ -141,6 +164,28 @@
               </c:strCache>
             </c:strRef>
           </c:tx>
+          <c:invertIfNegative val="1"/>
+          <c:dLbls>
+            <c:spPr>
+              <a:noFill/>
+              <a:ln>
+                <a:noFill/>
+              </a:ln>
+              <a:effectLst/>
+            </c:spPr>
+            <c:showLegendKey val="0"/>
+            <c:showVal val="1"/>
+            <c:showCatName val="0"/>
+            <c:showSerName val="0"/>
+            <c:showPercent val="0"/>
+            <c:showBubbleSize val="0"/>
+            <c:showLeaderLines val="0"/>
+            <c:extLst>
+              <c:ext xmlns:c15="http://schemas.microsoft.com/office/drawing/2012/chart" uri="{CE6537A1-D6FC-4f65-9D91-7224C49458BB}">
+                <c15:showLeaderLines val="0"/>
+              </c:ext>
+            </c:extLst>
+          </c:dLbls>
           <c:cat>
             <c:strRef>
               <c:f>Sheet1!$A$2:$A$4</c:f>
@@ -176,6 +221,11 @@
               </c:numCache>
             </c:numRef>
           </c:val>
+          <c:extLst>
+            <c:ext xmlns:c16="http://schemas.microsoft.com/office/drawing/2014/chart" uri="{C3380CC4-5D6E-409C-BE32-E72D297353CC}">
+              <c16:uniqueId val="{00000000-068E-4A84-901F-6D459054A23F}"/>
+            </c:ext>
+          </c:extLst>
         </c:ser>
         <c:dLbls>
           <c:showLegendKey val="0"/>
@@ -184,8 +234,8 @@
           <c:showSerName val="0"/>
           <c:showPercent val="0"/>
           <c:showBubbleSize val="0"/>
-          <c:showLeaderLines val="1"/>
         </c:dLbls>
+        <c:gapWidth val="150"/>
         <c:axId val="-2068027336"/>
         <c:axId val="-2113994440"/>
       </c:barChart>
@@ -196,6 +246,7 @@
         </c:scaling>
         <c:delete val="0"/>
         <c:axPos val="b"/>
+        <c:numFmt formatCode="General" sourceLinked="0"/>
         <c:majorTickMark val="out"/>
         <c:minorTickMark val="none"/>
         <c:tickLblPos val="nextTo"/>
@@ -208,18 +259,24 @@
       </c:catAx>
       <c:valAx>
         <c:axId val="-2113994440"/>
-        <c:scaling/>
+        <c:scaling>
+          <c:orientation val="minMax"/>
+        </c:scaling>
         <c:delete val="0"/>
         <c:axPos val="l"/>
         <c:majorGridlines/>
+        <c:numFmt formatCode="General" sourceLinked="1"/>
         <c:majorTickMark val="out"/>
         <c:minorTickMark val="none"/>
         <c:tickLblPos val="nextTo"/>
         <c:crossAx val="-2068027336"/>
         <c:crosses val="autoZero"/>
+        <c:crossBetween val="between"/>
       </c:valAx>
     </c:plotArea>
+    <c:plotVisOnly val="1"/>
     <c:dispBlanksAs val="gap"/>
+    <c:showDLblsOverMax val="1"/>
   </c:chart>
   <c:txPr>
     <a:bodyPr/>
@@ -275,10 +332,9 @@
           <a:lstStyle/>
           <a:p>
             <a:r>
-              <a:rPr lang="en-US" smtClean="0"/>
+              <a:rPr lang="en-US"/>
               <a:t>Click to edit Master title style</a:t>
             </a:r>
-            <a:endParaRPr lang="en-US"/>
           </a:p>
         </p:txBody>
       </p:sp>
@@ -394,10 +450,9 @@
           </a:lstStyle>
           <a:p>
             <a:r>
-              <a:rPr lang="en-US" smtClean="0"/>
+              <a:rPr lang="en-US"/>
               <a:t>Click to edit Master subtitle style</a:t>
             </a:r>
-            <a:endParaRPr lang="en-US"/>
           </a:p>
         </p:txBody>
       </p:sp>
@@ -418,7 +473,7 @@
           <a:p>
             <a:fld id="{5BCAD085-E8A6-8845-BD4E-CB4CCA059FC4}" type="datetimeFigureOut">
               <a:rPr lang="en-US" smtClean="0"/>
-              <a:t>1/27/13</a:t>
+              <a:t>6/27/2026</a:t>
             </a:fld>
             <a:endParaRPr lang="en-US"/>
           </a:p>
@@ -512,10 +567,9 @@
           <a:lstStyle/>
           <a:p>
             <a:r>
-              <a:rPr lang="en-US" smtClean="0"/>
+              <a:rPr lang="en-US"/>
               <a:t>Click to edit Master title style</a:t>
             </a:r>
-            <a:endParaRPr lang="en-US"/>
           </a:p>
         </p:txBody>
       </p:sp>
@@ -536,38 +590,37 @@
           <a:p>
             <a:pPr lvl="0"/>
             <a:r>
-              <a:rPr lang="en-US" smtClean="0"/>
+              <a:rPr lang="en-US"/>
               <a:t>Click to edit Master text styles</a:t>
             </a:r>
           </a:p>
           <a:p>
             <a:pPr lvl="1"/>
             <a:r>
-              <a:rPr lang="en-US" smtClean="0"/>
+              <a:rPr lang="en-US"/>
               <a:t>Second level</a:t>
             </a:r>
           </a:p>
           <a:p>
             <a:pPr lvl="2"/>
             <a:r>
-              <a:rPr lang="en-US" smtClean="0"/>
+              <a:rPr lang="en-US"/>
               <a:t>Third level</a:t>
             </a:r>
           </a:p>
           <a:p>
             <a:pPr lvl="3"/>
             <a:r>
-              <a:rPr lang="en-US" smtClean="0"/>
+              <a:rPr lang="en-US"/>
               <a:t>Fourth level</a:t>
             </a:r>
           </a:p>
           <a:p>
             <a:pPr lvl="4"/>
             <a:r>
-              <a:rPr lang="en-US" smtClean="0"/>
+              <a:rPr lang="en-US"/>
               <a:t>Fifth level</a:t>
             </a:r>
-            <a:endParaRPr lang="en-US"/>
           </a:p>
         </p:txBody>
       </p:sp>
@@ -588,7 +641,7 @@
           <a:p>
             <a:fld id="{5BCAD085-E8A6-8845-BD4E-CB4CCA059FC4}" type="datetimeFigureOut">
               <a:rPr lang="en-US" smtClean="0"/>
-              <a:t>1/27/13</a:t>
+              <a:t>6/27/2026</a:t>
             </a:fld>
             <a:endParaRPr lang="en-US"/>
           </a:p>
@@ -687,10 +740,9 @@
           <a:lstStyle/>
           <a:p>
             <a:r>
-              <a:rPr lang="en-US" smtClean="0"/>
+              <a:rPr lang="en-US"/>
               <a:t>Click to edit Master title style</a:t>
             </a:r>
-            <a:endParaRPr lang="en-US"/>
           </a:p>
         </p:txBody>
       </p:sp>
@@ -716,38 +768,37 @@
           <a:p>
             <a:pPr lvl="0"/>
             <a:r>
-              <a:rPr lang="en-US" smtClean="0"/>
+              <a:rPr lang="en-US"/>
               <a:t>Click to edit Master text styles</a:t>
             </a:r>
           </a:p>
           <a:p>
             <a:pPr lvl="1"/>
             <a:r>
-              <a:rPr lang="en-US" smtClean="0"/>
+              <a:rPr lang="en-US"/>
               <a:t>Second level</a:t>
             </a:r>
           </a:p>
           <a:p>
             <a:pPr lvl="2"/>
             <a:r>
-              <a:rPr lang="en-US" smtClean="0"/>
+              <a:rPr lang="en-US"/>
               <a:t>Third level</a:t>
             </a:r>
           </a:p>
           <a:p>
             <a:pPr lvl="3"/>
             <a:r>
-              <a:rPr lang="en-US" smtClean="0"/>
+              <a:rPr lang="en-US"/>
               <a:t>Fourth level</a:t>
             </a:r>
           </a:p>
           <a:p>
             <a:pPr lvl="4"/>
             <a:r>
-              <a:rPr lang="en-US" smtClean="0"/>
+              <a:rPr lang="en-US"/>
               <a:t>Fifth level</a:t>
             </a:r>
-            <a:endParaRPr lang="en-US"/>
           </a:p>
         </p:txBody>
       </p:sp>
@@ -768,7 +819,7 @@
           <a:p>
             <a:fld id="{5BCAD085-E8A6-8845-BD4E-CB4CCA059FC4}" type="datetimeFigureOut">
               <a:rPr lang="en-US" smtClean="0"/>
-              <a:t>1/27/13</a:t>
+              <a:t>6/27/2026</a:t>
             </a:fld>
             <a:endParaRPr lang="en-US"/>
           </a:p>
@@ -862,10 +913,9 @@
           <a:lstStyle/>
           <a:p>
             <a:r>
-              <a:rPr lang="en-US" smtClean="0"/>
+              <a:rPr lang="en-US"/>
               <a:t>Click to edit Master title style</a:t>
             </a:r>
-            <a:endParaRPr lang="en-US"/>
           </a:p>
         </p:txBody>
       </p:sp>
@@ -886,38 +936,37 @@
           <a:p>
             <a:pPr lvl="0"/>
             <a:r>
-              <a:rPr lang="en-US" smtClean="0"/>
+              <a:rPr lang="en-US"/>
               <a:t>Click to edit Master text styles</a:t>
             </a:r>
           </a:p>
           <a:p>
             <a:pPr lvl="1"/>
             <a:r>
-              <a:rPr lang="en-US" smtClean="0"/>
+              <a:rPr lang="en-US"/>
               <a:t>Second level</a:t>
             </a:r>
           </a:p>
           <a:p>
             <a:pPr lvl="2"/>
             <a:r>
-              <a:rPr lang="en-US" smtClean="0"/>
+              <a:rPr lang="en-US"/>
               <a:t>Third level</a:t>
             </a:r>
           </a:p>
           <a:p>
             <a:pPr lvl="3"/>
             <a:r>
-              <a:rPr lang="en-US" smtClean="0"/>
+              <a:rPr lang="en-US"/>
               <a:t>Fourth level</a:t>
             </a:r>
           </a:p>
           <a:p>
             <a:pPr lvl="4"/>
             <a:r>
-              <a:rPr lang="en-US" smtClean="0"/>
+              <a:rPr lang="en-US"/>
               <a:t>Fifth level</a:t>
             </a:r>
-            <a:endParaRPr lang="en-US"/>
           </a:p>
         </p:txBody>
       </p:sp>
@@ -938,7 +987,7 @@
           <a:p>
             <a:fld id="{5BCAD085-E8A6-8845-BD4E-CB4CCA059FC4}" type="datetimeFigureOut">
               <a:rPr lang="en-US" smtClean="0"/>
-              <a:t>1/27/13</a:t>
+              <a:t>6/27/2026</a:t>
             </a:fld>
             <a:endParaRPr lang="en-US"/>
           </a:p>
@@ -1041,10 +1090,9 @@
           </a:lstStyle>
           <a:p>
             <a:r>
-              <a:rPr lang="en-US" smtClean="0"/>
+              <a:rPr lang="en-US"/>
               <a:t>Click to edit Master title style</a:t>
             </a:r>
-            <a:endParaRPr lang="en-US"/>
           </a:p>
         </p:txBody>
       </p:sp>
@@ -1161,7 +1209,7 @@
           <a:p>
             <a:pPr lvl="0"/>
             <a:r>
-              <a:rPr lang="en-US" smtClean="0"/>
+              <a:rPr lang="en-US"/>
               <a:t>Click to edit Master text styles</a:t>
             </a:r>
           </a:p>
@@ -1184,7 +1232,7 @@
           <a:p>
             <a:fld id="{5BCAD085-E8A6-8845-BD4E-CB4CCA059FC4}" type="datetimeFigureOut">
               <a:rPr lang="en-US" smtClean="0"/>
-              <a:t>1/27/13</a:t>
+              <a:t>6/27/2026</a:t>
             </a:fld>
             <a:endParaRPr lang="en-US"/>
           </a:p>
@@ -1278,10 +1326,9 @@
           <a:lstStyle/>
           <a:p>
             <a:r>
-              <a:rPr lang="en-US" smtClean="0"/>
+              <a:rPr lang="en-US"/>
               <a:t>Click to edit Master title style</a:t>
             </a:r>
-            <a:endParaRPr lang="en-US"/>
           </a:p>
         </p:txBody>
       </p:sp>
@@ -1335,38 +1382,37 @@
           <a:p>
             <a:pPr lvl="0"/>
             <a:r>
-              <a:rPr lang="en-US" smtClean="0"/>
+              <a:rPr lang="en-US"/>
               <a:t>Click to edit Master text styles</a:t>
             </a:r>
           </a:p>
           <a:p>
             <a:pPr lvl="1"/>
             <a:r>
-              <a:rPr lang="en-US" smtClean="0"/>
+              <a:rPr lang="en-US"/>
               <a:t>Second level</a:t>
             </a:r>
           </a:p>
           <a:p>
             <a:pPr lvl="2"/>
             <a:r>
-              <a:rPr lang="en-US" smtClean="0"/>
+              <a:rPr lang="en-US"/>
               <a:t>Third level</a:t>
             </a:r>
           </a:p>
           <a:p>
             <a:pPr lvl="3"/>
             <a:r>
-              <a:rPr lang="en-US" smtClean="0"/>
+              <a:rPr lang="en-US"/>
               <a:t>Fourth level</a:t>
             </a:r>
           </a:p>
           <a:p>
             <a:pPr lvl="4"/>
             <a:r>
-              <a:rPr lang="en-US" smtClean="0"/>
+              <a:rPr lang="en-US"/>
               <a:t>Fifth level</a:t>
             </a:r>
-            <a:endParaRPr lang="en-US"/>
           </a:p>
         </p:txBody>
       </p:sp>
@@ -1420,38 +1466,37 @@
           <a:p>
             <a:pPr lvl="0"/>
             <a:r>
-              <a:rPr lang="en-US" smtClean="0"/>
+              <a:rPr lang="en-US"/>
               <a:t>Click to edit Master text styles</a:t>
             </a:r>
           </a:p>
           <a:p>
             <a:pPr lvl="1"/>
             <a:r>
-              <a:rPr lang="en-US" smtClean="0"/>
+              <a:rPr lang="en-US"/>
               <a:t>Second level</a:t>
             </a:r>
           </a:p>
           <a:p>
             <a:pPr lvl="2"/>
             <a:r>
-              <a:rPr lang="en-US" smtClean="0"/>
+              <a:rPr lang="en-US"/>
               <a:t>Third level</a:t>
             </a:r>
           </a:p>
           <a:p>
             <a:pPr lvl="3"/>
             <a:r>
-              <a:rPr lang="en-US" smtClean="0"/>
+              <a:rPr lang="en-US"/>
               <a:t>Fourth level</a:t>
             </a:r>
           </a:p>
           <a:p>
             <a:pPr lvl="4"/>
             <a:r>
-              <a:rPr lang="en-US" smtClean="0"/>
+              <a:rPr lang="en-US"/>
               <a:t>Fifth level</a:t>
             </a:r>
-            <a:endParaRPr lang="en-US"/>
           </a:p>
         </p:txBody>
       </p:sp>
@@ -1472,7 +1517,7 @@
           <a:p>
             <a:fld id="{5BCAD085-E8A6-8845-BD4E-CB4CCA059FC4}" type="datetimeFigureOut">
               <a:rPr lang="en-US" smtClean="0"/>
-              <a:t>1/27/13</a:t>
+              <a:t>6/27/2026</a:t>
             </a:fld>
             <a:endParaRPr lang="en-US"/>
           </a:p>
@@ -1570,10 +1615,9 @@
           </a:lstStyle>
           <a:p>
             <a:r>
-              <a:rPr lang="en-US" smtClean="0"/>
+              <a:rPr lang="en-US"/>
               <a:t>Click to edit Master title style</a:t>
             </a:r>
-            <a:endParaRPr lang="en-US"/>
           </a:p>
         </p:txBody>
       </p:sp>
@@ -1636,7 +1680,7 @@
           <a:p>
             <a:pPr lvl="0"/>
             <a:r>
-              <a:rPr lang="en-US" smtClean="0"/>
+              <a:rPr lang="en-US"/>
               <a:t>Click to edit Master text styles</a:t>
             </a:r>
           </a:p>
@@ -1692,38 +1736,37 @@
           <a:p>
             <a:pPr lvl="0"/>
             <a:r>
-              <a:rPr lang="en-US" smtClean="0"/>
+              <a:rPr lang="en-US"/>
               <a:t>Click to edit Master text styles</a:t>
             </a:r>
           </a:p>
           <a:p>
             <a:pPr lvl="1"/>
             <a:r>
-              <a:rPr lang="en-US" smtClean="0"/>
+              <a:rPr lang="en-US"/>
               <a:t>Second level</a:t>
             </a:r>
           </a:p>
           <a:p>
             <a:pPr lvl="2"/>
             <a:r>
-              <a:rPr lang="en-US" smtClean="0"/>
+              <a:rPr lang="en-US"/>
               <a:t>Third level</a:t>
             </a:r>
           </a:p>
           <a:p>
             <a:pPr lvl="3"/>
             <a:r>
-              <a:rPr lang="en-US" smtClean="0"/>
+              <a:rPr lang="en-US"/>
               <a:t>Fourth level</a:t>
             </a:r>
           </a:p>
           <a:p>
             <a:pPr lvl="4"/>
             <a:r>
-              <a:rPr lang="en-US" smtClean="0"/>
+              <a:rPr lang="en-US"/>
               <a:t>Fifth level</a:t>
             </a:r>
-            <a:endParaRPr lang="en-US"/>
           </a:p>
         </p:txBody>
       </p:sp>
@@ -1786,7 +1829,7 @@
           <a:p>
             <a:pPr lvl="0"/>
             <a:r>
-              <a:rPr lang="en-US" smtClean="0"/>
+              <a:rPr lang="en-US"/>
               <a:t>Click to edit Master text styles</a:t>
             </a:r>
           </a:p>
@@ -1842,38 +1885,37 @@
           <a:p>
             <a:pPr lvl="0"/>
             <a:r>
-              <a:rPr lang="en-US" smtClean="0"/>
+              <a:rPr lang="en-US"/>
               <a:t>Click to edit Master text styles</a:t>
             </a:r>
           </a:p>
           <a:p>
             <a:pPr lvl="1"/>
             <a:r>
-              <a:rPr lang="en-US" smtClean="0"/>
+              <a:rPr lang="en-US"/>
               <a:t>Second level</a:t>
             </a:r>
           </a:p>
           <a:p>
             <a:pPr lvl="2"/>
             <a:r>
-              <a:rPr lang="en-US" smtClean="0"/>
+              <a:rPr lang="en-US"/>
               <a:t>Third level</a:t>
             </a:r>
           </a:p>
           <a:p>
             <a:pPr lvl="3"/>
             <a:r>
-              <a:rPr lang="en-US" smtClean="0"/>
+              <a:rPr lang="en-US"/>
               <a:t>Fourth level</a:t>
             </a:r>
           </a:p>
           <a:p>
             <a:pPr lvl="4"/>
             <a:r>
-              <a:rPr lang="en-US" smtClean="0"/>
+              <a:rPr lang="en-US"/>
               <a:t>Fifth level</a:t>
             </a:r>
-            <a:endParaRPr lang="en-US"/>
           </a:p>
         </p:txBody>
       </p:sp>
@@ -1894,7 +1936,7 @@
           <a:p>
             <a:fld id="{5BCAD085-E8A6-8845-BD4E-CB4CCA059FC4}" type="datetimeFigureOut">
               <a:rPr lang="en-US" smtClean="0"/>
-              <a:t>1/27/13</a:t>
+              <a:t>6/27/2026</a:t>
             </a:fld>
             <a:endParaRPr lang="en-US"/>
           </a:p>
@@ -1988,10 +2030,9 @@
           <a:lstStyle/>
           <a:p>
             <a:r>
-              <a:rPr lang="en-US" smtClean="0"/>
+              <a:rPr lang="en-US"/>
               <a:t>Click to edit Master title style</a:t>
             </a:r>
-            <a:endParaRPr lang="en-US"/>
           </a:p>
         </p:txBody>
       </p:sp>
@@ -2012,7 +2053,7 @@
           <a:p>
             <a:fld id="{5BCAD085-E8A6-8845-BD4E-CB4CCA059FC4}" type="datetimeFigureOut">
               <a:rPr lang="en-US" smtClean="0"/>
-              <a:t>1/27/13</a:t>
+              <a:t>6/27/2026</a:t>
             </a:fld>
             <a:endParaRPr lang="en-US"/>
           </a:p>
@@ -2107,7 +2148,7 @@
           <a:p>
             <a:fld id="{5BCAD085-E8A6-8845-BD4E-CB4CCA059FC4}" type="datetimeFigureOut">
               <a:rPr lang="en-US" smtClean="0"/>
-              <a:t>1/27/13</a:t>
+              <a:t>6/27/2026</a:t>
             </a:fld>
             <a:endParaRPr lang="en-US"/>
           </a:p>
@@ -2210,10 +2251,9 @@
           </a:lstStyle>
           <a:p>
             <a:r>
-              <a:rPr lang="en-US" smtClean="0"/>
+              <a:rPr lang="en-US"/>
               <a:t>Click to edit Master title style</a:t>
             </a:r>
-            <a:endParaRPr lang="en-US"/>
           </a:p>
         </p:txBody>
       </p:sp>
@@ -2267,38 +2307,37 @@
           <a:p>
             <a:pPr lvl="0"/>
             <a:r>
-              <a:rPr lang="en-US" smtClean="0"/>
+              <a:rPr lang="en-US"/>
               <a:t>Click to edit Master text styles</a:t>
             </a:r>
           </a:p>
           <a:p>
             <a:pPr lvl="1"/>
             <a:r>
-              <a:rPr lang="en-US" smtClean="0"/>
+              <a:rPr lang="en-US"/>
               <a:t>Second level</a:t>
             </a:r>
           </a:p>
           <a:p>
             <a:pPr lvl="2"/>
             <a:r>
-              <a:rPr lang="en-US" smtClean="0"/>
+              <a:rPr lang="en-US"/>
               <a:t>Third level</a:t>
             </a:r>
           </a:p>
           <a:p>
             <a:pPr lvl="3"/>
             <a:r>
-              <a:rPr lang="en-US" smtClean="0"/>
+              <a:rPr lang="en-US"/>
               <a:t>Fourth level</a:t>
             </a:r>
           </a:p>
           <a:p>
             <a:pPr lvl="4"/>
             <a:r>
-              <a:rPr lang="en-US" smtClean="0"/>
+              <a:rPr lang="en-US"/>
               <a:t>Fifth level</a:t>
             </a:r>
-            <a:endParaRPr lang="en-US"/>
           </a:p>
         </p:txBody>
       </p:sp>
@@ -2361,7 +2400,7 @@
           <a:p>
             <a:pPr lvl="0"/>
             <a:r>
-              <a:rPr lang="en-US" smtClean="0"/>
+              <a:rPr lang="en-US"/>
               <a:t>Click to edit Master text styles</a:t>
             </a:r>
           </a:p>
@@ -2384,7 +2423,7 @@
           <a:p>
             <a:fld id="{5BCAD085-E8A6-8845-BD4E-CB4CCA059FC4}" type="datetimeFigureOut">
               <a:rPr lang="en-US" smtClean="0"/>
-              <a:t>1/27/13</a:t>
+              <a:t>6/27/2026</a:t>
             </a:fld>
             <a:endParaRPr lang="en-US"/>
           </a:p>
@@ -2487,10 +2526,9 @@
           </a:lstStyle>
           <a:p>
             <a:r>
-              <a:rPr lang="en-US" smtClean="0"/>
+              <a:rPr lang="en-US"/>
               <a:t>Click to edit Master title style</a:t>
             </a:r>
-            <a:endParaRPr lang="en-US"/>
           </a:p>
         </p:txBody>
       </p:sp>
@@ -2614,7 +2652,7 @@
           <a:p>
             <a:pPr lvl="0"/>
             <a:r>
-              <a:rPr lang="en-US" smtClean="0"/>
+              <a:rPr lang="en-US"/>
               <a:t>Click to edit Master text styles</a:t>
             </a:r>
           </a:p>
@@ -2637,7 +2675,7 @@
           <a:p>
             <a:fld id="{5BCAD085-E8A6-8845-BD4E-CB4CCA059FC4}" type="datetimeFigureOut">
               <a:rPr lang="en-US" smtClean="0"/>
-              <a:t>1/27/13</a:t>
+              <a:t>6/27/2026</a:t>
             </a:fld>
             <a:endParaRPr lang="en-US"/>
           </a:p>
@@ -2746,10 +2784,9 @@
           <a:lstStyle/>
           <a:p>
             <a:r>
-              <a:rPr lang="en-US" smtClean="0"/>
+              <a:rPr lang="en-US"/>
               <a:t>Click to edit Master title style</a:t>
             </a:r>
-            <a:endParaRPr lang="en-US"/>
           </a:p>
         </p:txBody>
       </p:sp>
@@ -2780,38 +2817,37 @@
           <a:p>
             <a:pPr lvl="0"/>
             <a:r>
-              <a:rPr lang="en-US" smtClean="0"/>
+              <a:rPr lang="en-US"/>
               <a:t>Click to edit Master text styles</a:t>
             </a:r>
           </a:p>
           <a:p>
             <a:pPr lvl="1"/>
             <a:r>
-              <a:rPr lang="en-US" smtClean="0"/>
+              <a:rPr lang="en-US"/>
               <a:t>Second level</a:t>
             </a:r>
           </a:p>
           <a:p>
             <a:pPr lvl="2"/>
             <a:r>
-              <a:rPr lang="en-US" smtClean="0"/>
+              <a:rPr lang="en-US"/>
               <a:t>Third level</a:t>
             </a:r>
           </a:p>
           <a:p>
             <a:pPr lvl="3"/>
             <a:r>
-              <a:rPr lang="en-US" smtClean="0"/>
+              <a:rPr lang="en-US"/>
               <a:t>Fourth level</a:t>
             </a:r>
           </a:p>
           <a:p>
             <a:pPr lvl="4"/>
             <a:r>
-              <a:rPr lang="en-US" smtClean="0"/>
+              <a:rPr lang="en-US"/>
               <a:t>Fifth level</a:t>
             </a:r>
-            <a:endParaRPr lang="en-US"/>
           </a:p>
         </p:txBody>
       </p:sp>
@@ -2850,7 +2886,7 @@
           <a:p>
             <a:fld id="{5BCAD085-E8A6-8845-BD4E-CB4CCA059FC4}" type="datetimeFigureOut">
               <a:rPr lang="en-US" smtClean="0"/>
-              <a:t>1/27/13</a:t>
+              <a:t>6/27/2026</a:t>
             </a:fld>
             <a:endParaRPr lang="en-US"/>
           </a:p>
@@ -3209,7 +3245,7 @@
 </file>
 
 <file path=ppt/slides/slide1.xml><?xml version="1.0" encoding="utf-8"?>
-<p:sld xmlns:a="http://schemas.openxmlformats.org/drawingml/2006/main" xmlns:p="http://schemas.openxmlformats.org/presentationml/2006/main" xmlns:r="http://schemas.openxmlformats.org/officeDocument/2006/relationships">
+<p:sld xmlns:a="http://schemas.openxmlformats.org/drawingml/2006/main" xmlns:r="http://schemas.openxmlformats.org/officeDocument/2006/relationships" xmlns:p="http://schemas.openxmlformats.org/presentationml/2006/main">
   <p:cSld>
     <p:spTree>
       <p:nvGrpSpPr>
@@ -3217,7 +3253,14 @@
         <p:cNvGrpSpPr/>
         <p:nvPr/>
       </p:nvGrpSpPr>
-      <p:grpSpPr/>
+      <p:grpSpPr>
+        <a:xfrm>
+          <a:off x="0" y="0"/>
+          <a:ext cx="0" cy="0"/>
+          <a:chOff x="0" y="0"/>
+          <a:chExt cx="0" cy="0"/>
+        </a:xfrm>
+      </p:grpSpPr>
       <p:sp>
         <p:nvSpPr>
           <p:cNvPr id="2" name="Rectangle 1"/>
@@ -3259,6 +3302,7 @@
           <a:lstStyle/>
           <a:p>
             <a:pPr algn="ctr"/>
+            <a:endParaRPr/>
           </a:p>
         </p:txBody>
       </p:sp>
@@ -3279,7 +3323,7 @@
           <a:noFill/>
         </p:spPr>
         <p:txBody>
-          <a:bodyPr wrap="square" anchor="t" lIns="0" rIns="0" tIns="0" bIns="0">
+          <a:bodyPr wrap="square" lIns="0" tIns="0" rIns="0" bIns="0" anchor="t">
             <a:spAutoFit/>
           </a:bodyPr>
           <a:lstStyle/>
@@ -3318,7 +3362,7 @@
           <a:noFill/>
         </p:spPr>
         <p:txBody>
-          <a:bodyPr wrap="square" anchor="t" lIns="0" rIns="0" tIns="0" bIns="0">
+          <a:bodyPr wrap="square" lIns="0" tIns="0" rIns="0" bIns="0" anchor="t">
             <a:spAutoFit/>
           </a:bodyPr>
           <a:lstStyle/>
@@ -3357,7 +3401,7 @@
           <a:noFill/>
         </p:spPr>
         <p:txBody>
-          <a:bodyPr wrap="square" anchor="t" lIns="0" rIns="0" tIns="0" bIns="0">
+          <a:bodyPr wrap="square" lIns="0" tIns="0" rIns="0" bIns="0" anchor="t">
             <a:spAutoFit/>
           </a:bodyPr>
           <a:lstStyle/>
@@ -3396,7 +3440,7 @@
           <a:noFill/>
         </p:spPr>
         <p:txBody>
-          <a:bodyPr wrap="square" anchor="t" lIns="0" rIns="0" tIns="0" bIns="0">
+          <a:bodyPr wrap="square" lIns="0" tIns="0" rIns="0" bIns="0" anchor="t">
             <a:spAutoFit/>
           </a:bodyPr>
           <a:lstStyle/>
@@ -3435,7 +3479,7 @@
           <a:noFill/>
         </p:spPr>
         <p:txBody>
-          <a:bodyPr wrap="square" anchor="t" lIns="0" rIns="0" tIns="0" bIns="0">
+          <a:bodyPr wrap="square" lIns="0" tIns="0" rIns="0" bIns="0" anchor="t">
             <a:spAutoFit/>
           </a:bodyPr>
           <a:lstStyle/>
@@ -3466,7 +3510,7 @@
 </file>
 
 <file path=ppt/slides/slide10.xml><?xml version="1.0" encoding="utf-8"?>
-<p:sld xmlns:a="http://schemas.openxmlformats.org/drawingml/2006/main" xmlns:p="http://schemas.openxmlformats.org/presentationml/2006/main" xmlns:r="http://schemas.openxmlformats.org/officeDocument/2006/relationships">
+<p:sld xmlns:a="http://schemas.openxmlformats.org/drawingml/2006/main" xmlns:r="http://schemas.openxmlformats.org/officeDocument/2006/relationships" xmlns:p="http://schemas.openxmlformats.org/presentationml/2006/main">
   <p:cSld>
     <p:spTree>
       <p:nvGrpSpPr>
@@ -3474,17 +3518,69 @@
         <p:cNvGrpSpPr/>
         <p:nvPr/>
       </p:nvGrpSpPr>
-      <p:grpSpPr/>
-      <p:sp>
-        <p:nvSpPr>
-          <p:cNvPr id="2" name="TextBox 1"/>
+      <p:grpSpPr>
+        <a:xfrm>
+          <a:off x="0" y="0"/>
+          <a:ext cx="0" cy="0"/>
+          <a:chOff x="0" y="0"/>
+          <a:chExt cx="0" cy="0"/>
+        </a:xfrm>
+      </p:grpSpPr>
+      <p:sp>
+        <p:nvSpPr>
+          <p:cNvPr id="2" name="Rectangle 1"/>
+          <p:cNvSpPr/>
+          <p:nvPr/>
+        </p:nvSpPr>
+        <p:spPr>
+          <a:xfrm>
+            <a:off x="0" y="0"/>
+            <a:ext cx="12191695" cy="914400"/>
+          </a:xfrm>
+          <a:prstGeom prst="rect">
+            <a:avLst/>
+          </a:prstGeom>
+          <a:solidFill>
+            <a:srgbClr val="111111"/>
+          </a:solidFill>
+          <a:ln>
+            <a:noFill/>
+          </a:ln>
+          <a:effectLst/>
+        </p:spPr>
+        <p:style>
+          <a:lnRef idx="1">
+            <a:schemeClr val="accent1"/>
+          </a:lnRef>
+          <a:fillRef idx="3">
+            <a:schemeClr val="accent1"/>
+          </a:fillRef>
+          <a:effectRef idx="2">
+            <a:schemeClr val="accent1"/>
+          </a:effectRef>
+          <a:fontRef idx="minor">
+            <a:schemeClr val="lt1"/>
+          </a:fontRef>
+        </p:style>
+        <p:txBody>
+          <a:bodyPr rtlCol="0" anchor="ctr"/>
+          <a:lstStyle/>
+          <a:p>
+            <a:pPr algn="ctr"/>
+            <a:endParaRPr/>
+          </a:p>
+        </p:txBody>
+      </p:sp>
+      <p:sp>
+        <p:nvSpPr>
+          <p:cNvPr id="3" name="TextBox 2"/>
           <p:cNvSpPr txBox="1"/>
           <p:nvPr/>
         </p:nvSpPr>
         <p:spPr>
           <a:xfrm>
-            <a:off x="731520" y="822960"/>
-            <a:ext cx="2743200" cy="1828800"/>
+            <a:off x="640080" y="118872"/>
+            <a:ext cx="8168335" cy="219456"/>
           </a:xfrm>
           <a:prstGeom prst="rect">
             <a:avLst/>
@@ -3492,7 +3588,7 @@
           <a:noFill/>
         </p:spPr>
         <p:txBody>
-          <a:bodyPr wrap="square" anchor="t" lIns="0" rIns="0" tIns="0" bIns="0">
+          <a:bodyPr wrap="square" lIns="0" tIns="0" rIns="0" bIns="0" anchor="t">
             <a:spAutoFit/>
           </a:bodyPr>
           <a:lstStyle/>
@@ -3503,27 +3599,27 @@
               </a:lnSpc>
             </a:pPr>
             <a:r>
-              <a:rPr sz="16000" b="1" i="0">
-                <a:solidFill>
-                  <a:srgbClr val="2F5597"/>
-                </a:solidFill>
-                <a:latin typeface="Calibri"/>
-              </a:rPr>
-              <a:t>“</a:t>
-            </a:r>
-          </a:p>
-        </p:txBody>
-      </p:sp>
-      <p:sp>
-        <p:nvSpPr>
-          <p:cNvPr id="3" name="TextBox 2"/>
+              <a:rPr sz="1100" b="1" i="0">
+                <a:solidFill>
+                  <a:srgbClr val="FFFFFF"/>
+                </a:solidFill>
+                <a:latin typeface="Calibri"/>
+              </a:rPr>
+              <a:t>LAYOUTS</a:t>
+            </a:r>
+          </a:p>
+        </p:txBody>
+      </p:sp>
+      <p:sp>
+        <p:nvSpPr>
+          <p:cNvPr id="4" name="TextBox 3"/>
           <p:cNvSpPr txBox="1"/>
           <p:nvPr/>
         </p:nvSpPr>
         <p:spPr>
           <a:xfrm>
-            <a:off x="1463040" y="2103120"/>
-            <a:ext cx="9265615" cy="2743200"/>
+            <a:off x="640080" y="347472"/>
+            <a:ext cx="8168335" cy="493776"/>
           </a:xfrm>
           <a:prstGeom prst="rect">
             <a:avLst/>
@@ -3531,38 +3627,38 @@
           <a:noFill/>
         </p:spPr>
         <p:txBody>
-          <a:bodyPr wrap="square" anchor="ctr" lIns="0" rIns="0" tIns="0" bIns="0">
+          <a:bodyPr wrap="square" lIns="0" tIns="0" rIns="0" bIns="0" anchor="t">
             <a:spAutoFit/>
           </a:bodyPr>
           <a:lstStyle/>
           <a:p>
             <a:pPr algn="l">
               <a:lnSpc>
-                <a:spcPct val="120000"/>
-              </a:lnSpc>
-            </a:pPr>
-            <a:r>
-              <a:rPr sz="3200" b="0" i="1">
-                <a:solidFill>
-                  <a:srgbClr val="111111"/>
-                </a:solidFill>
-                <a:latin typeface="Calibri"/>
-              </a:rPr>
-              <a:t>Slides support the speaker — they aren't the document. One idea per slide.</a:t>
-            </a:r>
-          </a:p>
-        </p:txBody>
-      </p:sp>
-      <p:sp>
-        <p:nvSpPr>
-          <p:cNvPr id="4" name="TextBox 3"/>
+                <a:spcPct val="105000"/>
+              </a:lnSpc>
+            </a:pPr>
+            <a:r>
+              <a:rPr sz="3000" b="1" i="0">
+                <a:solidFill>
+                  <a:srgbClr val="FFFFFF"/>
+                </a:solidFill>
+                <a:latin typeface="Calibri"/>
+              </a:rPr>
+              <a:t>A Layout for Every Job</a:t>
+            </a:r>
+          </a:p>
+        </p:txBody>
+      </p:sp>
+      <p:sp>
+        <p:nvSpPr>
+          <p:cNvPr id="5" name="TextBox 4"/>
           <p:cNvSpPr txBox="1"/>
           <p:nvPr/>
         </p:nvSpPr>
         <p:spPr>
           <a:xfrm>
-            <a:off x="1463040" y="5120640"/>
-            <a:ext cx="9265615" cy="548640"/>
+            <a:off x="640080" y="1024128"/>
+            <a:ext cx="10911535" cy="457200"/>
           </a:xfrm>
           <a:prstGeom prst="rect">
             <a:avLst/>
@@ -3570,7 +3666,7 @@
           <a:noFill/>
         </p:spPr>
         <p:txBody>
-          <a:bodyPr wrap="square" anchor="t" lIns="0" rIns="0" tIns="0" bIns="0">
+          <a:bodyPr wrap="square" lIns="0" tIns="0" rIns="0" bIns="0" anchor="t">
             <a:spAutoFit/>
           </a:bodyPr>
           <a:lstStyle/>
@@ -3581,20 +3677,296 @@
               </a:lnSpc>
             </a:pPr>
             <a:r>
-              <a:rPr sz="2200" b="1" i="0">
-                <a:solidFill>
-                  <a:srgbClr val="7F7F7F"/>
-                </a:solidFill>
-                <a:latin typeface="Calibri"/>
-              </a:rPr>
-              <a:t>— The skill's design guidance</a:t>
-            </a:r>
-          </a:p>
-        </p:txBody>
-      </p:sp>
-      <p:sp>
-        <p:nvSpPr>
-          <p:cNvPr id="5" name="TextBox 4"/>
+              <a:rPr sz="2600" b="0" i="1">
+                <a:solidFill>
+                  <a:srgbClr val="595959"/>
+                </a:solidFill>
+                <a:latin typeface="Calibri"/>
+              </a:rPr>
+              <a:t>Thirteen layouts so the slide fits the message, not the reverse.</a:t>
+            </a:r>
+          </a:p>
+        </p:txBody>
+      </p:sp>
+      <p:sp>
+        <p:nvSpPr>
+          <p:cNvPr id="6" name="TextBox 5"/>
+          <p:cNvSpPr txBox="1"/>
+          <p:nvPr/>
+        </p:nvSpPr>
+        <p:spPr>
+          <a:xfrm>
+            <a:off x="640080" y="1737360"/>
+            <a:ext cx="5181447" cy="457200"/>
+          </a:xfrm>
+          <a:prstGeom prst="rect">
+            <a:avLst/>
+          </a:prstGeom>
+          <a:noFill/>
+        </p:spPr>
+        <p:txBody>
+          <a:bodyPr wrap="square" lIns="0" tIns="0" rIns="0" bIns="0" anchor="t">
+            <a:spAutoFit/>
+          </a:bodyPr>
+          <a:lstStyle/>
+          <a:p>
+            <a:pPr algn="l">
+              <a:lnSpc>
+                <a:spcPct val="105000"/>
+              </a:lnSpc>
+            </a:pPr>
+            <a:r>
+              <a:rPr sz="2600" b="1" i="0">
+                <a:solidFill>
+                  <a:srgbClr val="595959"/>
+                </a:solidFill>
+                <a:latin typeface="Calibri"/>
+              </a:rPr>
+              <a:t>Framing &amp; text</a:t>
+            </a:r>
+          </a:p>
+        </p:txBody>
+      </p:sp>
+      <p:sp>
+        <p:nvSpPr>
+          <p:cNvPr id="7" name="TextBox 6"/>
+          <p:cNvSpPr txBox="1"/>
+          <p:nvPr/>
+        </p:nvSpPr>
+        <p:spPr>
+          <a:xfrm>
+            <a:off x="640080" y="2286000"/>
+            <a:ext cx="5181447" cy="3931920"/>
+          </a:xfrm>
+          <a:prstGeom prst="rect">
+            <a:avLst/>
+          </a:prstGeom>
+          <a:noFill/>
+        </p:spPr>
+        <p:txBody>
+          <a:bodyPr wrap="square" lIns="0" tIns="0" rIns="0" bIns="0" anchor="t">
+            <a:spAutoFit/>
+          </a:bodyPr>
+          <a:lstStyle/>
+          <a:p>
+            <a:pPr algn="l">
+              <a:lnSpc>
+                <a:spcPct val="110000"/>
+              </a:lnSpc>
+              <a:spcAft>
+                <a:spcPts val="1000"/>
+              </a:spcAft>
+            </a:pPr>
+            <a:r>
+              <a:rPr sz="2200" b="0" i="0">
+                <a:solidFill>
+                  <a:srgbClr val="1A1A1A"/>
+                </a:solidFill>
+                <a:latin typeface="Calibri"/>
+              </a:rPr>
+              <a:t>●  title, section, closing</a:t>
+            </a:r>
+          </a:p>
+          <a:p>
+            <a:pPr algn="l">
+              <a:lnSpc>
+                <a:spcPct val="110000"/>
+              </a:lnSpc>
+              <a:spcAft>
+                <a:spcPts val="1000"/>
+              </a:spcAft>
+            </a:pPr>
+            <a:r>
+              <a:rPr sz="2200" b="0" i="0">
+                <a:solidFill>
+                  <a:srgbClr val="1A1A1A"/>
+                </a:solidFill>
+                <a:latin typeface="Calibri"/>
+              </a:rPr>
+              <a:t>●  bullets, content</a:t>
+            </a:r>
+          </a:p>
+          <a:p>
+            <a:pPr algn="l">
+              <a:lnSpc>
+                <a:spcPct val="110000"/>
+              </a:lnSpc>
+              <a:spcAft>
+                <a:spcPts val="1000"/>
+              </a:spcAft>
+            </a:pPr>
+            <a:r>
+              <a:rPr sz="2200" b="0" i="0">
+                <a:solidFill>
+                  <a:srgbClr val="1A1A1A"/>
+                </a:solidFill>
+                <a:latin typeface="Calibri"/>
+              </a:rPr>
+              <a:t>●  two_column, comparison</a:t>
+            </a:r>
+          </a:p>
+          <a:p>
+            <a:pPr algn="l">
+              <a:lnSpc>
+                <a:spcPct val="110000"/>
+              </a:lnSpc>
+              <a:spcAft>
+                <a:spcPts val="1000"/>
+              </a:spcAft>
+            </a:pPr>
+            <a:r>
+              <a:rPr sz="2200" b="0" i="0">
+                <a:solidFill>
+                  <a:srgbClr val="1A1A1A"/>
+                </a:solidFill>
+                <a:latin typeface="Calibri"/>
+              </a:rPr>
+              <a:t>●  quote</a:t>
+            </a:r>
+          </a:p>
+        </p:txBody>
+      </p:sp>
+      <p:sp>
+        <p:nvSpPr>
+          <p:cNvPr id="8" name="TextBox 7"/>
+          <p:cNvSpPr txBox="1"/>
+          <p:nvPr/>
+        </p:nvSpPr>
+        <p:spPr>
+          <a:xfrm>
+            <a:off x="6370167" y="1737360"/>
+            <a:ext cx="5181447" cy="457200"/>
+          </a:xfrm>
+          <a:prstGeom prst="rect">
+            <a:avLst/>
+          </a:prstGeom>
+          <a:noFill/>
+        </p:spPr>
+        <p:txBody>
+          <a:bodyPr wrap="square" lIns="0" tIns="0" rIns="0" bIns="0" anchor="t">
+            <a:spAutoFit/>
+          </a:bodyPr>
+          <a:lstStyle/>
+          <a:p>
+            <a:pPr algn="l">
+              <a:lnSpc>
+                <a:spcPct val="105000"/>
+              </a:lnSpc>
+            </a:pPr>
+            <a:r>
+              <a:rPr sz="2600" b="1" i="0">
+                <a:solidFill>
+                  <a:srgbClr val="595959"/>
+                </a:solidFill>
+                <a:latin typeface="Calibri"/>
+              </a:rPr>
+              <a:t>Data &amp; visuals</a:t>
+            </a:r>
+          </a:p>
+        </p:txBody>
+      </p:sp>
+      <p:sp>
+        <p:nvSpPr>
+          <p:cNvPr id="9" name="TextBox 8"/>
+          <p:cNvSpPr txBox="1"/>
+          <p:nvPr/>
+        </p:nvSpPr>
+        <p:spPr>
+          <a:xfrm>
+            <a:off x="6370167" y="2286000"/>
+            <a:ext cx="5181447" cy="3931920"/>
+          </a:xfrm>
+          <a:prstGeom prst="rect">
+            <a:avLst/>
+          </a:prstGeom>
+          <a:noFill/>
+        </p:spPr>
+        <p:txBody>
+          <a:bodyPr wrap="square" lIns="0" tIns="0" rIns="0" bIns="0" anchor="t">
+            <a:spAutoFit/>
+          </a:bodyPr>
+          <a:lstStyle/>
+          <a:p>
+            <a:pPr algn="l">
+              <a:lnSpc>
+                <a:spcPct val="110000"/>
+              </a:lnSpc>
+              <a:spcAft>
+                <a:spcPts val="1000"/>
+              </a:spcAft>
+            </a:pPr>
+            <a:r>
+              <a:rPr sz="2200" b="0" i="0">
+                <a:solidFill>
+                  <a:srgbClr val="1A1A1A"/>
+                </a:solidFill>
+                <a:latin typeface="Calibri"/>
+              </a:rPr>
+              <a:t>●  metrics — KPI cards</a:t>
+            </a:r>
+          </a:p>
+          <a:p>
+            <a:pPr algn="l">
+              <a:lnSpc>
+                <a:spcPct val="110000"/>
+              </a:lnSpc>
+              <a:spcAft>
+                <a:spcPts val="1000"/>
+              </a:spcAft>
+            </a:pPr>
+            <a:r>
+              <a:rPr sz="2200" b="0" i="0">
+                <a:solidFill>
+                  <a:srgbClr val="1A1A1A"/>
+                </a:solidFill>
+                <a:latin typeface="Calibri"/>
+              </a:rPr>
+              <a:t>●  table — data grids</a:t>
+            </a:r>
+          </a:p>
+          <a:p>
+            <a:pPr algn="l">
+              <a:lnSpc>
+                <a:spcPct val="110000"/>
+              </a:lnSpc>
+              <a:spcAft>
+                <a:spcPts val="1000"/>
+              </a:spcAft>
+            </a:pPr>
+            <a:r>
+              <a:rPr sz="2200" b="0" i="0">
+                <a:solidFill>
+                  <a:srgbClr val="1A1A1A"/>
+                </a:solidFill>
+                <a:latin typeface="Calibri"/>
+              </a:rPr>
+              <a:t>●  chart, diagram</a:t>
+            </a:r>
+          </a:p>
+          <a:p>
+            <a:pPr algn="l">
+              <a:lnSpc>
+                <a:spcPct val="110000"/>
+              </a:lnSpc>
+              <a:spcAft>
+                <a:spcPts val="1000"/>
+              </a:spcAft>
+            </a:pPr>
+            <a:r>
+              <a:rPr sz="2200" b="0" i="0">
+                <a:solidFill>
+                  <a:srgbClr val="1A1A1A"/>
+                </a:solidFill>
+                <a:latin typeface="Calibri"/>
+              </a:rPr>
+              <a:t>●  image — pictures + text</a:t>
+            </a:r>
+          </a:p>
+        </p:txBody>
+      </p:sp>
+      <p:sp>
+        <p:nvSpPr>
+          <p:cNvPr id="10" name="TextBox 9"/>
           <p:cNvSpPr txBox="1"/>
           <p:nvPr/>
         </p:nvSpPr>
@@ -3609,7 +3981,7 @@
           <a:noFill/>
         </p:spPr>
         <p:txBody>
-          <a:bodyPr wrap="square" anchor="t" lIns="0" rIns="0" tIns="0" bIns="0">
+          <a:bodyPr wrap="square" lIns="0" tIns="0" rIns="0" bIns="0" anchor="t">
             <a:spAutoFit/>
           </a:bodyPr>
           <a:lstStyle/>
@@ -3626,14 +3998,14 @@
                 </a:solidFill>
                 <a:latin typeface="Calibri"/>
               </a:rPr>
-              <a:t>10</a:t>
-            </a:r>
-          </a:p>
-        </p:txBody>
-      </p:sp>
-      <p:sp>
-        <p:nvSpPr>
-          <p:cNvPr id="6" name="TextBox 5"/>
+              <a:t>8</a:t>
+            </a:r>
+          </a:p>
+        </p:txBody>
+      </p:sp>
+      <p:sp>
+        <p:nvSpPr>
+          <p:cNvPr id="11" name="TextBox 10"/>
           <p:cNvSpPr txBox="1"/>
           <p:nvPr/>
         </p:nvSpPr>
@@ -3648,7 +4020,7 @@
           <a:noFill/>
         </p:spPr>
         <p:txBody>
-          <a:bodyPr wrap="square" anchor="t" lIns="0" rIns="0" tIns="0" bIns="0">
+          <a:bodyPr wrap="square" lIns="0" tIns="0" rIns="0" bIns="0" anchor="t">
             <a:spAutoFit/>
           </a:bodyPr>
           <a:lstStyle/>
@@ -3661,7 +4033,7 @@
             <a:r>
               <a:rPr sz="1800" b="1" i="0">
                 <a:solidFill>
-                  <a:srgbClr val="111111"/>
+                  <a:srgbClr val="FFFFFF"/>
                 </a:solidFill>
                 <a:latin typeface="Calibri"/>
               </a:rPr>
@@ -3679,7 +4051,7 @@
 </file>
 
 <file path=ppt/slides/slide11.xml><?xml version="1.0" encoding="utf-8"?>
-<p:sld xmlns:a="http://schemas.openxmlformats.org/drawingml/2006/main" xmlns:p="http://schemas.openxmlformats.org/presentationml/2006/main" xmlns:r="http://schemas.openxmlformats.org/officeDocument/2006/relationships">
+<p:sld xmlns:a="http://schemas.openxmlformats.org/drawingml/2006/main" xmlns:r="http://schemas.openxmlformats.org/officeDocument/2006/relationships" xmlns:p="http://schemas.openxmlformats.org/presentationml/2006/main">
   <p:cSld>
     <p:spTree>
       <p:nvGrpSpPr>
@@ -3687,7 +4059,14 @@
         <p:cNvGrpSpPr/>
         <p:nvPr/>
       </p:nvGrpSpPr>
-      <p:grpSpPr/>
+      <p:grpSpPr>
+        <a:xfrm>
+          <a:off x="0" y="0"/>
+          <a:ext cx="0" cy="0"/>
+          <a:chOff x="0" y="0"/>
+          <a:chExt cx="0" cy="0"/>
+        </a:xfrm>
+      </p:grpSpPr>
       <p:sp>
         <p:nvSpPr>
           <p:cNvPr id="2" name="Rectangle 1"/>
@@ -3729,6 +4108,7 @@
           <a:lstStyle/>
           <a:p>
             <a:pPr algn="ctr"/>
+            <a:endParaRPr/>
           </a:p>
         </p:txBody>
       </p:sp>
@@ -3749,7 +4129,7 @@
           <a:noFill/>
         </p:spPr>
         <p:txBody>
-          <a:bodyPr wrap="square" anchor="t" lIns="0" rIns="0" tIns="0" bIns="0">
+          <a:bodyPr wrap="square" lIns="0" tIns="0" rIns="0" bIns="0" anchor="t">
             <a:spAutoFit/>
           </a:bodyPr>
           <a:lstStyle/>
@@ -3766,7 +4146,7 @@
                 </a:solidFill>
                 <a:latin typeface="Calibri"/>
               </a:rPr>
-              <a:t>ORIGINS</a:t>
+              <a:t>COVERAGE</a:t>
             </a:r>
           </a:p>
         </p:txBody>
@@ -3788,7 +4168,7 @@
           <a:noFill/>
         </p:spPr>
         <p:txBody>
-          <a:bodyPr wrap="square" anchor="t" lIns="0" rIns="0" tIns="0" bIns="0">
+          <a:bodyPr wrap="square" lIns="0" tIns="0" rIns="0" bIns="0" anchor="t">
             <a:spAutoFit/>
           </a:bodyPr>
           <a:lstStyle/>
@@ -3805,7 +4185,7 @@
                 </a:solidFill>
                 <a:latin typeface="Calibri"/>
               </a:rPr>
-              <a:t>Presenton Roots, Local Engine</a:t>
+              <a:t>Layouts Across Three Jobs</a:t>
             </a:r>
           </a:p>
         </p:txBody>
@@ -3827,7 +4207,7 @@
           <a:noFill/>
         </p:spPr>
         <p:txBody>
-          <a:bodyPr wrap="square" anchor="t" lIns="0" rIns="0" tIns="0" bIns="0">
+          <a:bodyPr wrap="square" lIns="0" tIns="0" rIns="0" bIns="0" anchor="t">
             <a:spAutoFit/>
           </a:bodyPr>
           <a:lstStyle/>
@@ -3844,21 +4224,39 @@
                 </a:solidFill>
                 <a:latin typeface="Calibri"/>
               </a:rPr>
-              <a:t>Same content-first pipeline — fully local, no server.</a:t>
-            </a:r>
-          </a:p>
-        </p:txBody>
-      </p:sp>
-      <p:sp>
-        <p:nvSpPr>
-          <p:cNvPr id="6" name="TextBox 5"/>
+              <a:t>Framing, text, and data — all covered from one spec.</a:t>
+            </a:r>
+          </a:p>
+        </p:txBody>
+      </p:sp>
+      <p:graphicFrame>
+        <p:nvGraphicFramePr>
+          <p:cNvPr id="6" name="Chart 5"/>
+          <p:cNvGraphicFramePr>
+            <a:graphicFrameLocks noGrp="1"/>
+          </p:cNvGraphicFramePr>
+          <p:nvPr/>
+        </p:nvGraphicFramePr>
+        <p:xfrm>
+          <a:off x="640080" y="1737360"/>
+          <a:ext cx="10911535" cy="4480560"/>
+        </p:xfrm>
+        <a:graphic>
+          <a:graphicData uri="http://schemas.openxmlformats.org/drawingml/2006/chart">
+            <c:chart xmlns:c="http://schemas.openxmlformats.org/drawingml/2006/chart" xmlns:r="http://schemas.openxmlformats.org/officeDocument/2006/relationships" r:id="rId2"/>
+          </a:graphicData>
+        </a:graphic>
+      </p:graphicFrame>
+      <p:sp>
+        <p:nvSpPr>
+          <p:cNvPr id="7" name="TextBox 6"/>
           <p:cNvSpPr txBox="1"/>
           <p:nvPr/>
         </p:nvSpPr>
         <p:spPr>
           <a:xfrm>
-            <a:off x="640080" y="1554480"/>
-            <a:ext cx="10911535" cy="4663440"/>
+            <a:off x="10454335" y="6291072"/>
+            <a:ext cx="1097280" cy="384048"/>
           </a:xfrm>
           <a:prstGeom prst="rect">
             <a:avLst/>
@@ -3866,110 +4264,11 @@
           <a:noFill/>
         </p:spPr>
         <p:txBody>
-          <a:bodyPr wrap="square" anchor="t" lIns="0" rIns="0" tIns="0" bIns="0">
+          <a:bodyPr wrap="square" lIns="0" tIns="0" rIns="0" bIns="0" anchor="t">
             <a:spAutoFit/>
           </a:bodyPr>
           <a:lstStyle/>
           <a:p>
-            <a:pPr algn="l">
-              <a:lnSpc>
-                <a:spcPct val="110000"/>
-              </a:lnSpc>
-              <a:spcAft>
-                <a:spcPts val="1000"/>
-              </a:spcAft>
-            </a:pPr>
-            <a:r>
-              <a:rPr sz="2200" b="1" i="0">
-                <a:solidFill>
-                  <a:srgbClr val="1A1A1A"/>
-                </a:solidFill>
-                <a:latin typeface="Calibri"/>
-              </a:rPr>
-              <a:t>●  Presenton's pipeline: content → layout → render</a:t>
-            </a:r>
-          </a:p>
-          <a:p>
-            <a:pPr algn="l">
-              <a:lnSpc>
-                <a:spcPct val="110000"/>
-              </a:lnSpc>
-              <a:spcAft>
-                <a:spcPts val="1000"/>
-              </a:spcAft>
-            </a:pPr>
-            <a:r>
-              <a:rPr sz="2200" b="1" i="0">
-                <a:solidFill>
-                  <a:srgbClr val="1A1A1A"/>
-                </a:solidFill>
-                <a:latin typeface="Calibri"/>
-              </a:rPr>
-              <a:t>●  Same approach, no server</a:t>
-            </a:r>
-          </a:p>
-          <a:p>
-            <a:pPr algn="l">
-              <a:lnSpc>
-                <a:spcPct val="110000"/>
-              </a:lnSpc>
-              <a:spcAft>
-                <a:spcPts val="1000"/>
-              </a:spcAft>
-            </a:pPr>
-            <a:r>
-              <a:rPr sz="2200" b="1" i="0">
-                <a:solidFill>
-                  <a:srgbClr val="1A1A1A"/>
-                </a:solidFill>
-                <a:latin typeface="Calibri"/>
-              </a:rPr>
-              <a:t>●  Editable .pptx via python-pptx</a:t>
-            </a:r>
-          </a:p>
-          <a:p>
-            <a:pPr algn="l">
-              <a:lnSpc>
-                <a:spcPct val="110000"/>
-              </a:lnSpc>
-              <a:spcAft>
-                <a:spcPts val="1000"/>
-              </a:spcAft>
-            </a:pPr>
-            <a:r>
-              <a:rPr sz="2200" b="1" i="0">
-                <a:solidFill>
-                  <a:srgbClr val="1A1A1A"/>
-                </a:solidFill>
-                <a:latin typeface="Calibri"/>
-              </a:rPr>
-              <a:t>●  Fully local — no API, no data egress</a:t>
-            </a:r>
-          </a:p>
-        </p:txBody>
-      </p:sp>
-      <p:sp>
-        <p:nvSpPr>
-          <p:cNvPr id="7" name="TextBox 6"/>
-          <p:cNvSpPr txBox="1"/>
-          <p:nvPr/>
-        </p:nvSpPr>
-        <p:spPr>
-          <a:xfrm>
-            <a:off x="10454335" y="6291072"/>
-            <a:ext cx="1097280" cy="384048"/>
-          </a:xfrm>
-          <a:prstGeom prst="rect">
-            <a:avLst/>
-          </a:prstGeom>
-          <a:noFill/>
-        </p:spPr>
-        <p:txBody>
-          <a:bodyPr wrap="square" anchor="t" lIns="0" rIns="0" tIns="0" bIns="0">
-            <a:spAutoFit/>
-          </a:bodyPr>
-          <a:lstStyle/>
-          <a:p>
             <a:pPr algn="r">
               <a:lnSpc>
                 <a:spcPct val="105000"/>
@@ -3982,7 +4281,7 @@
                 </a:solidFill>
                 <a:latin typeface="Calibri"/>
               </a:rPr>
-              <a:t>11</a:t>
+              <a:t>9</a:t>
             </a:r>
           </a:p>
         </p:txBody>
@@ -4004,7 +4303,7 @@
           <a:noFill/>
         </p:spPr>
         <p:txBody>
-          <a:bodyPr wrap="square" anchor="t" lIns="0" rIns="0" tIns="0" bIns="0">
+          <a:bodyPr wrap="square" lIns="0" tIns="0" rIns="0" bIns="0" anchor="t">
             <a:spAutoFit/>
           </a:bodyPr>
           <a:lstStyle/>
@@ -4035,7 +4334,7 @@
 </file>
 
 <file path=ppt/slides/slide12.xml><?xml version="1.0" encoding="utf-8"?>
-<p:sld xmlns:a="http://schemas.openxmlformats.org/drawingml/2006/main" xmlns:p="http://schemas.openxmlformats.org/presentationml/2006/main" xmlns:r="http://schemas.openxmlformats.org/officeDocument/2006/relationships">
+<p:sld xmlns:a="http://schemas.openxmlformats.org/drawingml/2006/main" xmlns:r="http://schemas.openxmlformats.org/officeDocument/2006/relationships" xmlns:p="http://schemas.openxmlformats.org/presentationml/2006/main">
   <p:cSld>
     <p:spTree>
       <p:nvGrpSpPr>
@@ -4043,7 +4342,234 @@
         <p:cNvGrpSpPr/>
         <p:nvPr/>
       </p:nvGrpSpPr>
-      <p:grpSpPr/>
+      <p:grpSpPr>
+        <a:xfrm>
+          <a:off x="0" y="0"/>
+          <a:ext cx="0" cy="0"/>
+          <a:chOff x="0" y="0"/>
+          <a:chExt cx="0" cy="0"/>
+        </a:xfrm>
+      </p:grpSpPr>
+      <p:sp>
+        <p:nvSpPr>
+          <p:cNvPr id="2" name="TextBox 1"/>
+          <p:cNvSpPr txBox="1"/>
+          <p:nvPr/>
+        </p:nvSpPr>
+        <p:spPr>
+          <a:xfrm>
+            <a:off x="731520" y="822960"/>
+            <a:ext cx="2743200" cy="1828800"/>
+          </a:xfrm>
+          <a:prstGeom prst="rect">
+            <a:avLst/>
+          </a:prstGeom>
+          <a:noFill/>
+        </p:spPr>
+        <p:txBody>
+          <a:bodyPr wrap="square" lIns="0" tIns="0" rIns="0" bIns="0" anchor="t">
+            <a:spAutoFit/>
+          </a:bodyPr>
+          <a:lstStyle/>
+          <a:p>
+            <a:pPr algn="l">
+              <a:lnSpc>
+                <a:spcPct val="105000"/>
+              </a:lnSpc>
+            </a:pPr>
+            <a:r>
+              <a:rPr sz="16000" b="1" i="0">
+                <a:solidFill>
+                  <a:srgbClr val="2F5597"/>
+                </a:solidFill>
+                <a:latin typeface="Calibri"/>
+              </a:rPr>
+              <a:t>“</a:t>
+            </a:r>
+          </a:p>
+        </p:txBody>
+      </p:sp>
+      <p:sp>
+        <p:nvSpPr>
+          <p:cNvPr id="3" name="TextBox 2"/>
+          <p:cNvSpPr txBox="1"/>
+          <p:nvPr/>
+        </p:nvSpPr>
+        <p:spPr>
+          <a:xfrm>
+            <a:off x="1463040" y="2103120"/>
+            <a:ext cx="9265615" cy="2743200"/>
+          </a:xfrm>
+          <a:prstGeom prst="rect">
+            <a:avLst/>
+          </a:prstGeom>
+          <a:noFill/>
+        </p:spPr>
+        <p:txBody>
+          <a:bodyPr wrap="square" lIns="0" tIns="0" rIns="0" bIns="0" anchor="ctr">
+            <a:spAutoFit/>
+          </a:bodyPr>
+          <a:lstStyle/>
+          <a:p>
+            <a:pPr algn="l">
+              <a:lnSpc>
+                <a:spcPct val="120000"/>
+              </a:lnSpc>
+            </a:pPr>
+            <a:r>
+              <a:rPr sz="3200" b="0" i="1">
+                <a:solidFill>
+                  <a:srgbClr val="111111"/>
+                </a:solidFill>
+                <a:latin typeface="Calibri"/>
+              </a:rPr>
+              <a:t>Slides support the speaker — they aren't the document. One idea per slide.</a:t>
+            </a:r>
+          </a:p>
+        </p:txBody>
+      </p:sp>
+      <p:sp>
+        <p:nvSpPr>
+          <p:cNvPr id="4" name="TextBox 3"/>
+          <p:cNvSpPr txBox="1"/>
+          <p:nvPr/>
+        </p:nvSpPr>
+        <p:spPr>
+          <a:xfrm>
+            <a:off x="1463040" y="5120640"/>
+            <a:ext cx="9265615" cy="548640"/>
+          </a:xfrm>
+          <a:prstGeom prst="rect">
+            <a:avLst/>
+          </a:prstGeom>
+          <a:noFill/>
+        </p:spPr>
+        <p:txBody>
+          <a:bodyPr wrap="square" lIns="0" tIns="0" rIns="0" bIns="0" anchor="t">
+            <a:spAutoFit/>
+          </a:bodyPr>
+          <a:lstStyle/>
+          <a:p>
+            <a:pPr algn="l">
+              <a:lnSpc>
+                <a:spcPct val="105000"/>
+              </a:lnSpc>
+            </a:pPr>
+            <a:r>
+              <a:rPr sz="2200" b="1" i="0">
+                <a:solidFill>
+                  <a:srgbClr val="7F7F7F"/>
+                </a:solidFill>
+                <a:latin typeface="Calibri"/>
+              </a:rPr>
+              <a:t>— The skill's design guidance</a:t>
+            </a:r>
+          </a:p>
+        </p:txBody>
+      </p:sp>
+      <p:sp>
+        <p:nvSpPr>
+          <p:cNvPr id="5" name="TextBox 4"/>
+          <p:cNvSpPr txBox="1"/>
+          <p:nvPr/>
+        </p:nvSpPr>
+        <p:spPr>
+          <a:xfrm>
+            <a:off x="10454335" y="6291072"/>
+            <a:ext cx="1097280" cy="384048"/>
+          </a:xfrm>
+          <a:prstGeom prst="rect">
+            <a:avLst/>
+          </a:prstGeom>
+          <a:noFill/>
+        </p:spPr>
+        <p:txBody>
+          <a:bodyPr wrap="square" lIns="0" tIns="0" rIns="0" bIns="0" anchor="t">
+            <a:spAutoFit/>
+          </a:bodyPr>
+          <a:lstStyle/>
+          <a:p>
+            <a:pPr algn="r">
+              <a:lnSpc>
+                <a:spcPct val="105000"/>
+              </a:lnSpc>
+            </a:pPr>
+            <a:r>
+              <a:rPr sz="1600" b="0" i="0">
+                <a:solidFill>
+                  <a:srgbClr val="7F7F7F"/>
+                </a:solidFill>
+                <a:latin typeface="Calibri"/>
+              </a:rPr>
+              <a:t>10</a:t>
+            </a:r>
+          </a:p>
+        </p:txBody>
+      </p:sp>
+      <p:sp>
+        <p:nvSpPr>
+          <p:cNvPr id="6" name="TextBox 5"/>
+          <p:cNvSpPr txBox="1"/>
+          <p:nvPr/>
+        </p:nvSpPr>
+        <p:spPr>
+          <a:xfrm>
+            <a:off x="8808415" y="182880"/>
+            <a:ext cx="2743200" cy="548640"/>
+          </a:xfrm>
+          <a:prstGeom prst="rect">
+            <a:avLst/>
+          </a:prstGeom>
+          <a:noFill/>
+        </p:spPr>
+        <p:txBody>
+          <a:bodyPr wrap="square" lIns="0" tIns="0" rIns="0" bIns="0" anchor="t">
+            <a:spAutoFit/>
+          </a:bodyPr>
+          <a:lstStyle/>
+          <a:p>
+            <a:pPr algn="r">
+              <a:lnSpc>
+                <a:spcPct val="105000"/>
+              </a:lnSpc>
+            </a:pPr>
+            <a:r>
+              <a:rPr sz="1800" b="1" i="0">
+                <a:solidFill>
+                  <a:srgbClr val="111111"/>
+                </a:solidFill>
+                <a:latin typeface="Calibri"/>
+              </a:rPr>
+              <a:t>Confidential</a:t>
+            </a:r>
+          </a:p>
+        </p:txBody>
+      </p:sp>
+    </p:spTree>
+  </p:cSld>
+  <p:clrMapOvr>
+    <a:masterClrMapping/>
+  </p:clrMapOvr>
+</p:sld>
+</file>
+
+<file path=ppt/slides/slide13.xml><?xml version="1.0" encoding="utf-8"?>
+<p:sld xmlns:a="http://schemas.openxmlformats.org/drawingml/2006/main" xmlns:r="http://schemas.openxmlformats.org/officeDocument/2006/relationships" xmlns:p="http://schemas.openxmlformats.org/presentationml/2006/main">
+  <p:cSld>
+    <p:spTree>
+      <p:nvGrpSpPr>
+        <p:cNvPr id="1" name=""/>
+        <p:cNvGrpSpPr/>
+        <p:nvPr/>
+      </p:nvGrpSpPr>
+      <p:grpSpPr>
+        <a:xfrm>
+          <a:off x="0" y="0"/>
+          <a:ext cx="0" cy="0"/>
+          <a:chOff x="0" y="0"/>
+          <a:chExt cx="0" cy="0"/>
+        </a:xfrm>
+      </p:grpSpPr>
       <p:sp>
         <p:nvSpPr>
           <p:cNvPr id="2" name="Rectangle 1"/>
@@ -4053,7 +4579,7 @@
         <p:spPr>
           <a:xfrm>
             <a:off x="0" y="0"/>
-            <a:ext cx="12191695" cy="6858000"/>
+            <a:ext cx="12191695" cy="914400"/>
           </a:xfrm>
           <a:prstGeom prst="rect">
             <a:avLst/>
@@ -4085,6 +4611,371 @@
           <a:lstStyle/>
           <a:p>
             <a:pPr algn="ctr"/>
+            <a:endParaRPr/>
+          </a:p>
+        </p:txBody>
+      </p:sp>
+      <p:sp>
+        <p:nvSpPr>
+          <p:cNvPr id="3" name="TextBox 2"/>
+          <p:cNvSpPr txBox="1"/>
+          <p:nvPr/>
+        </p:nvSpPr>
+        <p:spPr>
+          <a:xfrm>
+            <a:off x="640080" y="118872"/>
+            <a:ext cx="8168335" cy="219456"/>
+          </a:xfrm>
+          <a:prstGeom prst="rect">
+            <a:avLst/>
+          </a:prstGeom>
+          <a:noFill/>
+        </p:spPr>
+        <p:txBody>
+          <a:bodyPr wrap="square" lIns="0" tIns="0" rIns="0" bIns="0" anchor="t">
+            <a:spAutoFit/>
+          </a:bodyPr>
+          <a:lstStyle/>
+          <a:p>
+            <a:pPr algn="l">
+              <a:lnSpc>
+                <a:spcPct val="105000"/>
+              </a:lnSpc>
+            </a:pPr>
+            <a:r>
+              <a:rPr sz="1100" b="1" i="0">
+                <a:solidFill>
+                  <a:srgbClr val="FFFFFF"/>
+                </a:solidFill>
+                <a:latin typeface="Calibri"/>
+              </a:rPr>
+              <a:t>ORIGINS</a:t>
+            </a:r>
+          </a:p>
+        </p:txBody>
+      </p:sp>
+      <p:sp>
+        <p:nvSpPr>
+          <p:cNvPr id="4" name="TextBox 3"/>
+          <p:cNvSpPr txBox="1"/>
+          <p:nvPr/>
+        </p:nvSpPr>
+        <p:spPr>
+          <a:xfrm>
+            <a:off x="640080" y="347472"/>
+            <a:ext cx="8168335" cy="493776"/>
+          </a:xfrm>
+          <a:prstGeom prst="rect">
+            <a:avLst/>
+          </a:prstGeom>
+          <a:noFill/>
+        </p:spPr>
+        <p:txBody>
+          <a:bodyPr wrap="square" lIns="0" tIns="0" rIns="0" bIns="0" anchor="t">
+            <a:spAutoFit/>
+          </a:bodyPr>
+          <a:lstStyle/>
+          <a:p>
+            <a:pPr algn="l">
+              <a:lnSpc>
+                <a:spcPct val="105000"/>
+              </a:lnSpc>
+            </a:pPr>
+            <a:r>
+              <a:rPr sz="3000" b="1" i="0">
+                <a:solidFill>
+                  <a:srgbClr val="FFFFFF"/>
+                </a:solidFill>
+                <a:latin typeface="Calibri"/>
+              </a:rPr>
+              <a:t>Presenton Roots, Local Engine</a:t>
+            </a:r>
+          </a:p>
+        </p:txBody>
+      </p:sp>
+      <p:sp>
+        <p:nvSpPr>
+          <p:cNvPr id="5" name="TextBox 4"/>
+          <p:cNvSpPr txBox="1"/>
+          <p:nvPr/>
+        </p:nvSpPr>
+        <p:spPr>
+          <a:xfrm>
+            <a:off x="640080" y="1024128"/>
+            <a:ext cx="10911535" cy="457200"/>
+          </a:xfrm>
+          <a:prstGeom prst="rect">
+            <a:avLst/>
+          </a:prstGeom>
+          <a:noFill/>
+        </p:spPr>
+        <p:txBody>
+          <a:bodyPr wrap="square" lIns="0" tIns="0" rIns="0" bIns="0" anchor="t">
+            <a:spAutoFit/>
+          </a:bodyPr>
+          <a:lstStyle/>
+          <a:p>
+            <a:pPr algn="l">
+              <a:lnSpc>
+                <a:spcPct val="105000"/>
+              </a:lnSpc>
+            </a:pPr>
+            <a:r>
+              <a:rPr sz="2600" b="0" i="1">
+                <a:solidFill>
+                  <a:srgbClr val="595959"/>
+                </a:solidFill>
+                <a:latin typeface="Calibri"/>
+              </a:rPr>
+              <a:t>Same content-first pipeline — fully local, no server.</a:t>
+            </a:r>
+          </a:p>
+        </p:txBody>
+      </p:sp>
+      <p:sp>
+        <p:nvSpPr>
+          <p:cNvPr id="6" name="TextBox 5"/>
+          <p:cNvSpPr txBox="1"/>
+          <p:nvPr/>
+        </p:nvSpPr>
+        <p:spPr>
+          <a:xfrm>
+            <a:off x="640080" y="1554480"/>
+            <a:ext cx="10911535" cy="4663440"/>
+          </a:xfrm>
+          <a:prstGeom prst="rect">
+            <a:avLst/>
+          </a:prstGeom>
+          <a:noFill/>
+        </p:spPr>
+        <p:txBody>
+          <a:bodyPr wrap="square" lIns="0" tIns="0" rIns="0" bIns="0" anchor="t">
+            <a:spAutoFit/>
+          </a:bodyPr>
+          <a:lstStyle/>
+          <a:p>
+            <a:pPr algn="l">
+              <a:lnSpc>
+                <a:spcPct val="110000"/>
+              </a:lnSpc>
+              <a:spcAft>
+                <a:spcPts val="1000"/>
+              </a:spcAft>
+            </a:pPr>
+            <a:r>
+              <a:rPr sz="2200" b="1" i="0">
+                <a:solidFill>
+                  <a:srgbClr val="1A1A1A"/>
+                </a:solidFill>
+                <a:latin typeface="Calibri"/>
+              </a:rPr>
+              <a:t>●  Presenton's pipeline: content → layout → render</a:t>
+            </a:r>
+          </a:p>
+          <a:p>
+            <a:pPr algn="l">
+              <a:lnSpc>
+                <a:spcPct val="110000"/>
+              </a:lnSpc>
+              <a:spcAft>
+                <a:spcPts val="1000"/>
+              </a:spcAft>
+            </a:pPr>
+            <a:r>
+              <a:rPr sz="2200" b="1" i="0">
+                <a:solidFill>
+                  <a:srgbClr val="1A1A1A"/>
+                </a:solidFill>
+                <a:latin typeface="Calibri"/>
+              </a:rPr>
+              <a:t>●  Same approach, no server</a:t>
+            </a:r>
+          </a:p>
+          <a:p>
+            <a:pPr algn="l">
+              <a:lnSpc>
+                <a:spcPct val="110000"/>
+              </a:lnSpc>
+              <a:spcAft>
+                <a:spcPts val="1000"/>
+              </a:spcAft>
+            </a:pPr>
+            <a:r>
+              <a:rPr sz="2200" b="1" i="0">
+                <a:solidFill>
+                  <a:srgbClr val="1A1A1A"/>
+                </a:solidFill>
+                <a:latin typeface="Calibri"/>
+              </a:rPr>
+              <a:t>●  Editable .pptx via python-pptx</a:t>
+            </a:r>
+          </a:p>
+          <a:p>
+            <a:pPr algn="l">
+              <a:lnSpc>
+                <a:spcPct val="110000"/>
+              </a:lnSpc>
+              <a:spcAft>
+                <a:spcPts val="1000"/>
+              </a:spcAft>
+            </a:pPr>
+            <a:r>
+              <a:rPr sz="2200" b="1" i="0">
+                <a:solidFill>
+                  <a:srgbClr val="1A1A1A"/>
+                </a:solidFill>
+                <a:latin typeface="Calibri"/>
+              </a:rPr>
+              <a:t>●  Fully local — no API, no data egress</a:t>
+            </a:r>
+          </a:p>
+        </p:txBody>
+      </p:sp>
+      <p:sp>
+        <p:nvSpPr>
+          <p:cNvPr id="7" name="TextBox 6"/>
+          <p:cNvSpPr txBox="1"/>
+          <p:nvPr/>
+        </p:nvSpPr>
+        <p:spPr>
+          <a:xfrm>
+            <a:off x="10454335" y="6291072"/>
+            <a:ext cx="1097280" cy="384048"/>
+          </a:xfrm>
+          <a:prstGeom prst="rect">
+            <a:avLst/>
+          </a:prstGeom>
+          <a:noFill/>
+        </p:spPr>
+        <p:txBody>
+          <a:bodyPr wrap="square" lIns="0" tIns="0" rIns="0" bIns="0" anchor="t">
+            <a:spAutoFit/>
+          </a:bodyPr>
+          <a:lstStyle/>
+          <a:p>
+            <a:pPr algn="r">
+              <a:lnSpc>
+                <a:spcPct val="105000"/>
+              </a:lnSpc>
+            </a:pPr>
+            <a:r>
+              <a:rPr sz="1600" b="0" i="0">
+                <a:solidFill>
+                  <a:srgbClr val="7F7F7F"/>
+                </a:solidFill>
+                <a:latin typeface="Calibri"/>
+              </a:rPr>
+              <a:t>11</a:t>
+            </a:r>
+          </a:p>
+        </p:txBody>
+      </p:sp>
+      <p:sp>
+        <p:nvSpPr>
+          <p:cNvPr id="8" name="TextBox 7"/>
+          <p:cNvSpPr txBox="1"/>
+          <p:nvPr/>
+        </p:nvSpPr>
+        <p:spPr>
+          <a:xfrm>
+            <a:off x="8808415" y="182880"/>
+            <a:ext cx="2743200" cy="548640"/>
+          </a:xfrm>
+          <a:prstGeom prst="rect">
+            <a:avLst/>
+          </a:prstGeom>
+          <a:noFill/>
+        </p:spPr>
+        <p:txBody>
+          <a:bodyPr wrap="square" lIns="0" tIns="0" rIns="0" bIns="0" anchor="t">
+            <a:spAutoFit/>
+          </a:bodyPr>
+          <a:lstStyle/>
+          <a:p>
+            <a:pPr algn="r">
+              <a:lnSpc>
+                <a:spcPct val="105000"/>
+              </a:lnSpc>
+            </a:pPr>
+            <a:r>
+              <a:rPr sz="1800" b="1" i="0">
+                <a:solidFill>
+                  <a:srgbClr val="FFFFFF"/>
+                </a:solidFill>
+                <a:latin typeface="Calibri"/>
+              </a:rPr>
+              <a:t>Confidential</a:t>
+            </a:r>
+          </a:p>
+        </p:txBody>
+      </p:sp>
+    </p:spTree>
+  </p:cSld>
+  <p:clrMapOvr>
+    <a:masterClrMapping/>
+  </p:clrMapOvr>
+</p:sld>
+</file>
+
+<file path=ppt/slides/slide14.xml><?xml version="1.0" encoding="utf-8"?>
+<p:sld xmlns:a="http://schemas.openxmlformats.org/drawingml/2006/main" xmlns:r="http://schemas.openxmlformats.org/officeDocument/2006/relationships" xmlns:p="http://schemas.openxmlformats.org/presentationml/2006/main">
+  <p:cSld>
+    <p:spTree>
+      <p:nvGrpSpPr>
+        <p:cNvPr id="1" name=""/>
+        <p:cNvGrpSpPr/>
+        <p:nvPr/>
+      </p:nvGrpSpPr>
+      <p:grpSpPr>
+        <a:xfrm>
+          <a:off x="0" y="0"/>
+          <a:ext cx="0" cy="0"/>
+          <a:chOff x="0" y="0"/>
+          <a:chExt cx="0" cy="0"/>
+        </a:xfrm>
+      </p:grpSpPr>
+      <p:sp>
+        <p:nvSpPr>
+          <p:cNvPr id="2" name="Rectangle 1"/>
+          <p:cNvSpPr/>
+          <p:nvPr/>
+        </p:nvSpPr>
+        <p:spPr>
+          <a:xfrm>
+            <a:off x="0" y="0"/>
+            <a:ext cx="12191695" cy="6858000"/>
+          </a:xfrm>
+          <a:prstGeom prst="rect">
+            <a:avLst/>
+          </a:prstGeom>
+          <a:solidFill>
+            <a:srgbClr val="111111"/>
+          </a:solidFill>
+          <a:ln>
+            <a:noFill/>
+          </a:ln>
+          <a:effectLst/>
+        </p:spPr>
+        <p:style>
+          <a:lnRef idx="1">
+            <a:schemeClr val="accent1"/>
+          </a:lnRef>
+          <a:fillRef idx="3">
+            <a:schemeClr val="accent1"/>
+          </a:fillRef>
+          <a:effectRef idx="2">
+            <a:schemeClr val="accent1"/>
+          </a:effectRef>
+          <a:fontRef idx="minor">
+            <a:schemeClr val="lt1"/>
+          </a:fontRef>
+        </p:style>
+        <p:txBody>
+          <a:bodyPr rtlCol="0" anchor="ctr"/>
+          <a:lstStyle/>
+          <a:p>
+            <a:pPr algn="ctr"/>
+            <a:endParaRPr/>
           </a:p>
         </p:txBody>
       </p:sp>
@@ -4129,6 +5020,7 @@
           <a:lstStyle/>
           <a:p>
             <a:pPr algn="ctr"/>
+            <a:endParaRPr/>
           </a:p>
         </p:txBody>
       </p:sp>
@@ -4149,7 +5041,7 @@
           <a:noFill/>
         </p:spPr>
         <p:txBody>
-          <a:bodyPr wrap="square" anchor="t" lIns="0" rIns="0" tIns="0" bIns="0">
+          <a:bodyPr wrap="square" lIns="0" tIns="0" rIns="0" bIns="0" anchor="t">
             <a:spAutoFit/>
           </a:bodyPr>
           <a:lstStyle/>
@@ -4188,7 +5080,7 @@
           <a:noFill/>
         </p:spPr>
         <p:txBody>
-          <a:bodyPr wrap="square" anchor="t" lIns="0" rIns="0" tIns="0" bIns="0">
+          <a:bodyPr wrap="square" lIns="0" tIns="0" rIns="0" bIns="0" anchor="t">
             <a:spAutoFit/>
           </a:bodyPr>
           <a:lstStyle/>
@@ -4227,7 +5119,7 @@
           <a:noFill/>
         </p:spPr>
         <p:txBody>
-          <a:bodyPr wrap="square" anchor="t" lIns="0" rIns="0" tIns="0" bIns="0">
+          <a:bodyPr wrap="square" lIns="0" tIns="0" rIns="0" bIns="0" anchor="t">
             <a:spAutoFit/>
           </a:bodyPr>
           <a:lstStyle/>
@@ -4258,7 +5150,7 @@
 </file>
 
 <file path=ppt/slides/slide2.xml><?xml version="1.0" encoding="utf-8"?>
-<p:sld xmlns:a="http://schemas.openxmlformats.org/drawingml/2006/main" xmlns:p="http://schemas.openxmlformats.org/presentationml/2006/main" xmlns:r="http://schemas.openxmlformats.org/officeDocument/2006/relationships">
+<p:sld xmlns:a="http://schemas.openxmlformats.org/drawingml/2006/main" xmlns:r="http://schemas.openxmlformats.org/officeDocument/2006/relationships" xmlns:p="http://schemas.openxmlformats.org/presentationml/2006/main">
   <p:cSld>
     <p:spTree>
       <p:nvGrpSpPr>
@@ -4266,7 +5158,14 @@
         <p:cNvGrpSpPr/>
         <p:nvPr/>
       </p:nvGrpSpPr>
-      <p:grpSpPr/>
+      <p:grpSpPr>
+        <a:xfrm>
+          <a:off x="0" y="0"/>
+          <a:ext cx="0" cy="0"/>
+          <a:chOff x="0" y="0"/>
+          <a:chExt cx="0" cy="0"/>
+        </a:xfrm>
+      </p:grpSpPr>
       <p:sp>
         <p:nvSpPr>
           <p:cNvPr id="2" name="Rectangle 1"/>
@@ -4308,6 +5207,7 @@
           <a:lstStyle/>
           <a:p>
             <a:pPr algn="ctr"/>
+            <a:endParaRPr/>
           </a:p>
         </p:txBody>
       </p:sp>
@@ -4328,7 +5228,7 @@
           <a:noFill/>
         </p:spPr>
         <p:txBody>
-          <a:bodyPr wrap="square" anchor="t" lIns="0" rIns="0" tIns="0" bIns="0">
+          <a:bodyPr wrap="square" lIns="0" tIns="0" rIns="0" bIns="0" anchor="t">
             <a:spAutoFit/>
           </a:bodyPr>
           <a:lstStyle/>
@@ -4367,7 +5267,7 @@
           <a:noFill/>
         </p:spPr>
         <p:txBody>
-          <a:bodyPr wrap="square" anchor="t" lIns="0" rIns="0" tIns="0" bIns="0">
+          <a:bodyPr wrap="square" lIns="0" tIns="0" rIns="0" bIns="0" anchor="t">
             <a:spAutoFit/>
           </a:bodyPr>
           <a:lstStyle/>
@@ -4406,7 +5306,7 @@
           <a:noFill/>
         </p:spPr>
         <p:txBody>
-          <a:bodyPr wrap="square" anchor="t" lIns="0" rIns="0" tIns="0" bIns="0">
+          <a:bodyPr wrap="square" lIns="0" tIns="0" rIns="0" bIns="0" anchor="t">
             <a:spAutoFit/>
           </a:bodyPr>
           <a:lstStyle/>
@@ -4445,7 +5345,7 @@
           <a:noFill/>
         </p:spPr>
         <p:txBody>
-          <a:bodyPr wrap="square" anchor="t" lIns="0" rIns="0" tIns="0" bIns="0">
+          <a:bodyPr wrap="square" lIns="0" tIns="0" rIns="0" bIns="0" anchor="t">
             <a:spAutoFit/>
           </a:bodyPr>
           <a:lstStyle/>
@@ -4563,7 +5463,7 @@
           <a:noFill/>
         </p:spPr>
         <p:txBody>
-          <a:bodyPr wrap="square" anchor="t" lIns="0" rIns="0" tIns="0" bIns="0">
+          <a:bodyPr wrap="square" lIns="0" tIns="0" rIns="0" bIns="0" anchor="t">
             <a:spAutoFit/>
           </a:bodyPr>
           <a:lstStyle/>
@@ -4602,7 +5502,7 @@
           <a:noFill/>
         </p:spPr>
         <p:txBody>
-          <a:bodyPr wrap="square" anchor="t" lIns="0" rIns="0" tIns="0" bIns="0">
+          <a:bodyPr wrap="square" lIns="0" tIns="0" rIns="0" bIns="0" anchor="t">
             <a:spAutoFit/>
           </a:bodyPr>
           <a:lstStyle/>
@@ -4633,7 +5533,7 @@
 </file>
 
 <file path=ppt/slides/slide3.xml><?xml version="1.0" encoding="utf-8"?>
-<p:sld xmlns:a="http://schemas.openxmlformats.org/drawingml/2006/main" xmlns:p="http://schemas.openxmlformats.org/presentationml/2006/main" xmlns:r="http://schemas.openxmlformats.org/officeDocument/2006/relationships">
+<p:sld xmlns:a="http://schemas.openxmlformats.org/drawingml/2006/main" xmlns:r="http://schemas.openxmlformats.org/officeDocument/2006/relationships" xmlns:p="http://schemas.openxmlformats.org/presentationml/2006/main">
   <p:cSld>
     <p:spTree>
       <p:nvGrpSpPr>
@@ -4641,1066 +5541,38 @@
         <p:cNvGrpSpPr/>
         <p:nvPr/>
       </p:nvGrpSpPr>
-      <p:grpSpPr/>
-      <p:sp>
-        <p:nvSpPr>
-          <p:cNvPr id="2" name="Rectangle 1"/>
-          <p:cNvSpPr/>
-          <p:nvPr/>
-        </p:nvSpPr>
-        <p:spPr>
-          <a:xfrm>
-            <a:off x="0" y="0"/>
-            <a:ext cx="12191695" cy="914400"/>
-          </a:xfrm>
-          <a:prstGeom prst="rect">
-            <a:avLst/>
-          </a:prstGeom>
-          <a:solidFill>
-            <a:srgbClr val="111111"/>
-          </a:solidFill>
-          <a:ln>
-            <a:noFill/>
-          </a:ln>
-          <a:effectLst/>
-        </p:spPr>
-        <p:style>
-          <a:lnRef idx="1">
-            <a:schemeClr val="accent1"/>
-          </a:lnRef>
-          <a:fillRef idx="3">
-            <a:schemeClr val="accent1"/>
-          </a:fillRef>
-          <a:effectRef idx="2">
-            <a:schemeClr val="accent1"/>
-          </a:effectRef>
-          <a:fontRef idx="minor">
-            <a:schemeClr val="lt1"/>
-          </a:fontRef>
-        </p:style>
-        <p:txBody>
-          <a:bodyPr rtlCol="0" anchor="ctr"/>
-          <a:lstStyle/>
-          <a:p>
-            <a:pPr algn="ctr"/>
-          </a:p>
-        </p:txBody>
-      </p:sp>
-      <p:sp>
-        <p:nvSpPr>
-          <p:cNvPr id="3" name="TextBox 2"/>
-          <p:cNvSpPr txBox="1"/>
-          <p:nvPr/>
-        </p:nvSpPr>
-        <p:spPr>
-          <a:xfrm>
-            <a:off x="640080" y="118872"/>
-            <a:ext cx="8168335" cy="219456"/>
-          </a:xfrm>
-          <a:prstGeom prst="rect">
-            <a:avLst/>
-          </a:prstGeom>
-          <a:noFill/>
-        </p:spPr>
-        <p:txBody>
-          <a:bodyPr wrap="square" anchor="t" lIns="0" rIns="0" tIns="0" bIns="0">
-            <a:spAutoFit/>
-          </a:bodyPr>
-          <a:lstStyle/>
-          <a:p>
-            <a:pPr algn="l">
-              <a:lnSpc>
-                <a:spcPct val="105000"/>
-              </a:lnSpc>
-            </a:pPr>
-            <a:r>
-              <a:rPr sz="1100" b="1" i="0">
-                <a:solidFill>
-                  <a:srgbClr val="FFFFFF"/>
-                </a:solidFill>
-                <a:latin typeface="Calibri"/>
-              </a:rPr>
-              <a:t>AT A GLANCE</a:t>
-            </a:r>
-          </a:p>
-        </p:txBody>
-      </p:sp>
-      <p:sp>
-        <p:nvSpPr>
-          <p:cNvPr id="4" name="TextBox 3"/>
-          <p:cNvSpPr txBox="1"/>
-          <p:nvPr/>
-        </p:nvSpPr>
-        <p:spPr>
-          <a:xfrm>
-            <a:off x="640080" y="347472"/>
-            <a:ext cx="8168335" cy="493776"/>
-          </a:xfrm>
-          <a:prstGeom prst="rect">
-            <a:avLst/>
-          </a:prstGeom>
-          <a:noFill/>
-        </p:spPr>
-        <p:txBody>
-          <a:bodyPr wrap="square" anchor="t" lIns="0" rIns="0" tIns="0" bIns="0">
-            <a:spAutoFit/>
-          </a:bodyPr>
-          <a:lstStyle/>
-          <a:p>
-            <a:pPr algn="l">
-              <a:lnSpc>
-                <a:spcPct val="105000"/>
-              </a:lnSpc>
-            </a:pPr>
-            <a:r>
-              <a:rPr sz="3000" b="1" i="0">
-                <a:solidFill>
-                  <a:srgbClr val="FFFFFF"/>
-                </a:solidFill>
-                <a:latin typeface="Calibri"/>
-              </a:rPr>
-              <a:t>One Spec, Many Decks</a:t>
-            </a:r>
-          </a:p>
-        </p:txBody>
-      </p:sp>
-      <p:sp>
-        <p:nvSpPr>
-          <p:cNvPr id="5" name="TextBox 4"/>
-          <p:cNvSpPr txBox="1"/>
-          <p:nvPr/>
-        </p:nvSpPr>
-        <p:spPr>
-          <a:xfrm>
-            <a:off x="640080" y="1024128"/>
-            <a:ext cx="10911535" cy="457200"/>
-          </a:xfrm>
-          <a:prstGeom prst="rect">
-            <a:avLst/>
-          </a:prstGeom>
-          <a:noFill/>
-        </p:spPr>
-        <p:txBody>
-          <a:bodyPr wrap="square" anchor="t" lIns="0" rIns="0" tIns="0" bIns="0">
-            <a:spAutoFit/>
-          </a:bodyPr>
-          <a:lstStyle/>
-          <a:p>
-            <a:pPr algn="l">
-              <a:lnSpc>
-                <a:spcPct val="105000"/>
-              </a:lnSpc>
-            </a:pPr>
-            <a:r>
-              <a:rPr sz="2600" b="0" i="1">
-                <a:solidFill>
-                  <a:srgbClr val="595959"/>
-                </a:solidFill>
-                <a:latin typeface="Calibri"/>
-              </a:rPr>
-              <a:t>A single JSON file drives every slide — and every template.</a:t>
-            </a:r>
-          </a:p>
-        </p:txBody>
-      </p:sp>
-      <p:sp>
-        <p:nvSpPr>
-          <p:cNvPr id="6" name="Rectangle 5"/>
-          <p:cNvSpPr/>
-          <p:nvPr/>
-        </p:nvSpPr>
-        <p:spPr>
-          <a:xfrm>
-            <a:off x="640080" y="2103120"/>
-            <a:ext cx="2453563" cy="2560320"/>
-          </a:xfrm>
-          <a:prstGeom prst="rect">
-            <a:avLst/>
-          </a:prstGeom>
-          <a:solidFill>
-            <a:srgbClr val="F2F2F2"/>
-          </a:solidFill>
-          <a:ln>
-            <a:noFill/>
-          </a:ln>
-          <a:effectLst/>
-        </p:spPr>
-        <p:style>
-          <a:lnRef idx="1">
-            <a:schemeClr val="accent1"/>
-          </a:lnRef>
-          <a:fillRef idx="3">
-            <a:schemeClr val="accent1"/>
-          </a:fillRef>
-          <a:effectRef idx="2">
-            <a:schemeClr val="accent1"/>
-          </a:effectRef>
-          <a:fontRef idx="minor">
-            <a:schemeClr val="lt1"/>
-          </a:fontRef>
-        </p:style>
-        <p:txBody>
-          <a:bodyPr rtlCol="0" anchor="ctr"/>
-          <a:lstStyle/>
-          <a:p>
-            <a:pPr algn="ctr"/>
-          </a:p>
-        </p:txBody>
-      </p:sp>
-      <p:sp>
-        <p:nvSpPr>
-          <p:cNvPr id="7" name="Rectangle 6"/>
-          <p:cNvSpPr/>
-          <p:nvPr/>
-        </p:nvSpPr>
-        <p:spPr>
-          <a:xfrm>
-            <a:off x="640080" y="2103120"/>
-            <a:ext cx="2453563" cy="109728"/>
-          </a:xfrm>
-          <a:prstGeom prst="rect">
-            <a:avLst/>
-          </a:prstGeom>
-          <a:solidFill>
-            <a:srgbClr val="2F5597"/>
-          </a:solidFill>
-          <a:ln>
-            <a:noFill/>
-          </a:ln>
-          <a:effectLst/>
-        </p:spPr>
-        <p:style>
-          <a:lnRef idx="1">
-            <a:schemeClr val="accent1"/>
-          </a:lnRef>
-          <a:fillRef idx="3">
-            <a:schemeClr val="accent1"/>
-          </a:fillRef>
-          <a:effectRef idx="2">
-            <a:schemeClr val="accent1"/>
-          </a:effectRef>
-          <a:fontRef idx="minor">
-            <a:schemeClr val="lt1"/>
-          </a:fontRef>
-        </p:style>
-        <p:txBody>
-          <a:bodyPr rtlCol="0" anchor="ctr"/>
-          <a:lstStyle/>
-          <a:p>
-            <a:pPr algn="ctr"/>
-          </a:p>
-        </p:txBody>
-      </p:sp>
-      <p:sp>
-        <p:nvSpPr>
-          <p:cNvPr id="8" name="TextBox 7"/>
-          <p:cNvSpPr txBox="1"/>
-          <p:nvPr/>
-        </p:nvSpPr>
-        <p:spPr>
-          <a:xfrm>
-            <a:off x="640080" y="2560320"/>
-            <a:ext cx="2453563" cy="1005840"/>
-          </a:xfrm>
-          <a:prstGeom prst="rect">
-            <a:avLst/>
-          </a:prstGeom>
-          <a:noFill/>
-        </p:spPr>
-        <p:txBody>
-          <a:bodyPr wrap="square" anchor="t" lIns="0" rIns="0" tIns="0" bIns="0">
-            <a:spAutoFit/>
-          </a:bodyPr>
-          <a:lstStyle/>
-          <a:p>
-            <a:pPr algn="ctr">
-              <a:lnSpc>
-                <a:spcPct val="105000"/>
-              </a:lnSpc>
-            </a:pPr>
-            <a:r>
-              <a:rPr sz="4800" b="1" i="0">
-                <a:solidFill>
-                  <a:srgbClr val="111111"/>
-                </a:solidFill>
-                <a:latin typeface="Calibri"/>
-              </a:rPr>
-              <a:t>6</a:t>
-            </a:r>
-          </a:p>
-        </p:txBody>
-      </p:sp>
-      <p:sp>
-        <p:nvSpPr>
-          <p:cNvPr id="9" name="TextBox 8"/>
-          <p:cNvSpPr txBox="1"/>
-          <p:nvPr/>
-        </p:nvSpPr>
-        <p:spPr>
-          <a:xfrm>
-            <a:off x="640080" y="3611880"/>
-            <a:ext cx="2453563" cy="457200"/>
-          </a:xfrm>
-          <a:prstGeom prst="rect">
-            <a:avLst/>
-          </a:prstGeom>
-          <a:noFill/>
-        </p:spPr>
-        <p:txBody>
-          <a:bodyPr wrap="square" anchor="t" lIns="0" rIns="0" tIns="0" bIns="0">
-            <a:spAutoFit/>
-          </a:bodyPr>
-          <a:lstStyle/>
-          <a:p>
-            <a:pPr algn="ctr">
-              <a:lnSpc>
-                <a:spcPct val="105000"/>
-              </a:lnSpc>
-            </a:pPr>
-            <a:r>
-              <a:rPr sz="2200" b="1" i="0">
-                <a:solidFill>
-                  <a:srgbClr val="1A1A1A"/>
-                </a:solidFill>
-                <a:latin typeface="Calibri"/>
-              </a:rPr>
-              <a:t>Templates</a:t>
-            </a:r>
-          </a:p>
-        </p:txBody>
-      </p:sp>
-      <p:sp>
-        <p:nvSpPr>
-          <p:cNvPr id="10" name="TextBox 9"/>
-          <p:cNvSpPr txBox="1"/>
-          <p:nvPr/>
-        </p:nvSpPr>
-        <p:spPr>
-          <a:xfrm>
-            <a:off x="822960" y="4023360"/>
-            <a:ext cx="2087803" cy="548640"/>
-          </a:xfrm>
-          <a:prstGeom prst="rect">
-            <a:avLst/>
-          </a:prstGeom>
-          <a:noFill/>
-        </p:spPr>
-        <p:txBody>
-          <a:bodyPr wrap="square" anchor="t" lIns="0" rIns="0" tIns="0" bIns="0">
-            <a:spAutoFit/>
-          </a:bodyPr>
-          <a:lstStyle/>
-          <a:p>
-            <a:pPr algn="ctr">
-              <a:lnSpc>
-                <a:spcPct val="100000"/>
-              </a:lnSpc>
-            </a:pPr>
-            <a:r>
-              <a:rPr sz="1200" b="0" i="0">
-                <a:solidFill>
-                  <a:srgbClr val="7F7F7F"/>
-                </a:solidFill>
-                <a:latin typeface="Calibri"/>
-              </a:rPr>
-              <a:t>one-field swap</a:t>
-            </a:r>
-          </a:p>
-        </p:txBody>
-      </p:sp>
-      <p:sp>
-        <p:nvSpPr>
-          <p:cNvPr id="11" name="Rectangle 10"/>
-          <p:cNvSpPr/>
-          <p:nvPr/>
-        </p:nvSpPr>
-        <p:spPr>
-          <a:xfrm>
-            <a:off x="3459403" y="2103120"/>
-            <a:ext cx="2453563" cy="2560320"/>
-          </a:xfrm>
-          <a:prstGeom prst="rect">
-            <a:avLst/>
-          </a:prstGeom>
-          <a:solidFill>
-            <a:srgbClr val="F2F2F2"/>
-          </a:solidFill>
-          <a:ln>
-            <a:noFill/>
-          </a:ln>
-          <a:effectLst/>
-        </p:spPr>
-        <p:style>
-          <a:lnRef idx="1">
-            <a:schemeClr val="accent1"/>
-          </a:lnRef>
-          <a:fillRef idx="3">
-            <a:schemeClr val="accent1"/>
-          </a:fillRef>
-          <a:effectRef idx="2">
-            <a:schemeClr val="accent1"/>
-          </a:effectRef>
-          <a:fontRef idx="minor">
-            <a:schemeClr val="lt1"/>
-          </a:fontRef>
-        </p:style>
-        <p:txBody>
-          <a:bodyPr rtlCol="0" anchor="ctr"/>
-          <a:lstStyle/>
-          <a:p>
-            <a:pPr algn="ctr"/>
-          </a:p>
-        </p:txBody>
-      </p:sp>
-      <p:sp>
-        <p:nvSpPr>
-          <p:cNvPr id="12" name="Rectangle 11"/>
-          <p:cNvSpPr/>
-          <p:nvPr/>
-        </p:nvSpPr>
-        <p:spPr>
-          <a:xfrm>
-            <a:off x="3459403" y="2103120"/>
-            <a:ext cx="2453563" cy="109728"/>
-          </a:xfrm>
-          <a:prstGeom prst="rect">
-            <a:avLst/>
-          </a:prstGeom>
-          <a:solidFill>
-            <a:srgbClr val="2F5597"/>
-          </a:solidFill>
-          <a:ln>
-            <a:noFill/>
-          </a:ln>
-          <a:effectLst/>
-        </p:spPr>
-        <p:style>
-          <a:lnRef idx="1">
-            <a:schemeClr val="accent1"/>
-          </a:lnRef>
-          <a:fillRef idx="3">
-            <a:schemeClr val="accent1"/>
-          </a:fillRef>
-          <a:effectRef idx="2">
-            <a:schemeClr val="accent1"/>
-          </a:effectRef>
-          <a:fontRef idx="minor">
-            <a:schemeClr val="lt1"/>
-          </a:fontRef>
-        </p:style>
-        <p:txBody>
-          <a:bodyPr rtlCol="0" anchor="ctr"/>
-          <a:lstStyle/>
-          <a:p>
-            <a:pPr algn="ctr"/>
-          </a:p>
-        </p:txBody>
-      </p:sp>
-      <p:sp>
-        <p:nvSpPr>
-          <p:cNvPr id="13" name="TextBox 12"/>
-          <p:cNvSpPr txBox="1"/>
-          <p:nvPr/>
-        </p:nvSpPr>
-        <p:spPr>
-          <a:xfrm>
-            <a:off x="3459403" y="2560320"/>
-            <a:ext cx="2453563" cy="1005840"/>
-          </a:xfrm>
-          <a:prstGeom prst="rect">
-            <a:avLst/>
-          </a:prstGeom>
-          <a:noFill/>
-        </p:spPr>
-        <p:txBody>
-          <a:bodyPr wrap="square" anchor="t" lIns="0" rIns="0" tIns="0" bIns="0">
-            <a:spAutoFit/>
-          </a:bodyPr>
-          <a:lstStyle/>
-          <a:p>
-            <a:pPr algn="ctr">
-              <a:lnSpc>
-                <a:spcPct val="105000"/>
-              </a:lnSpc>
-            </a:pPr>
-            <a:r>
-              <a:rPr sz="4800" b="1" i="0">
-                <a:solidFill>
-                  <a:srgbClr val="111111"/>
-                </a:solidFill>
-                <a:latin typeface="Calibri"/>
-              </a:rPr>
-              <a:t>13</a:t>
-            </a:r>
-          </a:p>
-        </p:txBody>
-      </p:sp>
-      <p:sp>
-        <p:nvSpPr>
-          <p:cNvPr id="14" name="TextBox 13"/>
-          <p:cNvSpPr txBox="1"/>
-          <p:nvPr/>
-        </p:nvSpPr>
-        <p:spPr>
-          <a:xfrm>
-            <a:off x="3459403" y="3611880"/>
-            <a:ext cx="2453563" cy="457200"/>
-          </a:xfrm>
-          <a:prstGeom prst="rect">
-            <a:avLst/>
-          </a:prstGeom>
-          <a:noFill/>
-        </p:spPr>
-        <p:txBody>
-          <a:bodyPr wrap="square" anchor="t" lIns="0" rIns="0" tIns="0" bIns="0">
-            <a:spAutoFit/>
-          </a:bodyPr>
-          <a:lstStyle/>
-          <a:p>
-            <a:pPr algn="ctr">
-              <a:lnSpc>
-                <a:spcPct val="105000"/>
-              </a:lnSpc>
-            </a:pPr>
-            <a:r>
-              <a:rPr sz="2200" b="1" i="0">
-                <a:solidFill>
-                  <a:srgbClr val="1A1A1A"/>
-                </a:solidFill>
-                <a:latin typeface="Calibri"/>
-              </a:rPr>
-              <a:t>Layouts</a:t>
-            </a:r>
-          </a:p>
-        </p:txBody>
-      </p:sp>
-      <p:sp>
-        <p:nvSpPr>
-          <p:cNvPr id="15" name="TextBox 14"/>
-          <p:cNvSpPr txBox="1"/>
-          <p:nvPr/>
-        </p:nvSpPr>
-        <p:spPr>
-          <a:xfrm>
-            <a:off x="3642283" y="4023360"/>
-            <a:ext cx="2087803" cy="548640"/>
-          </a:xfrm>
-          <a:prstGeom prst="rect">
-            <a:avLst/>
-          </a:prstGeom>
-          <a:noFill/>
-        </p:spPr>
-        <p:txBody>
-          <a:bodyPr wrap="square" anchor="t" lIns="0" rIns="0" tIns="0" bIns="0">
-            <a:spAutoFit/>
-          </a:bodyPr>
-          <a:lstStyle/>
-          <a:p>
-            <a:pPr algn="ctr">
-              <a:lnSpc>
-                <a:spcPct val="100000"/>
-              </a:lnSpc>
-            </a:pPr>
-            <a:r>
-              <a:rPr sz="1200" b="0" i="0">
-                <a:solidFill>
-                  <a:srgbClr val="7F7F7F"/>
-                </a:solidFill>
-                <a:latin typeface="Calibri"/>
-              </a:rPr>
-              <a:t>for every slide job</a:t>
-            </a:r>
-          </a:p>
-        </p:txBody>
-      </p:sp>
-      <p:sp>
-        <p:nvSpPr>
-          <p:cNvPr id="16" name="Rectangle 15"/>
-          <p:cNvSpPr/>
-          <p:nvPr/>
-        </p:nvSpPr>
-        <p:spPr>
-          <a:xfrm>
-            <a:off x="6278727" y="2103120"/>
-            <a:ext cx="2453563" cy="2560320"/>
-          </a:xfrm>
-          <a:prstGeom prst="rect">
-            <a:avLst/>
-          </a:prstGeom>
-          <a:solidFill>
-            <a:srgbClr val="F2F2F2"/>
-          </a:solidFill>
-          <a:ln>
-            <a:noFill/>
-          </a:ln>
-          <a:effectLst/>
-        </p:spPr>
-        <p:style>
-          <a:lnRef idx="1">
-            <a:schemeClr val="accent1"/>
-          </a:lnRef>
-          <a:fillRef idx="3">
-            <a:schemeClr val="accent1"/>
-          </a:fillRef>
-          <a:effectRef idx="2">
-            <a:schemeClr val="accent1"/>
-          </a:effectRef>
-          <a:fontRef idx="minor">
-            <a:schemeClr val="lt1"/>
-          </a:fontRef>
-        </p:style>
-        <p:txBody>
-          <a:bodyPr rtlCol="0" anchor="ctr"/>
-          <a:lstStyle/>
-          <a:p>
-            <a:pPr algn="ctr"/>
-          </a:p>
-        </p:txBody>
-      </p:sp>
-      <p:sp>
-        <p:nvSpPr>
-          <p:cNvPr id="17" name="Rectangle 16"/>
-          <p:cNvSpPr/>
-          <p:nvPr/>
-        </p:nvSpPr>
-        <p:spPr>
-          <a:xfrm>
-            <a:off x="6278727" y="2103120"/>
-            <a:ext cx="2453563" cy="109728"/>
-          </a:xfrm>
-          <a:prstGeom prst="rect">
-            <a:avLst/>
-          </a:prstGeom>
-          <a:solidFill>
-            <a:srgbClr val="2F5597"/>
-          </a:solidFill>
-          <a:ln>
-            <a:noFill/>
-          </a:ln>
-          <a:effectLst/>
-        </p:spPr>
-        <p:style>
-          <a:lnRef idx="1">
-            <a:schemeClr val="accent1"/>
-          </a:lnRef>
-          <a:fillRef idx="3">
-            <a:schemeClr val="accent1"/>
-          </a:fillRef>
-          <a:effectRef idx="2">
-            <a:schemeClr val="accent1"/>
-          </a:effectRef>
-          <a:fontRef idx="minor">
-            <a:schemeClr val="lt1"/>
-          </a:fontRef>
-        </p:style>
-        <p:txBody>
-          <a:bodyPr rtlCol="0" anchor="ctr"/>
-          <a:lstStyle/>
-          <a:p>
-            <a:pPr algn="ctr"/>
-          </a:p>
-        </p:txBody>
-      </p:sp>
-      <p:sp>
-        <p:nvSpPr>
-          <p:cNvPr id="18" name="TextBox 17"/>
-          <p:cNvSpPr txBox="1"/>
-          <p:nvPr/>
-        </p:nvSpPr>
-        <p:spPr>
-          <a:xfrm>
-            <a:off x="6278727" y="2560320"/>
-            <a:ext cx="2453563" cy="1005840"/>
-          </a:xfrm>
-          <a:prstGeom prst="rect">
-            <a:avLst/>
-          </a:prstGeom>
-          <a:noFill/>
-        </p:spPr>
-        <p:txBody>
-          <a:bodyPr wrap="square" anchor="t" lIns="0" rIns="0" tIns="0" bIns="0">
-            <a:spAutoFit/>
-          </a:bodyPr>
-          <a:lstStyle/>
-          <a:p>
-            <a:pPr algn="ctr">
-              <a:lnSpc>
-                <a:spcPct val="105000"/>
-              </a:lnSpc>
-            </a:pPr>
-            <a:r>
-              <a:rPr sz="4800" b="1" i="0">
-                <a:solidFill>
-                  <a:srgbClr val="111111"/>
-                </a:solidFill>
-                <a:latin typeface="Calibri"/>
-              </a:rPr>
-              <a:t>1</a:t>
-            </a:r>
-          </a:p>
-        </p:txBody>
-      </p:sp>
-      <p:sp>
-        <p:nvSpPr>
-          <p:cNvPr id="19" name="TextBox 18"/>
-          <p:cNvSpPr txBox="1"/>
-          <p:nvPr/>
-        </p:nvSpPr>
-        <p:spPr>
-          <a:xfrm>
-            <a:off x="6278727" y="3611880"/>
-            <a:ext cx="2453563" cy="457200"/>
-          </a:xfrm>
-          <a:prstGeom prst="rect">
-            <a:avLst/>
-          </a:prstGeom>
-          <a:noFill/>
-        </p:spPr>
-        <p:txBody>
-          <a:bodyPr wrap="square" anchor="t" lIns="0" rIns="0" tIns="0" bIns="0">
-            <a:spAutoFit/>
-          </a:bodyPr>
-          <a:lstStyle/>
-          <a:p>
-            <a:pPr algn="ctr">
-              <a:lnSpc>
-                <a:spcPct val="105000"/>
-              </a:lnSpc>
-            </a:pPr>
-            <a:r>
-              <a:rPr sz="2200" b="1" i="0">
-                <a:solidFill>
-                  <a:srgbClr val="1A1A1A"/>
-                </a:solidFill>
-                <a:latin typeface="Calibri"/>
-              </a:rPr>
-              <a:t>JSON spec</a:t>
-            </a:r>
-          </a:p>
-        </p:txBody>
-      </p:sp>
-      <p:sp>
-        <p:nvSpPr>
-          <p:cNvPr id="20" name="TextBox 19"/>
-          <p:cNvSpPr txBox="1"/>
-          <p:nvPr/>
-        </p:nvSpPr>
-        <p:spPr>
-          <a:xfrm>
-            <a:off x="6461607" y="4023360"/>
-            <a:ext cx="2087803" cy="548640"/>
-          </a:xfrm>
-          <a:prstGeom prst="rect">
-            <a:avLst/>
-          </a:prstGeom>
-          <a:noFill/>
-        </p:spPr>
-        <p:txBody>
-          <a:bodyPr wrap="square" anchor="t" lIns="0" rIns="0" tIns="0" bIns="0">
-            <a:spAutoFit/>
-          </a:bodyPr>
-          <a:lstStyle/>
-          <a:p>
-            <a:pPr algn="ctr">
-              <a:lnSpc>
-                <a:spcPct val="100000"/>
-              </a:lnSpc>
-            </a:pPr>
-            <a:r>
-              <a:rPr sz="1200" b="0" i="0">
-                <a:solidFill>
-                  <a:srgbClr val="7F7F7F"/>
-                </a:solidFill>
-                <a:latin typeface="Calibri"/>
-              </a:rPr>
-              <a:t>single source of truth</a:t>
-            </a:r>
-          </a:p>
-        </p:txBody>
-      </p:sp>
-      <p:sp>
-        <p:nvSpPr>
-          <p:cNvPr id="21" name="Rectangle 20"/>
-          <p:cNvSpPr/>
-          <p:nvPr/>
-        </p:nvSpPr>
-        <p:spPr>
-          <a:xfrm>
-            <a:off x="9098051" y="2103120"/>
-            <a:ext cx="2453563" cy="2560320"/>
-          </a:xfrm>
-          <a:prstGeom prst="rect">
-            <a:avLst/>
-          </a:prstGeom>
-          <a:solidFill>
-            <a:srgbClr val="F2F2F2"/>
-          </a:solidFill>
-          <a:ln>
-            <a:noFill/>
-          </a:ln>
-          <a:effectLst/>
-        </p:spPr>
-        <p:style>
-          <a:lnRef idx="1">
-            <a:schemeClr val="accent1"/>
-          </a:lnRef>
-          <a:fillRef idx="3">
-            <a:schemeClr val="accent1"/>
-          </a:fillRef>
-          <a:effectRef idx="2">
-            <a:schemeClr val="accent1"/>
-          </a:effectRef>
-          <a:fontRef idx="minor">
-            <a:schemeClr val="lt1"/>
-          </a:fontRef>
-        </p:style>
-        <p:txBody>
-          <a:bodyPr rtlCol="0" anchor="ctr"/>
-          <a:lstStyle/>
-          <a:p>
-            <a:pPr algn="ctr"/>
-          </a:p>
-        </p:txBody>
-      </p:sp>
-      <p:sp>
-        <p:nvSpPr>
-          <p:cNvPr id="22" name="Rectangle 21"/>
-          <p:cNvSpPr/>
-          <p:nvPr/>
-        </p:nvSpPr>
-        <p:spPr>
-          <a:xfrm>
-            <a:off x="9098051" y="2103120"/>
-            <a:ext cx="2453563" cy="109728"/>
-          </a:xfrm>
-          <a:prstGeom prst="rect">
-            <a:avLst/>
-          </a:prstGeom>
-          <a:solidFill>
-            <a:srgbClr val="2F5597"/>
-          </a:solidFill>
-          <a:ln>
-            <a:noFill/>
-          </a:ln>
-          <a:effectLst/>
-        </p:spPr>
-        <p:style>
-          <a:lnRef idx="1">
-            <a:schemeClr val="accent1"/>
-          </a:lnRef>
-          <a:fillRef idx="3">
-            <a:schemeClr val="accent1"/>
-          </a:fillRef>
-          <a:effectRef idx="2">
-            <a:schemeClr val="accent1"/>
-          </a:effectRef>
-          <a:fontRef idx="minor">
-            <a:schemeClr val="lt1"/>
-          </a:fontRef>
-        </p:style>
-        <p:txBody>
-          <a:bodyPr rtlCol="0" anchor="ctr"/>
-          <a:lstStyle/>
-          <a:p>
-            <a:pPr algn="ctr"/>
-          </a:p>
-        </p:txBody>
-      </p:sp>
-      <p:sp>
-        <p:nvSpPr>
-          <p:cNvPr id="23" name="TextBox 22"/>
-          <p:cNvSpPr txBox="1"/>
-          <p:nvPr/>
-        </p:nvSpPr>
-        <p:spPr>
-          <a:xfrm>
-            <a:off x="9098051" y="2560320"/>
-            <a:ext cx="2453563" cy="1005840"/>
-          </a:xfrm>
-          <a:prstGeom prst="rect">
-            <a:avLst/>
-          </a:prstGeom>
-          <a:noFill/>
-        </p:spPr>
-        <p:txBody>
-          <a:bodyPr wrap="square" anchor="t" lIns="0" rIns="0" tIns="0" bIns="0">
-            <a:spAutoFit/>
-          </a:bodyPr>
-          <a:lstStyle/>
-          <a:p>
-            <a:pPr algn="ctr">
-              <a:lnSpc>
-                <a:spcPct val="105000"/>
-              </a:lnSpc>
-            </a:pPr>
-            <a:r>
-              <a:rPr sz="4800" b="1" i="0">
-                <a:solidFill>
-                  <a:srgbClr val="111111"/>
-                </a:solidFill>
-                <a:latin typeface="Calibri"/>
-              </a:rPr>
-              <a:t>100%</a:t>
-            </a:r>
-          </a:p>
-        </p:txBody>
-      </p:sp>
-      <p:sp>
-        <p:nvSpPr>
-          <p:cNvPr id="24" name="TextBox 23"/>
-          <p:cNvSpPr txBox="1"/>
-          <p:nvPr/>
-        </p:nvSpPr>
-        <p:spPr>
-          <a:xfrm>
-            <a:off x="9098051" y="3611880"/>
-            <a:ext cx="2453563" cy="457200"/>
-          </a:xfrm>
-          <a:prstGeom prst="rect">
-            <a:avLst/>
-          </a:prstGeom>
-          <a:noFill/>
-        </p:spPr>
-        <p:txBody>
-          <a:bodyPr wrap="square" anchor="t" lIns="0" rIns="0" tIns="0" bIns="0">
-            <a:spAutoFit/>
-          </a:bodyPr>
-          <a:lstStyle/>
-          <a:p>
-            <a:pPr algn="ctr">
-              <a:lnSpc>
-                <a:spcPct val="105000"/>
-              </a:lnSpc>
-            </a:pPr>
-            <a:r>
-              <a:rPr sz="2200" b="1" i="0">
-                <a:solidFill>
-                  <a:srgbClr val="1A1A1A"/>
-                </a:solidFill>
-                <a:latin typeface="Calibri"/>
-              </a:rPr>
-              <a:t>Editable</a:t>
-            </a:r>
-          </a:p>
-        </p:txBody>
-      </p:sp>
-      <p:sp>
-        <p:nvSpPr>
-          <p:cNvPr id="25" name="TextBox 24"/>
-          <p:cNvSpPr txBox="1"/>
-          <p:nvPr/>
-        </p:nvSpPr>
-        <p:spPr>
-          <a:xfrm>
-            <a:off x="9280931" y="4023360"/>
-            <a:ext cx="2087803" cy="548640"/>
-          </a:xfrm>
-          <a:prstGeom prst="rect">
-            <a:avLst/>
-          </a:prstGeom>
-          <a:noFill/>
-        </p:spPr>
-        <p:txBody>
-          <a:bodyPr wrap="square" anchor="t" lIns="0" rIns="0" tIns="0" bIns="0">
-            <a:spAutoFit/>
-          </a:bodyPr>
-          <a:lstStyle/>
-          <a:p>
-            <a:pPr algn="ctr">
-              <a:lnSpc>
-                <a:spcPct val="100000"/>
-              </a:lnSpc>
-            </a:pPr>
-            <a:r>
-              <a:rPr sz="1200" b="0" i="0">
-                <a:solidFill>
-                  <a:srgbClr val="7F7F7F"/>
-                </a:solidFill>
-                <a:latin typeface="Calibri"/>
-              </a:rPr>
-              <a:t>real .pptx output</a:t>
-            </a:r>
-          </a:p>
-        </p:txBody>
-      </p:sp>
-      <p:sp>
-        <p:nvSpPr>
-          <p:cNvPr id="26" name="TextBox 25"/>
-          <p:cNvSpPr txBox="1"/>
-          <p:nvPr/>
-        </p:nvSpPr>
-        <p:spPr>
-          <a:xfrm>
-            <a:off x="10454335" y="6291072"/>
-            <a:ext cx="1097280" cy="384048"/>
-          </a:xfrm>
-          <a:prstGeom prst="rect">
-            <a:avLst/>
-          </a:prstGeom>
-          <a:noFill/>
-        </p:spPr>
-        <p:txBody>
-          <a:bodyPr wrap="square" anchor="t" lIns="0" rIns="0" tIns="0" bIns="0">
-            <a:spAutoFit/>
-          </a:bodyPr>
-          <a:lstStyle/>
-          <a:p>
-            <a:pPr algn="r">
-              <a:lnSpc>
-                <a:spcPct val="105000"/>
-              </a:lnSpc>
-            </a:pPr>
-            <a:r>
-              <a:rPr sz="1600" b="0" i="0">
-                <a:solidFill>
-                  <a:srgbClr val="7F7F7F"/>
-                </a:solidFill>
-                <a:latin typeface="Calibri"/>
-              </a:rPr>
-              <a:t>3</a:t>
-            </a:r>
-          </a:p>
-        </p:txBody>
-      </p:sp>
-      <p:sp>
-        <p:nvSpPr>
-          <p:cNvPr id="27" name="TextBox 26"/>
-          <p:cNvSpPr txBox="1"/>
-          <p:nvPr/>
-        </p:nvSpPr>
-        <p:spPr>
-          <a:xfrm>
-            <a:off x="8808415" y="182880"/>
-            <a:ext cx="2743200" cy="548640"/>
-          </a:xfrm>
-          <a:prstGeom prst="rect">
-            <a:avLst/>
-          </a:prstGeom>
-          <a:noFill/>
-        </p:spPr>
-        <p:txBody>
-          <a:bodyPr wrap="square" anchor="t" lIns="0" rIns="0" tIns="0" bIns="0">
-            <a:spAutoFit/>
-          </a:bodyPr>
-          <a:lstStyle/>
-          <a:p>
-            <a:pPr algn="r">
-              <a:lnSpc>
-                <a:spcPct val="105000"/>
-              </a:lnSpc>
-            </a:pPr>
-            <a:r>
-              <a:rPr sz="1800" b="1" i="0">
-                <a:solidFill>
-                  <a:srgbClr val="FFFFFF"/>
-                </a:solidFill>
-                <a:latin typeface="Calibri"/>
-              </a:rPr>
-              <a:t>Confidential</a:t>
-            </a:r>
-          </a:p>
-        </p:txBody>
-      </p:sp>
+      <p:grpSpPr>
+        <a:xfrm>
+          <a:off x="0" y="0"/>
+          <a:ext cx="0" cy="0"/>
+          <a:chOff x="0" y="0"/>
+          <a:chExt cx="0" cy="0"/>
+        </a:xfrm>
+      </p:grpSpPr>
+      <p:pic>
+        <p:nvPicPr>
+          <p:cNvPr id="2" name="Picture 2"/>
+          <p:cNvPicPr>
+            <a:picLocks noChangeAspect="1"/>
+          </p:cNvPicPr>
+          <p:nvPr/>
+        </p:nvPicPr>
+        <p:blipFill>
+          <a:blip r:embed="rId2"/>
+          <a:stretch>
+            <a:fillRect/>
+          </a:stretch>
+        </p:blipFill>
+        <p:spPr>
+          <a:xfrm>
+            <a:off x="0" y="28575"/>
+            <a:ext cx="12192000" cy="6800850"/>
+          </a:xfrm>
+          <a:prstGeom prst="rect">
+            <a:avLst/>
+          </a:prstGeom>
+        </p:spPr>
+      </p:pic>
     </p:spTree>
   </p:cSld>
   <p:clrMapOvr>
@@ -5710,7 +5582,7 @@
 </file>
 
 <file path=ppt/slides/slide4.xml><?xml version="1.0" encoding="utf-8"?>
-<p:sld xmlns:a="http://schemas.openxmlformats.org/drawingml/2006/main" xmlns:p="http://schemas.openxmlformats.org/presentationml/2006/main" xmlns:r="http://schemas.openxmlformats.org/officeDocument/2006/relationships">
+<p:sld xmlns:a="http://schemas.openxmlformats.org/drawingml/2006/main" xmlns:r="http://schemas.openxmlformats.org/officeDocument/2006/relationships" xmlns:p="http://schemas.openxmlformats.org/presentationml/2006/main">
   <p:cSld>
     <p:spTree>
       <p:nvGrpSpPr>
@@ -5718,7 +5590,14 @@
         <p:cNvGrpSpPr/>
         <p:nvPr/>
       </p:nvGrpSpPr>
-      <p:grpSpPr/>
+      <p:grpSpPr>
+        <a:xfrm>
+          <a:off x="0" y="0"/>
+          <a:ext cx="0" cy="0"/>
+          <a:chOff x="0" y="0"/>
+          <a:chExt cx="0" cy="0"/>
+        </a:xfrm>
+      </p:grpSpPr>
       <p:sp>
         <p:nvSpPr>
           <p:cNvPr id="2" name="Rectangle 1"/>
@@ -5760,6 +5639,7 @@
           <a:lstStyle/>
           <a:p>
             <a:pPr algn="ctr"/>
+            <a:endParaRPr/>
           </a:p>
         </p:txBody>
       </p:sp>
@@ -5780,7 +5660,7 @@
           <a:noFill/>
         </p:spPr>
         <p:txBody>
-          <a:bodyPr wrap="square" anchor="t" lIns="0" rIns="0" tIns="0" bIns="0">
+          <a:bodyPr wrap="square" lIns="0" tIns="0" rIns="0" bIns="0" anchor="t">
             <a:spAutoFit/>
           </a:bodyPr>
           <a:lstStyle/>
@@ -5797,7 +5677,7 @@
                 </a:solidFill>
                 <a:latin typeface="Calibri"/>
               </a:rPr>
-              <a:t>WORKFLOW</a:t>
+              <a:t>AT A GLANCE</a:t>
             </a:r>
           </a:p>
         </p:txBody>
@@ -5819,7 +5699,7 @@
           <a:noFill/>
         </p:spPr>
         <p:txBody>
-          <a:bodyPr wrap="square" anchor="t" lIns="0" rIns="0" tIns="0" bIns="0">
+          <a:bodyPr wrap="square" lIns="0" tIns="0" rIns="0" bIns="0" anchor="t">
             <a:spAutoFit/>
           </a:bodyPr>
           <a:lstStyle/>
@@ -5836,7 +5716,7 @@
                 </a:solidFill>
                 <a:latin typeface="Calibri"/>
               </a:rPr>
-              <a:t>Five Steps from Idea to File</a:t>
+              <a:t>One Spec, Many Decks</a:t>
             </a:r>
           </a:p>
         </p:txBody>
@@ -5858,7 +5738,7 @@
           <a:noFill/>
         </p:spPr>
         <p:txBody>
-          <a:bodyPr wrap="square" anchor="t" lIns="0" rIns="0" tIns="0" bIns="0">
+          <a:bodyPr wrap="square" lIns="0" tIns="0" rIns="0" bIns="0" anchor="t">
             <a:spAutoFit/>
           </a:bodyPr>
           <a:lstStyle/>
@@ -5869,27 +5749,117 @@
               </a:lnSpc>
             </a:pPr>
             <a:r>
-              <a:rPr sz="2600" b="0" i="1">
+              <a:rPr sz="2600" b="0" i="1" dirty="0">
                 <a:solidFill>
                   <a:srgbClr val="595959"/>
                 </a:solidFill>
                 <a:latin typeface="Calibri"/>
               </a:rPr>
-              <a:t>The skill does the content design, not just text dumping.</a:t>
-            </a:r>
-          </a:p>
-        </p:txBody>
-      </p:sp>
-      <p:sp>
-        <p:nvSpPr>
-          <p:cNvPr id="6" name="TextBox 5"/>
+              <a:t>A single JSON file drives every slide — and every template.</a:t>
+            </a:r>
+          </a:p>
+        </p:txBody>
+      </p:sp>
+      <p:sp>
+        <p:nvSpPr>
+          <p:cNvPr id="6" name="Rectangle 5"/>
+          <p:cNvSpPr/>
+          <p:nvPr/>
+        </p:nvSpPr>
+        <p:spPr>
+          <a:xfrm>
+            <a:off x="640080" y="2103120"/>
+            <a:ext cx="2453563" cy="2560320"/>
+          </a:xfrm>
+          <a:prstGeom prst="rect">
+            <a:avLst/>
+          </a:prstGeom>
+          <a:solidFill>
+            <a:srgbClr val="F2F2F2"/>
+          </a:solidFill>
+          <a:ln>
+            <a:noFill/>
+          </a:ln>
+          <a:effectLst/>
+        </p:spPr>
+        <p:style>
+          <a:lnRef idx="1">
+            <a:schemeClr val="accent1"/>
+          </a:lnRef>
+          <a:fillRef idx="3">
+            <a:schemeClr val="accent1"/>
+          </a:fillRef>
+          <a:effectRef idx="2">
+            <a:schemeClr val="accent1"/>
+          </a:effectRef>
+          <a:fontRef idx="minor">
+            <a:schemeClr val="lt1"/>
+          </a:fontRef>
+        </p:style>
+        <p:txBody>
+          <a:bodyPr rtlCol="0" anchor="ctr"/>
+          <a:lstStyle/>
+          <a:p>
+            <a:pPr algn="ctr"/>
+            <a:endParaRPr/>
+          </a:p>
+        </p:txBody>
+      </p:sp>
+      <p:sp>
+        <p:nvSpPr>
+          <p:cNvPr id="7" name="Rectangle 6"/>
+          <p:cNvSpPr/>
+          <p:nvPr/>
+        </p:nvSpPr>
+        <p:spPr>
+          <a:xfrm>
+            <a:off x="640080" y="2103120"/>
+            <a:ext cx="2453563" cy="109728"/>
+          </a:xfrm>
+          <a:prstGeom prst="rect">
+            <a:avLst/>
+          </a:prstGeom>
+          <a:solidFill>
+            <a:srgbClr val="2F5597"/>
+          </a:solidFill>
+          <a:ln>
+            <a:noFill/>
+          </a:ln>
+          <a:effectLst/>
+        </p:spPr>
+        <p:style>
+          <a:lnRef idx="1">
+            <a:schemeClr val="accent1"/>
+          </a:lnRef>
+          <a:fillRef idx="3">
+            <a:schemeClr val="accent1"/>
+          </a:fillRef>
+          <a:effectRef idx="2">
+            <a:schemeClr val="accent1"/>
+          </a:effectRef>
+          <a:fontRef idx="minor">
+            <a:schemeClr val="lt1"/>
+          </a:fontRef>
+        </p:style>
+        <p:txBody>
+          <a:bodyPr rtlCol="0" anchor="ctr"/>
+          <a:lstStyle/>
+          <a:p>
+            <a:pPr algn="ctr"/>
+            <a:endParaRPr/>
+          </a:p>
+        </p:txBody>
+      </p:sp>
+      <p:sp>
+        <p:nvSpPr>
+          <p:cNvPr id="8" name="TextBox 7"/>
           <p:cNvSpPr txBox="1"/>
           <p:nvPr/>
         </p:nvSpPr>
         <p:spPr>
           <a:xfrm>
-            <a:off x="640080" y="1554480"/>
-            <a:ext cx="10911535" cy="4663440"/>
+            <a:off x="640080" y="2560320"/>
+            <a:ext cx="2453563" cy="1005840"/>
           </a:xfrm>
           <a:prstGeom prst="rect">
             <a:avLst/>
@@ -5897,18 +5867,54 @@
           <a:noFill/>
         </p:spPr>
         <p:txBody>
-          <a:bodyPr wrap="square" anchor="t" lIns="0" rIns="0" tIns="0" bIns="0">
+          <a:bodyPr wrap="square" lIns="0" tIns="0" rIns="0" bIns="0" anchor="t">
             <a:spAutoFit/>
           </a:bodyPr>
           <a:lstStyle/>
           <a:p>
-            <a:pPr algn="l">
-              <a:lnSpc>
-                <a:spcPct val="110000"/>
-              </a:lnSpc>
-              <a:spcAft>
-                <a:spcPts val="1000"/>
-              </a:spcAft>
+            <a:pPr algn="ctr">
+              <a:lnSpc>
+                <a:spcPct val="105000"/>
+              </a:lnSpc>
+            </a:pPr>
+            <a:r>
+              <a:rPr sz="4800" b="1" i="0">
+                <a:solidFill>
+                  <a:srgbClr val="111111"/>
+                </a:solidFill>
+                <a:latin typeface="Calibri"/>
+              </a:rPr>
+              <a:t>6</a:t>
+            </a:r>
+          </a:p>
+        </p:txBody>
+      </p:sp>
+      <p:sp>
+        <p:nvSpPr>
+          <p:cNvPr id="9" name="TextBox 8"/>
+          <p:cNvSpPr txBox="1"/>
+          <p:nvPr/>
+        </p:nvSpPr>
+        <p:spPr>
+          <a:xfrm>
+            <a:off x="640080" y="3611880"/>
+            <a:ext cx="2453563" cy="457200"/>
+          </a:xfrm>
+          <a:prstGeom prst="rect">
+            <a:avLst/>
+          </a:prstGeom>
+          <a:noFill/>
+        </p:spPr>
+        <p:txBody>
+          <a:bodyPr wrap="square" lIns="0" tIns="0" rIns="0" bIns="0" anchor="t">
+            <a:spAutoFit/>
+          </a:bodyPr>
+          <a:lstStyle/>
+          <a:p>
+            <a:pPr algn="ctr">
+              <a:lnSpc>
+                <a:spcPct val="105000"/>
+              </a:lnSpc>
             </a:pPr>
             <a:r>
               <a:rPr sz="2200" b="1" i="0">
@@ -5917,17 +5923,205 @@
                 </a:solidFill>
                 <a:latin typeface="Calibri"/>
               </a:rPr>
-              <a:t>●  Topic, audience, and length</a:t>
-            </a:r>
-          </a:p>
-          <a:p>
-            <a:pPr algn="l">
-              <a:lnSpc>
-                <a:spcPct val="110000"/>
-              </a:lnSpc>
-              <a:spcAft>
-                <a:spcPts val="1000"/>
-              </a:spcAft>
+              <a:t>Templates</a:t>
+            </a:r>
+          </a:p>
+        </p:txBody>
+      </p:sp>
+      <p:sp>
+        <p:nvSpPr>
+          <p:cNvPr id="10" name="TextBox 9"/>
+          <p:cNvSpPr txBox="1"/>
+          <p:nvPr/>
+        </p:nvSpPr>
+        <p:spPr>
+          <a:xfrm>
+            <a:off x="822960" y="4023360"/>
+            <a:ext cx="2087803" cy="548640"/>
+          </a:xfrm>
+          <a:prstGeom prst="rect">
+            <a:avLst/>
+          </a:prstGeom>
+          <a:noFill/>
+        </p:spPr>
+        <p:txBody>
+          <a:bodyPr wrap="square" lIns="0" tIns="0" rIns="0" bIns="0" anchor="t">
+            <a:spAutoFit/>
+          </a:bodyPr>
+          <a:lstStyle/>
+          <a:p>
+            <a:pPr algn="ctr">
+              <a:lnSpc>
+                <a:spcPct val="100000"/>
+              </a:lnSpc>
+            </a:pPr>
+            <a:r>
+              <a:rPr sz="1200" b="0" i="0">
+                <a:solidFill>
+                  <a:srgbClr val="7F7F7F"/>
+                </a:solidFill>
+                <a:latin typeface="Calibri"/>
+              </a:rPr>
+              <a:t>one-field swap</a:t>
+            </a:r>
+          </a:p>
+        </p:txBody>
+      </p:sp>
+      <p:sp>
+        <p:nvSpPr>
+          <p:cNvPr id="11" name="Rectangle 10"/>
+          <p:cNvSpPr/>
+          <p:nvPr/>
+        </p:nvSpPr>
+        <p:spPr>
+          <a:xfrm>
+            <a:off x="3459403" y="2103120"/>
+            <a:ext cx="2453563" cy="2560320"/>
+          </a:xfrm>
+          <a:prstGeom prst="rect">
+            <a:avLst/>
+          </a:prstGeom>
+          <a:solidFill>
+            <a:srgbClr val="F2F2F2"/>
+          </a:solidFill>
+          <a:ln>
+            <a:noFill/>
+          </a:ln>
+          <a:effectLst/>
+        </p:spPr>
+        <p:style>
+          <a:lnRef idx="1">
+            <a:schemeClr val="accent1"/>
+          </a:lnRef>
+          <a:fillRef idx="3">
+            <a:schemeClr val="accent1"/>
+          </a:fillRef>
+          <a:effectRef idx="2">
+            <a:schemeClr val="accent1"/>
+          </a:effectRef>
+          <a:fontRef idx="minor">
+            <a:schemeClr val="lt1"/>
+          </a:fontRef>
+        </p:style>
+        <p:txBody>
+          <a:bodyPr rtlCol="0" anchor="ctr"/>
+          <a:lstStyle/>
+          <a:p>
+            <a:pPr algn="ctr"/>
+            <a:endParaRPr/>
+          </a:p>
+        </p:txBody>
+      </p:sp>
+      <p:sp>
+        <p:nvSpPr>
+          <p:cNvPr id="12" name="Rectangle 11"/>
+          <p:cNvSpPr/>
+          <p:nvPr/>
+        </p:nvSpPr>
+        <p:spPr>
+          <a:xfrm>
+            <a:off x="3459403" y="2103120"/>
+            <a:ext cx="2453563" cy="109728"/>
+          </a:xfrm>
+          <a:prstGeom prst="rect">
+            <a:avLst/>
+          </a:prstGeom>
+          <a:solidFill>
+            <a:srgbClr val="2F5597"/>
+          </a:solidFill>
+          <a:ln>
+            <a:noFill/>
+          </a:ln>
+          <a:effectLst/>
+        </p:spPr>
+        <p:style>
+          <a:lnRef idx="1">
+            <a:schemeClr val="accent1"/>
+          </a:lnRef>
+          <a:fillRef idx="3">
+            <a:schemeClr val="accent1"/>
+          </a:fillRef>
+          <a:effectRef idx="2">
+            <a:schemeClr val="accent1"/>
+          </a:effectRef>
+          <a:fontRef idx="minor">
+            <a:schemeClr val="lt1"/>
+          </a:fontRef>
+        </p:style>
+        <p:txBody>
+          <a:bodyPr rtlCol="0" anchor="ctr"/>
+          <a:lstStyle/>
+          <a:p>
+            <a:pPr algn="ctr"/>
+            <a:endParaRPr/>
+          </a:p>
+        </p:txBody>
+      </p:sp>
+      <p:sp>
+        <p:nvSpPr>
+          <p:cNvPr id="13" name="TextBox 12"/>
+          <p:cNvSpPr txBox="1"/>
+          <p:nvPr/>
+        </p:nvSpPr>
+        <p:spPr>
+          <a:xfrm>
+            <a:off x="3459403" y="2560320"/>
+            <a:ext cx="2453563" cy="1005840"/>
+          </a:xfrm>
+          <a:prstGeom prst="rect">
+            <a:avLst/>
+          </a:prstGeom>
+          <a:noFill/>
+        </p:spPr>
+        <p:txBody>
+          <a:bodyPr wrap="square" lIns="0" tIns="0" rIns="0" bIns="0" anchor="t">
+            <a:spAutoFit/>
+          </a:bodyPr>
+          <a:lstStyle/>
+          <a:p>
+            <a:pPr algn="ctr">
+              <a:lnSpc>
+                <a:spcPct val="105000"/>
+              </a:lnSpc>
+            </a:pPr>
+            <a:r>
+              <a:rPr sz="4800" b="1" i="0">
+                <a:solidFill>
+                  <a:srgbClr val="111111"/>
+                </a:solidFill>
+                <a:latin typeface="Calibri"/>
+              </a:rPr>
+              <a:t>13</a:t>
+            </a:r>
+          </a:p>
+        </p:txBody>
+      </p:sp>
+      <p:sp>
+        <p:nvSpPr>
+          <p:cNvPr id="14" name="TextBox 13"/>
+          <p:cNvSpPr txBox="1"/>
+          <p:nvPr/>
+        </p:nvSpPr>
+        <p:spPr>
+          <a:xfrm>
+            <a:off x="3459403" y="3611880"/>
+            <a:ext cx="2453563" cy="457200"/>
+          </a:xfrm>
+          <a:prstGeom prst="rect">
+            <a:avLst/>
+          </a:prstGeom>
+          <a:noFill/>
+        </p:spPr>
+        <p:txBody>
+          <a:bodyPr wrap="square" lIns="0" tIns="0" rIns="0" bIns="0" anchor="t">
+            <a:spAutoFit/>
+          </a:bodyPr>
+          <a:lstStyle/>
+          <a:p>
+            <a:pPr algn="ctr">
+              <a:lnSpc>
+                <a:spcPct val="105000"/>
+              </a:lnSpc>
             </a:pPr>
             <a:r>
               <a:rPr sz="2200" b="1" i="0">
@@ -5936,17 +6130,205 @@
                 </a:solidFill>
                 <a:latin typeface="Calibri"/>
               </a:rPr>
-              <a:t>●  Template matched to tone</a:t>
-            </a:r>
-          </a:p>
-          <a:p>
-            <a:pPr algn="l">
-              <a:lnSpc>
-                <a:spcPct val="110000"/>
-              </a:lnSpc>
-              <a:spcAft>
-                <a:spcPts val="1000"/>
-              </a:spcAft>
+              <a:t>Layouts</a:t>
+            </a:r>
+          </a:p>
+        </p:txBody>
+      </p:sp>
+      <p:sp>
+        <p:nvSpPr>
+          <p:cNvPr id="15" name="TextBox 14"/>
+          <p:cNvSpPr txBox="1"/>
+          <p:nvPr/>
+        </p:nvSpPr>
+        <p:spPr>
+          <a:xfrm>
+            <a:off x="3642283" y="4023360"/>
+            <a:ext cx="2087803" cy="548640"/>
+          </a:xfrm>
+          <a:prstGeom prst="rect">
+            <a:avLst/>
+          </a:prstGeom>
+          <a:noFill/>
+        </p:spPr>
+        <p:txBody>
+          <a:bodyPr wrap="square" lIns="0" tIns="0" rIns="0" bIns="0" anchor="t">
+            <a:spAutoFit/>
+          </a:bodyPr>
+          <a:lstStyle/>
+          <a:p>
+            <a:pPr algn="ctr">
+              <a:lnSpc>
+                <a:spcPct val="100000"/>
+              </a:lnSpc>
+            </a:pPr>
+            <a:r>
+              <a:rPr sz="1200" b="0" i="0">
+                <a:solidFill>
+                  <a:srgbClr val="7F7F7F"/>
+                </a:solidFill>
+                <a:latin typeface="Calibri"/>
+              </a:rPr>
+              <a:t>for every slide job</a:t>
+            </a:r>
+          </a:p>
+        </p:txBody>
+      </p:sp>
+      <p:sp>
+        <p:nvSpPr>
+          <p:cNvPr id="16" name="Rectangle 15"/>
+          <p:cNvSpPr/>
+          <p:nvPr/>
+        </p:nvSpPr>
+        <p:spPr>
+          <a:xfrm>
+            <a:off x="6278727" y="2103120"/>
+            <a:ext cx="2453563" cy="2560320"/>
+          </a:xfrm>
+          <a:prstGeom prst="rect">
+            <a:avLst/>
+          </a:prstGeom>
+          <a:solidFill>
+            <a:srgbClr val="F2F2F2"/>
+          </a:solidFill>
+          <a:ln>
+            <a:noFill/>
+          </a:ln>
+          <a:effectLst/>
+        </p:spPr>
+        <p:style>
+          <a:lnRef idx="1">
+            <a:schemeClr val="accent1"/>
+          </a:lnRef>
+          <a:fillRef idx="3">
+            <a:schemeClr val="accent1"/>
+          </a:fillRef>
+          <a:effectRef idx="2">
+            <a:schemeClr val="accent1"/>
+          </a:effectRef>
+          <a:fontRef idx="minor">
+            <a:schemeClr val="lt1"/>
+          </a:fontRef>
+        </p:style>
+        <p:txBody>
+          <a:bodyPr rtlCol="0" anchor="ctr"/>
+          <a:lstStyle/>
+          <a:p>
+            <a:pPr algn="ctr"/>
+            <a:endParaRPr/>
+          </a:p>
+        </p:txBody>
+      </p:sp>
+      <p:sp>
+        <p:nvSpPr>
+          <p:cNvPr id="17" name="Rectangle 16"/>
+          <p:cNvSpPr/>
+          <p:nvPr/>
+        </p:nvSpPr>
+        <p:spPr>
+          <a:xfrm>
+            <a:off x="6278727" y="2103120"/>
+            <a:ext cx="2453563" cy="109728"/>
+          </a:xfrm>
+          <a:prstGeom prst="rect">
+            <a:avLst/>
+          </a:prstGeom>
+          <a:solidFill>
+            <a:srgbClr val="2F5597"/>
+          </a:solidFill>
+          <a:ln>
+            <a:noFill/>
+          </a:ln>
+          <a:effectLst/>
+        </p:spPr>
+        <p:style>
+          <a:lnRef idx="1">
+            <a:schemeClr val="accent1"/>
+          </a:lnRef>
+          <a:fillRef idx="3">
+            <a:schemeClr val="accent1"/>
+          </a:fillRef>
+          <a:effectRef idx="2">
+            <a:schemeClr val="accent1"/>
+          </a:effectRef>
+          <a:fontRef idx="minor">
+            <a:schemeClr val="lt1"/>
+          </a:fontRef>
+        </p:style>
+        <p:txBody>
+          <a:bodyPr rtlCol="0" anchor="ctr"/>
+          <a:lstStyle/>
+          <a:p>
+            <a:pPr algn="ctr"/>
+            <a:endParaRPr/>
+          </a:p>
+        </p:txBody>
+      </p:sp>
+      <p:sp>
+        <p:nvSpPr>
+          <p:cNvPr id="18" name="TextBox 17"/>
+          <p:cNvSpPr txBox="1"/>
+          <p:nvPr/>
+        </p:nvSpPr>
+        <p:spPr>
+          <a:xfrm>
+            <a:off x="6278727" y="2560320"/>
+            <a:ext cx="2453563" cy="1005840"/>
+          </a:xfrm>
+          <a:prstGeom prst="rect">
+            <a:avLst/>
+          </a:prstGeom>
+          <a:noFill/>
+        </p:spPr>
+        <p:txBody>
+          <a:bodyPr wrap="square" lIns="0" tIns="0" rIns="0" bIns="0" anchor="t">
+            <a:spAutoFit/>
+          </a:bodyPr>
+          <a:lstStyle/>
+          <a:p>
+            <a:pPr algn="ctr">
+              <a:lnSpc>
+                <a:spcPct val="105000"/>
+              </a:lnSpc>
+            </a:pPr>
+            <a:r>
+              <a:rPr sz="4800" b="1" i="0">
+                <a:solidFill>
+                  <a:srgbClr val="111111"/>
+                </a:solidFill>
+                <a:latin typeface="Calibri"/>
+              </a:rPr>
+              <a:t>1</a:t>
+            </a:r>
+          </a:p>
+        </p:txBody>
+      </p:sp>
+      <p:sp>
+        <p:nvSpPr>
+          <p:cNvPr id="19" name="TextBox 18"/>
+          <p:cNvSpPr txBox="1"/>
+          <p:nvPr/>
+        </p:nvSpPr>
+        <p:spPr>
+          <a:xfrm>
+            <a:off x="6278727" y="3611880"/>
+            <a:ext cx="2453563" cy="457200"/>
+          </a:xfrm>
+          <a:prstGeom prst="rect">
+            <a:avLst/>
+          </a:prstGeom>
+          <a:noFill/>
+        </p:spPr>
+        <p:txBody>
+          <a:bodyPr wrap="square" lIns="0" tIns="0" rIns="0" bIns="0" anchor="t">
+            <a:spAutoFit/>
+          </a:bodyPr>
+          <a:lstStyle/>
+          <a:p>
+            <a:pPr algn="ctr">
+              <a:lnSpc>
+                <a:spcPct val="105000"/>
+              </a:lnSpc>
             </a:pPr>
             <a:r>
               <a:rPr sz="2200" b="1" i="0">
@@ -5955,36 +6337,205 @@
                 </a:solidFill>
                 <a:latin typeface="Calibri"/>
               </a:rPr>
-              <a:t>●  Slides as a JSON spec</a:t>
-            </a:r>
-          </a:p>
-          <a:p>
-            <a:pPr algn="l" lvl="1">
-              <a:lnSpc>
-                <a:spcPct val="110000"/>
-              </a:lnSpc>
-              <a:spcAft>
-                <a:spcPts val="1000"/>
-              </a:spcAft>
-            </a:pPr>
-            <a:r>
-              <a:rPr sz="2000" b="0" i="0">
+              <a:t>JSON spec</a:t>
+            </a:r>
+          </a:p>
+        </p:txBody>
+      </p:sp>
+      <p:sp>
+        <p:nvSpPr>
+          <p:cNvPr id="20" name="TextBox 19"/>
+          <p:cNvSpPr txBox="1"/>
+          <p:nvPr/>
+        </p:nvSpPr>
+        <p:spPr>
+          <a:xfrm>
+            <a:off x="6461607" y="4023360"/>
+            <a:ext cx="2087803" cy="548640"/>
+          </a:xfrm>
+          <a:prstGeom prst="rect">
+            <a:avLst/>
+          </a:prstGeom>
+          <a:noFill/>
+        </p:spPr>
+        <p:txBody>
+          <a:bodyPr wrap="square" lIns="0" tIns="0" rIns="0" bIns="0" anchor="t">
+            <a:spAutoFit/>
+          </a:bodyPr>
+          <a:lstStyle/>
+          <a:p>
+            <a:pPr algn="ctr">
+              <a:lnSpc>
+                <a:spcPct val="100000"/>
+              </a:lnSpc>
+            </a:pPr>
+            <a:r>
+              <a:rPr sz="1200" b="0" i="0">
                 <a:solidFill>
                   <a:srgbClr val="7F7F7F"/>
                 </a:solidFill>
                 <a:latin typeface="Calibri"/>
               </a:rPr>
-              <a:t>–  Right layout per slide — the craft</a:t>
-            </a:r>
-          </a:p>
-          <a:p>
-            <a:pPr algn="l">
-              <a:lnSpc>
-                <a:spcPct val="110000"/>
-              </a:lnSpc>
-              <a:spcAft>
-                <a:spcPts val="1000"/>
-              </a:spcAft>
+              <a:t>single source of truth</a:t>
+            </a:r>
+          </a:p>
+        </p:txBody>
+      </p:sp>
+      <p:sp>
+        <p:nvSpPr>
+          <p:cNvPr id="21" name="Rectangle 20"/>
+          <p:cNvSpPr/>
+          <p:nvPr/>
+        </p:nvSpPr>
+        <p:spPr>
+          <a:xfrm>
+            <a:off x="9098051" y="2103120"/>
+            <a:ext cx="2453563" cy="2560320"/>
+          </a:xfrm>
+          <a:prstGeom prst="rect">
+            <a:avLst/>
+          </a:prstGeom>
+          <a:solidFill>
+            <a:srgbClr val="F2F2F2"/>
+          </a:solidFill>
+          <a:ln>
+            <a:noFill/>
+          </a:ln>
+          <a:effectLst/>
+        </p:spPr>
+        <p:style>
+          <a:lnRef idx="1">
+            <a:schemeClr val="accent1"/>
+          </a:lnRef>
+          <a:fillRef idx="3">
+            <a:schemeClr val="accent1"/>
+          </a:fillRef>
+          <a:effectRef idx="2">
+            <a:schemeClr val="accent1"/>
+          </a:effectRef>
+          <a:fontRef idx="minor">
+            <a:schemeClr val="lt1"/>
+          </a:fontRef>
+        </p:style>
+        <p:txBody>
+          <a:bodyPr rtlCol="0" anchor="ctr"/>
+          <a:lstStyle/>
+          <a:p>
+            <a:pPr algn="ctr"/>
+            <a:endParaRPr/>
+          </a:p>
+        </p:txBody>
+      </p:sp>
+      <p:sp>
+        <p:nvSpPr>
+          <p:cNvPr id="22" name="Rectangle 21"/>
+          <p:cNvSpPr/>
+          <p:nvPr/>
+        </p:nvSpPr>
+        <p:spPr>
+          <a:xfrm>
+            <a:off x="9098051" y="2103120"/>
+            <a:ext cx="2453563" cy="109728"/>
+          </a:xfrm>
+          <a:prstGeom prst="rect">
+            <a:avLst/>
+          </a:prstGeom>
+          <a:solidFill>
+            <a:srgbClr val="2F5597"/>
+          </a:solidFill>
+          <a:ln>
+            <a:noFill/>
+          </a:ln>
+          <a:effectLst/>
+        </p:spPr>
+        <p:style>
+          <a:lnRef idx="1">
+            <a:schemeClr val="accent1"/>
+          </a:lnRef>
+          <a:fillRef idx="3">
+            <a:schemeClr val="accent1"/>
+          </a:fillRef>
+          <a:effectRef idx="2">
+            <a:schemeClr val="accent1"/>
+          </a:effectRef>
+          <a:fontRef idx="minor">
+            <a:schemeClr val="lt1"/>
+          </a:fontRef>
+        </p:style>
+        <p:txBody>
+          <a:bodyPr rtlCol="0" anchor="ctr"/>
+          <a:lstStyle/>
+          <a:p>
+            <a:pPr algn="ctr"/>
+            <a:endParaRPr/>
+          </a:p>
+        </p:txBody>
+      </p:sp>
+      <p:sp>
+        <p:nvSpPr>
+          <p:cNvPr id="23" name="TextBox 22"/>
+          <p:cNvSpPr txBox="1"/>
+          <p:nvPr/>
+        </p:nvSpPr>
+        <p:spPr>
+          <a:xfrm>
+            <a:off x="9098051" y="2560320"/>
+            <a:ext cx="2453563" cy="1005840"/>
+          </a:xfrm>
+          <a:prstGeom prst="rect">
+            <a:avLst/>
+          </a:prstGeom>
+          <a:noFill/>
+        </p:spPr>
+        <p:txBody>
+          <a:bodyPr wrap="square" lIns="0" tIns="0" rIns="0" bIns="0" anchor="t">
+            <a:spAutoFit/>
+          </a:bodyPr>
+          <a:lstStyle/>
+          <a:p>
+            <a:pPr algn="ctr">
+              <a:lnSpc>
+                <a:spcPct val="105000"/>
+              </a:lnSpc>
+            </a:pPr>
+            <a:r>
+              <a:rPr sz="4800" b="1" i="0">
+                <a:solidFill>
+                  <a:srgbClr val="111111"/>
+                </a:solidFill>
+                <a:latin typeface="Calibri"/>
+              </a:rPr>
+              <a:t>100%</a:t>
+            </a:r>
+          </a:p>
+        </p:txBody>
+      </p:sp>
+      <p:sp>
+        <p:nvSpPr>
+          <p:cNvPr id="24" name="TextBox 23"/>
+          <p:cNvSpPr txBox="1"/>
+          <p:nvPr/>
+        </p:nvSpPr>
+        <p:spPr>
+          <a:xfrm>
+            <a:off x="9098051" y="3611880"/>
+            <a:ext cx="2453563" cy="457200"/>
+          </a:xfrm>
+          <a:prstGeom prst="rect">
+            <a:avLst/>
+          </a:prstGeom>
+          <a:noFill/>
+        </p:spPr>
+        <p:txBody>
+          <a:bodyPr wrap="square" lIns="0" tIns="0" rIns="0" bIns="0" anchor="t">
+            <a:spAutoFit/>
+          </a:bodyPr>
+          <a:lstStyle/>
+          <a:p>
+            <a:pPr algn="ctr">
+              <a:lnSpc>
+                <a:spcPct val="105000"/>
+              </a:lnSpc>
             </a:pPr>
             <a:r>
               <a:rPr sz="2200" b="1" i="0">
@@ -5993,33 +6544,53 @@
                 </a:solidFill>
                 <a:latin typeface="Calibri"/>
               </a:rPr>
-              <a:t>●  Validation, then render</a:t>
-            </a:r>
-          </a:p>
-          <a:p>
-            <a:pPr algn="l">
-              <a:lnSpc>
-                <a:spcPct val="110000"/>
-              </a:lnSpc>
-              <a:spcAft>
-                <a:spcPts val="1000"/>
-              </a:spcAft>
-            </a:pPr>
-            <a:r>
-              <a:rPr sz="2200" b="1" i="0">
-                <a:solidFill>
-                  <a:srgbClr val="1A1A1A"/>
-                </a:solidFill>
-                <a:latin typeface="Calibri"/>
-              </a:rPr>
-              <a:t>●  Fast restyle and refinement</a:t>
-            </a:r>
-          </a:p>
-        </p:txBody>
-      </p:sp>
-      <p:sp>
-        <p:nvSpPr>
-          <p:cNvPr id="7" name="TextBox 6"/>
+              <a:t>Editable</a:t>
+            </a:r>
+          </a:p>
+        </p:txBody>
+      </p:sp>
+      <p:sp>
+        <p:nvSpPr>
+          <p:cNvPr id="25" name="TextBox 24"/>
+          <p:cNvSpPr txBox="1"/>
+          <p:nvPr/>
+        </p:nvSpPr>
+        <p:spPr>
+          <a:xfrm>
+            <a:off x="9280931" y="4023360"/>
+            <a:ext cx="2087803" cy="548640"/>
+          </a:xfrm>
+          <a:prstGeom prst="rect">
+            <a:avLst/>
+          </a:prstGeom>
+          <a:noFill/>
+        </p:spPr>
+        <p:txBody>
+          <a:bodyPr wrap="square" lIns="0" tIns="0" rIns="0" bIns="0" anchor="t">
+            <a:spAutoFit/>
+          </a:bodyPr>
+          <a:lstStyle/>
+          <a:p>
+            <a:pPr algn="ctr">
+              <a:lnSpc>
+                <a:spcPct val="100000"/>
+              </a:lnSpc>
+            </a:pPr>
+            <a:r>
+              <a:rPr sz="1200" b="0" i="0">
+                <a:solidFill>
+                  <a:srgbClr val="7F7F7F"/>
+                </a:solidFill>
+                <a:latin typeface="Calibri"/>
+              </a:rPr>
+              <a:t>real .pptx output</a:t>
+            </a:r>
+          </a:p>
+        </p:txBody>
+      </p:sp>
+      <p:sp>
+        <p:nvSpPr>
+          <p:cNvPr id="26" name="TextBox 25"/>
           <p:cNvSpPr txBox="1"/>
           <p:nvPr/>
         </p:nvSpPr>
@@ -6034,7 +6605,7 @@
           <a:noFill/>
         </p:spPr>
         <p:txBody>
-          <a:bodyPr wrap="square" anchor="t" lIns="0" rIns="0" tIns="0" bIns="0">
+          <a:bodyPr wrap="square" lIns="0" tIns="0" rIns="0" bIns="0" anchor="t">
             <a:spAutoFit/>
           </a:bodyPr>
           <a:lstStyle/>
@@ -6051,14 +6622,14 @@
                 </a:solidFill>
                 <a:latin typeface="Calibri"/>
               </a:rPr>
-              <a:t>4</a:t>
-            </a:r>
-          </a:p>
-        </p:txBody>
-      </p:sp>
-      <p:sp>
-        <p:nvSpPr>
-          <p:cNvPr id="8" name="TextBox 7"/>
+              <a:t>3</a:t>
+            </a:r>
+          </a:p>
+        </p:txBody>
+      </p:sp>
+      <p:sp>
+        <p:nvSpPr>
+          <p:cNvPr id="27" name="TextBox 26"/>
           <p:cNvSpPr txBox="1"/>
           <p:nvPr/>
         </p:nvSpPr>
@@ -6073,7 +6644,7 @@
           <a:noFill/>
         </p:spPr>
         <p:txBody>
-          <a:bodyPr wrap="square" anchor="t" lIns="0" rIns="0" tIns="0" bIns="0">
+          <a:bodyPr wrap="square" lIns="0" tIns="0" rIns="0" bIns="0" anchor="t">
             <a:spAutoFit/>
           </a:bodyPr>
           <a:lstStyle/>
@@ -6104,7 +6675,7 @@
 </file>
 
 <file path=ppt/slides/slide5.xml><?xml version="1.0" encoding="utf-8"?>
-<p:sld xmlns:a="http://schemas.openxmlformats.org/drawingml/2006/main" xmlns:p="http://schemas.openxmlformats.org/presentationml/2006/main" xmlns:r="http://schemas.openxmlformats.org/officeDocument/2006/relationships">
+<p:sld xmlns:a="http://schemas.openxmlformats.org/drawingml/2006/main" xmlns:r="http://schemas.openxmlformats.org/officeDocument/2006/relationships" xmlns:p="http://schemas.openxmlformats.org/presentationml/2006/main">
   <p:cSld>
     <p:spTree>
       <p:nvGrpSpPr>
@@ -6112,767 +6683,38 @@
         <p:cNvGrpSpPr/>
         <p:nvPr/>
       </p:nvGrpSpPr>
-      <p:grpSpPr/>
-      <p:sp>
-        <p:nvSpPr>
-          <p:cNvPr id="2" name="Rectangle 1"/>
-          <p:cNvSpPr/>
-          <p:nvPr/>
-        </p:nvSpPr>
-        <p:spPr>
-          <a:xfrm>
-            <a:off x="0" y="0"/>
-            <a:ext cx="12191695" cy="914400"/>
-          </a:xfrm>
-          <a:prstGeom prst="rect">
-            <a:avLst/>
-          </a:prstGeom>
-          <a:solidFill>
-            <a:srgbClr val="111111"/>
-          </a:solidFill>
-          <a:ln>
-            <a:noFill/>
-          </a:ln>
-          <a:effectLst/>
-        </p:spPr>
-        <p:style>
-          <a:lnRef idx="1">
-            <a:schemeClr val="accent1"/>
-          </a:lnRef>
-          <a:fillRef idx="3">
-            <a:schemeClr val="accent1"/>
-          </a:fillRef>
-          <a:effectRef idx="2">
-            <a:schemeClr val="accent1"/>
-          </a:effectRef>
-          <a:fontRef idx="minor">
-            <a:schemeClr val="lt1"/>
-          </a:fontRef>
-        </p:style>
-        <p:txBody>
-          <a:bodyPr rtlCol="0" anchor="ctr"/>
-          <a:lstStyle/>
-          <a:p>
-            <a:pPr algn="ctr"/>
-          </a:p>
-        </p:txBody>
-      </p:sp>
-      <p:sp>
-        <p:nvSpPr>
-          <p:cNvPr id="3" name="TextBox 2"/>
-          <p:cNvSpPr txBox="1"/>
-          <p:nvPr/>
-        </p:nvSpPr>
-        <p:spPr>
-          <a:xfrm>
-            <a:off x="640080" y="118872"/>
-            <a:ext cx="8168335" cy="219456"/>
-          </a:xfrm>
-          <a:prstGeom prst="rect">
-            <a:avLst/>
-          </a:prstGeom>
-          <a:noFill/>
-        </p:spPr>
-        <p:txBody>
-          <a:bodyPr wrap="square" anchor="t" lIns="0" rIns="0" tIns="0" bIns="0">
-            <a:spAutoFit/>
-          </a:bodyPr>
-          <a:lstStyle/>
-          <a:p>
-            <a:pPr algn="l">
-              <a:lnSpc>
-                <a:spcPct val="105000"/>
-              </a:lnSpc>
-            </a:pPr>
-            <a:r>
-              <a:rPr sz="1100" b="1" i="0">
-                <a:solidFill>
-                  <a:srgbClr val="FFFFFF"/>
-                </a:solidFill>
-                <a:latin typeface="Calibri"/>
-              </a:rPr>
-              <a:t>WORKFLOW</a:t>
-            </a:r>
-          </a:p>
-        </p:txBody>
-      </p:sp>
-      <p:sp>
-        <p:nvSpPr>
-          <p:cNvPr id="4" name="TextBox 3"/>
-          <p:cNvSpPr txBox="1"/>
-          <p:nvPr/>
-        </p:nvSpPr>
-        <p:spPr>
-          <a:xfrm>
-            <a:off x="640080" y="347472"/>
-            <a:ext cx="8168335" cy="493776"/>
-          </a:xfrm>
-          <a:prstGeom prst="rect">
-            <a:avLst/>
-          </a:prstGeom>
-          <a:noFill/>
-        </p:spPr>
-        <p:txBody>
-          <a:bodyPr wrap="square" anchor="t" lIns="0" rIns="0" tIns="0" bIns="0">
-            <a:spAutoFit/>
-          </a:bodyPr>
-          <a:lstStyle/>
-          <a:p>
-            <a:pPr algn="l">
-              <a:lnSpc>
-                <a:spcPct val="105000"/>
-              </a:lnSpc>
-            </a:pPr>
-            <a:r>
-              <a:rPr sz="3000" b="1" i="0">
-                <a:solidFill>
-                  <a:srgbClr val="FFFFFF"/>
-                </a:solidFill>
-                <a:latin typeface="Calibri"/>
-              </a:rPr>
-              <a:t>The Five-Step Workflow</a:t>
-            </a:r>
-          </a:p>
-        </p:txBody>
-      </p:sp>
-      <p:sp>
-        <p:nvSpPr>
-          <p:cNvPr id="5" name="TextBox 4"/>
-          <p:cNvSpPr txBox="1"/>
-          <p:nvPr/>
-        </p:nvSpPr>
-        <p:spPr>
-          <a:xfrm>
-            <a:off x="640080" y="1024128"/>
-            <a:ext cx="10911535" cy="457200"/>
-          </a:xfrm>
-          <a:prstGeom prst="rect">
-            <a:avLst/>
-          </a:prstGeom>
-          <a:noFill/>
-        </p:spPr>
-        <p:txBody>
-          <a:bodyPr wrap="square" anchor="t" lIns="0" rIns="0" tIns="0" bIns="0">
-            <a:spAutoFit/>
-          </a:bodyPr>
-          <a:lstStyle/>
-          <a:p>
-            <a:pPr algn="l">
-              <a:lnSpc>
-                <a:spcPct val="105000"/>
-              </a:lnSpc>
-            </a:pPr>
-            <a:r>
-              <a:rPr sz="2600" b="0" i="1">
-                <a:solidFill>
-                  <a:srgbClr val="595959"/>
-                </a:solidFill>
-                <a:latin typeface="Calibri"/>
-              </a:rPr>
-              <a:t>Drawn as real PowerPoint shapes, so every box stays editable.</a:t>
-            </a:r>
-          </a:p>
-        </p:txBody>
-      </p:sp>
-      <p:sp>
-        <p:nvSpPr>
-          <p:cNvPr id="6" name="Rounded Rectangle 5"/>
-          <p:cNvSpPr/>
-          <p:nvPr/>
-        </p:nvSpPr>
-        <p:spPr>
-          <a:xfrm>
-            <a:off x="640080" y="3246120"/>
-            <a:ext cx="1816547" cy="1554480"/>
-          </a:xfrm>
-          <a:prstGeom prst="roundRect">
-            <a:avLst/>
-          </a:prstGeom>
-          <a:solidFill>
-            <a:srgbClr val="111111"/>
-          </a:solidFill>
-          <a:ln>
-            <a:noFill/>
-          </a:ln>
-          <a:effectLst/>
-        </p:spPr>
-        <p:style>
-          <a:lnRef idx="1">
-            <a:schemeClr val="accent1"/>
-          </a:lnRef>
-          <a:fillRef idx="3">
-            <a:schemeClr val="accent1"/>
-          </a:fillRef>
-          <a:effectRef idx="2">
-            <a:schemeClr val="accent1"/>
-          </a:effectRef>
-          <a:fontRef idx="minor">
-            <a:schemeClr val="lt1"/>
-          </a:fontRef>
-        </p:style>
-        <p:txBody>
-          <a:bodyPr rtlCol="0" anchor="ctr" wrap="square" lIns="73152" rIns="73152" tIns="27432" bIns="27432"/>
-          <a:lstStyle/>
-          <a:p>
-            <a:pPr algn="ctr"/>
-            <a:r>
-              <a:rPr b="1" sz="1500">
-                <a:solidFill>
-                  <a:srgbClr val="FFFFFF"/>
-                </a:solidFill>
-                <a:latin typeface="Calibri"/>
-              </a:rPr>
-              <a:t>Understand</a:t>
-            </a:r>
-          </a:p>
-          <a:p>
-            <a:pPr algn="ctr">
-              <a:spcBef>
-                <a:spcPts val="200"/>
-              </a:spcBef>
-            </a:pPr>
-            <a:r>
-              <a:rPr sz="1100">
-                <a:solidFill>
-                  <a:srgbClr val="FFFFFF"/>
-                </a:solidFill>
-                <a:latin typeface="Calibri"/>
-              </a:rPr>
-              <a:t>Topic &amp; audience</a:t>
-            </a:r>
-          </a:p>
-        </p:txBody>
-      </p:sp>
-      <p:sp>
-        <p:nvSpPr>
-          <p:cNvPr id="7" name="Right Arrow 6"/>
-          <p:cNvSpPr/>
-          <p:nvPr/>
-        </p:nvSpPr>
-        <p:spPr>
-          <a:xfrm>
-            <a:off x="2502347" y="3858768"/>
-            <a:ext cx="365760" cy="329184"/>
-          </a:xfrm>
-          <a:prstGeom prst="rightArrow">
-            <a:avLst/>
-          </a:prstGeom>
-          <a:solidFill>
-            <a:srgbClr val="2F5597"/>
-          </a:solidFill>
-          <a:ln>
-            <a:noFill/>
-          </a:ln>
-          <a:effectLst/>
-        </p:spPr>
-        <p:style>
-          <a:lnRef idx="1">
-            <a:schemeClr val="accent1"/>
-          </a:lnRef>
-          <a:fillRef idx="3">
-            <a:schemeClr val="accent1"/>
-          </a:fillRef>
-          <a:effectRef idx="2">
-            <a:schemeClr val="accent1"/>
-          </a:effectRef>
-          <a:fontRef idx="minor">
-            <a:schemeClr val="lt1"/>
-          </a:fontRef>
-        </p:style>
-        <p:txBody>
-          <a:bodyPr rtlCol="0" anchor="ctr"/>
-          <a:lstStyle/>
-          <a:p>
-            <a:pPr algn="ctr"/>
-          </a:p>
-        </p:txBody>
-      </p:sp>
-      <p:sp>
-        <p:nvSpPr>
-          <p:cNvPr id="8" name="Rounded Rectangle 7"/>
-          <p:cNvSpPr/>
-          <p:nvPr/>
-        </p:nvSpPr>
-        <p:spPr>
-          <a:xfrm>
-            <a:off x="2913827" y="3246120"/>
-            <a:ext cx="1816547" cy="1554480"/>
-          </a:xfrm>
-          <a:prstGeom prst="roundRect">
-            <a:avLst/>
-          </a:prstGeom>
-          <a:solidFill>
-            <a:srgbClr val="595959"/>
-          </a:solidFill>
-          <a:ln>
-            <a:noFill/>
-          </a:ln>
-          <a:effectLst/>
-        </p:spPr>
-        <p:style>
-          <a:lnRef idx="1">
-            <a:schemeClr val="accent1"/>
-          </a:lnRef>
-          <a:fillRef idx="3">
-            <a:schemeClr val="accent1"/>
-          </a:fillRef>
-          <a:effectRef idx="2">
-            <a:schemeClr val="accent1"/>
-          </a:effectRef>
-          <a:fontRef idx="minor">
-            <a:schemeClr val="lt1"/>
-          </a:fontRef>
-        </p:style>
-        <p:txBody>
-          <a:bodyPr rtlCol="0" anchor="ctr" wrap="square" lIns="73152" rIns="73152" tIns="27432" bIns="27432"/>
-          <a:lstStyle/>
-          <a:p>
-            <a:pPr algn="ctr"/>
-            <a:r>
-              <a:rPr b="1" sz="1500">
-                <a:solidFill>
-                  <a:srgbClr val="FFFFFF"/>
-                </a:solidFill>
-                <a:latin typeface="Calibri"/>
-              </a:rPr>
-              <a:t>Template</a:t>
-            </a:r>
-          </a:p>
-          <a:p>
-            <a:pPr algn="ctr">
-              <a:spcBef>
-                <a:spcPts val="200"/>
-              </a:spcBef>
-            </a:pPr>
-            <a:r>
-              <a:rPr sz="1100">
-                <a:solidFill>
-                  <a:srgbClr val="FFFFFF"/>
-                </a:solidFill>
-                <a:latin typeface="Calibri"/>
-              </a:rPr>
-              <a:t>Pick the look</a:t>
-            </a:r>
-          </a:p>
-        </p:txBody>
-      </p:sp>
-      <p:sp>
-        <p:nvSpPr>
-          <p:cNvPr id="9" name="Right Arrow 8"/>
-          <p:cNvSpPr/>
-          <p:nvPr/>
-        </p:nvSpPr>
-        <p:spPr>
-          <a:xfrm>
-            <a:off x="4776094" y="3858768"/>
-            <a:ext cx="365760" cy="329184"/>
-          </a:xfrm>
-          <a:prstGeom prst="rightArrow">
-            <a:avLst/>
-          </a:prstGeom>
-          <a:solidFill>
-            <a:srgbClr val="2F5597"/>
-          </a:solidFill>
-          <a:ln>
-            <a:noFill/>
-          </a:ln>
-          <a:effectLst/>
-        </p:spPr>
-        <p:style>
-          <a:lnRef idx="1">
-            <a:schemeClr val="accent1"/>
-          </a:lnRef>
-          <a:fillRef idx="3">
-            <a:schemeClr val="accent1"/>
-          </a:fillRef>
-          <a:effectRef idx="2">
-            <a:schemeClr val="accent1"/>
-          </a:effectRef>
-          <a:fontRef idx="minor">
-            <a:schemeClr val="lt1"/>
-          </a:fontRef>
-        </p:style>
-        <p:txBody>
-          <a:bodyPr rtlCol="0" anchor="ctr"/>
-          <a:lstStyle/>
-          <a:p>
-            <a:pPr algn="ctr"/>
-          </a:p>
-        </p:txBody>
-      </p:sp>
-      <p:sp>
-        <p:nvSpPr>
-          <p:cNvPr id="10" name="Rounded Rectangle 9"/>
-          <p:cNvSpPr/>
-          <p:nvPr/>
-        </p:nvSpPr>
-        <p:spPr>
-          <a:xfrm>
-            <a:off x="5187574" y="3246120"/>
-            <a:ext cx="1816547" cy="1554480"/>
-          </a:xfrm>
-          <a:prstGeom prst="roundRect">
-            <a:avLst/>
-          </a:prstGeom>
-          <a:solidFill>
-            <a:srgbClr val="111111"/>
-          </a:solidFill>
-          <a:ln>
-            <a:noFill/>
-          </a:ln>
-          <a:effectLst/>
-        </p:spPr>
-        <p:style>
-          <a:lnRef idx="1">
-            <a:schemeClr val="accent1"/>
-          </a:lnRef>
-          <a:fillRef idx="3">
-            <a:schemeClr val="accent1"/>
-          </a:fillRef>
-          <a:effectRef idx="2">
-            <a:schemeClr val="accent1"/>
-          </a:effectRef>
-          <a:fontRef idx="minor">
-            <a:schemeClr val="lt1"/>
-          </a:fontRef>
-        </p:style>
-        <p:txBody>
-          <a:bodyPr rtlCol="0" anchor="ctr" wrap="square" lIns="73152" rIns="73152" tIns="27432" bIns="27432"/>
-          <a:lstStyle/>
-          <a:p>
-            <a:pPr algn="ctr"/>
-            <a:r>
-              <a:rPr b="1" sz="1500">
-                <a:solidFill>
-                  <a:srgbClr val="FFFFFF"/>
-                </a:solidFill>
-                <a:latin typeface="Calibri"/>
-              </a:rPr>
-              <a:t>Design</a:t>
-            </a:r>
-          </a:p>
-          <a:p>
-            <a:pPr algn="ctr">
-              <a:spcBef>
-                <a:spcPts val="200"/>
-              </a:spcBef>
-            </a:pPr>
-            <a:r>
-              <a:rPr sz="1100">
-                <a:solidFill>
-                  <a:srgbClr val="FFFFFF"/>
-                </a:solidFill>
-                <a:latin typeface="Calibri"/>
-              </a:rPr>
-              <a:t>Author the spec</a:t>
-            </a:r>
-          </a:p>
-        </p:txBody>
-      </p:sp>
-      <p:sp>
-        <p:nvSpPr>
-          <p:cNvPr id="11" name="Right Arrow 10"/>
-          <p:cNvSpPr/>
-          <p:nvPr/>
-        </p:nvSpPr>
-        <p:spPr>
-          <a:xfrm>
-            <a:off x="7049841" y="3858768"/>
-            <a:ext cx="365760" cy="329184"/>
-          </a:xfrm>
-          <a:prstGeom prst="rightArrow">
-            <a:avLst/>
-          </a:prstGeom>
-          <a:solidFill>
-            <a:srgbClr val="2F5597"/>
-          </a:solidFill>
-          <a:ln>
-            <a:noFill/>
-          </a:ln>
-          <a:effectLst/>
-        </p:spPr>
-        <p:style>
-          <a:lnRef idx="1">
-            <a:schemeClr val="accent1"/>
-          </a:lnRef>
-          <a:fillRef idx="3">
-            <a:schemeClr val="accent1"/>
-          </a:fillRef>
-          <a:effectRef idx="2">
-            <a:schemeClr val="accent1"/>
-          </a:effectRef>
-          <a:fontRef idx="minor">
-            <a:schemeClr val="lt1"/>
-          </a:fontRef>
-        </p:style>
-        <p:txBody>
-          <a:bodyPr rtlCol="0" anchor="ctr"/>
-          <a:lstStyle/>
-          <a:p>
-            <a:pPr algn="ctr"/>
-          </a:p>
-        </p:txBody>
-      </p:sp>
-      <p:sp>
-        <p:nvSpPr>
-          <p:cNvPr id="12" name="Rounded Rectangle 11"/>
-          <p:cNvSpPr/>
-          <p:nvPr/>
-        </p:nvSpPr>
-        <p:spPr>
-          <a:xfrm>
-            <a:off x="7461321" y="3246120"/>
-            <a:ext cx="1816547" cy="1554480"/>
-          </a:xfrm>
-          <a:prstGeom prst="roundRect">
-            <a:avLst/>
-          </a:prstGeom>
-          <a:solidFill>
-            <a:srgbClr val="595959"/>
-          </a:solidFill>
-          <a:ln>
-            <a:noFill/>
-          </a:ln>
-          <a:effectLst/>
-        </p:spPr>
-        <p:style>
-          <a:lnRef idx="1">
-            <a:schemeClr val="accent1"/>
-          </a:lnRef>
-          <a:fillRef idx="3">
-            <a:schemeClr val="accent1"/>
-          </a:fillRef>
-          <a:effectRef idx="2">
-            <a:schemeClr val="accent1"/>
-          </a:effectRef>
-          <a:fontRef idx="minor">
-            <a:schemeClr val="lt1"/>
-          </a:fontRef>
-        </p:style>
-        <p:txBody>
-          <a:bodyPr rtlCol="0" anchor="ctr" wrap="square" lIns="73152" rIns="73152" tIns="27432" bIns="27432"/>
-          <a:lstStyle/>
-          <a:p>
-            <a:pPr algn="ctr"/>
-            <a:r>
-              <a:rPr b="1" sz="1500">
-                <a:solidFill>
-                  <a:srgbClr val="FFFFFF"/>
-                </a:solidFill>
-                <a:latin typeface="Calibri"/>
-              </a:rPr>
-              <a:t>Render</a:t>
-            </a:r>
-          </a:p>
-          <a:p>
-            <a:pPr algn="ctr">
-              <a:spcBef>
-                <a:spcPts val="200"/>
-              </a:spcBef>
-            </a:pPr>
-            <a:r>
-              <a:rPr sz="1100">
-                <a:solidFill>
-                  <a:srgbClr val="FFFFFF"/>
-                </a:solidFill>
-                <a:latin typeface="Calibri"/>
-              </a:rPr>
-              <a:t>Validate &amp; build</a:t>
-            </a:r>
-          </a:p>
-        </p:txBody>
-      </p:sp>
-      <p:sp>
-        <p:nvSpPr>
-          <p:cNvPr id="13" name="Right Arrow 12"/>
-          <p:cNvSpPr/>
-          <p:nvPr/>
-        </p:nvSpPr>
-        <p:spPr>
-          <a:xfrm>
-            <a:off x="9323588" y="3858768"/>
-            <a:ext cx="365760" cy="329184"/>
-          </a:xfrm>
-          <a:prstGeom prst="rightArrow">
-            <a:avLst/>
-          </a:prstGeom>
-          <a:solidFill>
-            <a:srgbClr val="2F5597"/>
-          </a:solidFill>
-          <a:ln>
-            <a:noFill/>
-          </a:ln>
-          <a:effectLst/>
-        </p:spPr>
-        <p:style>
-          <a:lnRef idx="1">
-            <a:schemeClr val="accent1"/>
-          </a:lnRef>
-          <a:fillRef idx="3">
-            <a:schemeClr val="accent1"/>
-          </a:fillRef>
-          <a:effectRef idx="2">
-            <a:schemeClr val="accent1"/>
-          </a:effectRef>
-          <a:fontRef idx="minor">
-            <a:schemeClr val="lt1"/>
-          </a:fontRef>
-        </p:style>
-        <p:txBody>
-          <a:bodyPr rtlCol="0" anchor="ctr"/>
-          <a:lstStyle/>
-          <a:p>
-            <a:pPr algn="ctr"/>
-          </a:p>
-        </p:txBody>
-      </p:sp>
-      <p:sp>
-        <p:nvSpPr>
-          <p:cNvPr id="14" name="Rounded Rectangle 13"/>
-          <p:cNvSpPr/>
-          <p:nvPr/>
-        </p:nvSpPr>
-        <p:spPr>
-          <a:xfrm>
-            <a:off x="9735068" y="3246120"/>
-            <a:ext cx="1816547" cy="1554480"/>
-          </a:xfrm>
-          <a:prstGeom prst="roundRect">
-            <a:avLst/>
-          </a:prstGeom>
-          <a:solidFill>
-            <a:srgbClr val="111111"/>
-          </a:solidFill>
-          <a:ln>
-            <a:noFill/>
-          </a:ln>
-          <a:effectLst/>
-        </p:spPr>
-        <p:style>
-          <a:lnRef idx="1">
-            <a:schemeClr val="accent1"/>
-          </a:lnRef>
-          <a:fillRef idx="3">
-            <a:schemeClr val="accent1"/>
-          </a:fillRef>
-          <a:effectRef idx="2">
-            <a:schemeClr val="accent1"/>
-          </a:effectRef>
-          <a:fontRef idx="minor">
-            <a:schemeClr val="lt1"/>
-          </a:fontRef>
-        </p:style>
-        <p:txBody>
-          <a:bodyPr rtlCol="0" anchor="ctr" wrap="square" lIns="73152" rIns="73152" tIns="27432" bIns="27432"/>
-          <a:lstStyle/>
-          <a:p>
-            <a:pPr algn="ctr"/>
-            <a:r>
-              <a:rPr b="1" sz="1500">
-                <a:solidFill>
-                  <a:srgbClr val="FFFFFF"/>
-                </a:solidFill>
-                <a:latin typeface="Calibri"/>
-              </a:rPr>
-              <a:t>Iterate</a:t>
-            </a:r>
-          </a:p>
-          <a:p>
-            <a:pPr algn="ctr">
-              <a:spcBef>
-                <a:spcPts val="200"/>
-              </a:spcBef>
-            </a:pPr>
-            <a:r>
-              <a:rPr sz="1100">
-                <a:solidFill>
-                  <a:srgbClr val="FFFFFF"/>
-                </a:solidFill>
-                <a:latin typeface="Calibri"/>
-              </a:rPr>
-              <a:t>Restyle &amp; refine</a:t>
-            </a:r>
-          </a:p>
-        </p:txBody>
-      </p:sp>
-      <p:sp>
-        <p:nvSpPr>
-          <p:cNvPr id="15" name="TextBox 14"/>
-          <p:cNvSpPr txBox="1"/>
-          <p:nvPr/>
-        </p:nvSpPr>
-        <p:spPr>
-          <a:xfrm>
-            <a:off x="10454335" y="6291072"/>
-            <a:ext cx="1097280" cy="384048"/>
-          </a:xfrm>
-          <a:prstGeom prst="rect">
-            <a:avLst/>
-          </a:prstGeom>
-          <a:noFill/>
-        </p:spPr>
-        <p:txBody>
-          <a:bodyPr wrap="square" anchor="t" lIns="0" rIns="0" tIns="0" bIns="0">
-            <a:spAutoFit/>
-          </a:bodyPr>
-          <a:lstStyle/>
-          <a:p>
-            <a:pPr algn="r">
-              <a:lnSpc>
-                <a:spcPct val="105000"/>
-              </a:lnSpc>
-            </a:pPr>
-            <a:r>
-              <a:rPr sz="1600" b="0" i="0">
-                <a:solidFill>
-                  <a:srgbClr val="7F7F7F"/>
-                </a:solidFill>
-                <a:latin typeface="Calibri"/>
-              </a:rPr>
-              <a:t>5</a:t>
-            </a:r>
-          </a:p>
-        </p:txBody>
-      </p:sp>
-      <p:sp>
-        <p:nvSpPr>
-          <p:cNvPr id="16" name="TextBox 15"/>
-          <p:cNvSpPr txBox="1"/>
-          <p:nvPr/>
-        </p:nvSpPr>
-        <p:spPr>
-          <a:xfrm>
-            <a:off x="8808415" y="182880"/>
-            <a:ext cx="2743200" cy="548640"/>
-          </a:xfrm>
-          <a:prstGeom prst="rect">
-            <a:avLst/>
-          </a:prstGeom>
-          <a:noFill/>
-        </p:spPr>
-        <p:txBody>
-          <a:bodyPr wrap="square" anchor="t" lIns="0" rIns="0" tIns="0" bIns="0">
-            <a:spAutoFit/>
-          </a:bodyPr>
-          <a:lstStyle/>
-          <a:p>
-            <a:pPr algn="r">
-              <a:lnSpc>
-                <a:spcPct val="105000"/>
-              </a:lnSpc>
-            </a:pPr>
-            <a:r>
-              <a:rPr sz="1800" b="1" i="0">
-                <a:solidFill>
-                  <a:srgbClr val="FFFFFF"/>
-                </a:solidFill>
-                <a:latin typeface="Calibri"/>
-              </a:rPr>
-              <a:t>Confidential</a:t>
-            </a:r>
-          </a:p>
-        </p:txBody>
-      </p:sp>
+      <p:grpSpPr>
+        <a:xfrm>
+          <a:off x="0" y="0"/>
+          <a:ext cx="0" cy="0"/>
+          <a:chOff x="0" y="0"/>
+          <a:chExt cx="0" cy="0"/>
+        </a:xfrm>
+      </p:grpSpPr>
+      <p:pic>
+        <p:nvPicPr>
+          <p:cNvPr id="2" name="Picture 2"/>
+          <p:cNvPicPr>
+            <a:picLocks noChangeAspect="1"/>
+          </p:cNvPicPr>
+          <p:nvPr/>
+        </p:nvPicPr>
+        <p:blipFill>
+          <a:blip r:embed="rId2"/>
+          <a:stretch>
+            <a:fillRect/>
+          </a:stretch>
+        </p:blipFill>
+        <p:spPr>
+          <a:xfrm>
+            <a:off x="0" y="57150"/>
+            <a:ext cx="12192000" cy="6800850"/>
+          </a:xfrm>
+          <a:prstGeom prst="rect">
+            <a:avLst/>
+          </a:prstGeom>
+        </p:spPr>
+      </p:pic>
     </p:spTree>
   </p:cSld>
   <p:clrMapOvr>
@@ -6882,7 +6724,7 @@
 </file>
 
 <file path=ppt/slides/slide6.xml><?xml version="1.0" encoding="utf-8"?>
-<p:sld xmlns:a="http://schemas.openxmlformats.org/drawingml/2006/main" xmlns:p="http://schemas.openxmlformats.org/presentationml/2006/main" xmlns:r="http://schemas.openxmlformats.org/officeDocument/2006/relationships">
+<p:sld xmlns:a="http://schemas.openxmlformats.org/drawingml/2006/main" xmlns:r="http://schemas.openxmlformats.org/officeDocument/2006/relationships" xmlns:p="http://schemas.openxmlformats.org/presentationml/2006/main">
   <p:cSld>
     <p:spTree>
       <p:nvGrpSpPr>
@@ -6890,7 +6732,14 @@
         <p:cNvGrpSpPr/>
         <p:nvPr/>
       </p:nvGrpSpPr>
-      <p:grpSpPr/>
+      <p:grpSpPr>
+        <a:xfrm>
+          <a:off x="0" y="0"/>
+          <a:ext cx="0" cy="0"/>
+          <a:chOff x="0" y="0"/>
+          <a:chExt cx="0" cy="0"/>
+        </a:xfrm>
+      </p:grpSpPr>
       <p:sp>
         <p:nvSpPr>
           <p:cNvPr id="2" name="Rectangle 1"/>
@@ -6932,6 +6781,7 @@
           <a:lstStyle/>
           <a:p>
             <a:pPr algn="ctr"/>
+            <a:endParaRPr/>
           </a:p>
         </p:txBody>
       </p:sp>
@@ -6943,8 +6793,8 @@
         </p:nvSpPr>
         <p:spPr>
           <a:xfrm>
-            <a:off x="640080" y="0"/>
-            <a:ext cx="8168335" cy="914400"/>
+            <a:off x="640080" y="118872"/>
+            <a:ext cx="8168335" cy="219456"/>
           </a:xfrm>
           <a:prstGeom prst="rect">
             <a:avLst/>
@@ -6952,7 +6802,7 @@
           <a:noFill/>
         </p:spPr>
         <p:txBody>
-          <a:bodyPr wrap="square" anchor="ctr" lIns="0" rIns="0" tIns="0" bIns="0">
+          <a:bodyPr wrap="square" lIns="0" tIns="0" rIns="0" bIns="0" anchor="t">
             <a:spAutoFit/>
           </a:bodyPr>
           <a:lstStyle/>
@@ -6963,13 +6813,13 @@
               </a:lnSpc>
             </a:pPr>
             <a:r>
-              <a:rPr sz="3000" b="1" i="0">
+              <a:rPr sz="1100" b="1" i="0">
                 <a:solidFill>
                   <a:srgbClr val="FFFFFF"/>
                 </a:solidFill>
                 <a:latin typeface="Calibri"/>
               </a:rPr>
-              <a:t>Two Halves of Every Deck</a:t>
+              <a:t>WORKFLOW</a:t>
             </a:r>
           </a:p>
         </p:txBody>
@@ -6982,6 +6832,45 @@
         </p:nvSpPr>
         <p:spPr>
           <a:xfrm>
+            <a:off x="640080" y="347472"/>
+            <a:ext cx="8168335" cy="493776"/>
+          </a:xfrm>
+          <a:prstGeom prst="rect">
+            <a:avLst/>
+          </a:prstGeom>
+          <a:noFill/>
+        </p:spPr>
+        <p:txBody>
+          <a:bodyPr wrap="square" lIns="0" tIns="0" rIns="0" bIns="0" anchor="t">
+            <a:spAutoFit/>
+          </a:bodyPr>
+          <a:lstStyle/>
+          <a:p>
+            <a:pPr algn="l">
+              <a:lnSpc>
+                <a:spcPct val="105000"/>
+              </a:lnSpc>
+            </a:pPr>
+            <a:r>
+              <a:rPr sz="3000" b="1" i="0">
+                <a:solidFill>
+                  <a:srgbClr val="FFFFFF"/>
+                </a:solidFill>
+                <a:latin typeface="Calibri"/>
+              </a:rPr>
+              <a:t>Five Steps from Idea to File</a:t>
+            </a:r>
+          </a:p>
+        </p:txBody>
+      </p:sp>
+      <p:sp>
+        <p:nvSpPr>
+          <p:cNvPr id="5" name="TextBox 4"/>
+          <p:cNvSpPr txBox="1"/>
+          <p:nvPr/>
+        </p:nvSpPr>
+        <p:spPr>
+          <a:xfrm>
             <a:off x="640080" y="1024128"/>
             <a:ext cx="10911535" cy="457200"/>
           </a:xfrm>
@@ -6991,7 +6880,7 @@
           <a:noFill/>
         </p:spPr>
         <p:txBody>
-          <a:bodyPr wrap="square" anchor="t" lIns="0" rIns="0" tIns="0" bIns="0">
+          <a:bodyPr wrap="square" lIns="0" tIns="0" rIns="0" bIns="0" anchor="t">
             <a:spAutoFit/>
           </a:bodyPr>
           <a:lstStyle/>
@@ -7008,109 +6897,21 @@
                 </a:solidFill>
                 <a:latin typeface="Calibri"/>
               </a:rPr>
-              <a:t>Content stays put; the template carries the design.</a:t>
-            </a:r>
-          </a:p>
-        </p:txBody>
-      </p:sp>
-      <p:sp>
-        <p:nvSpPr>
-          <p:cNvPr id="5" name="Rectangle 4"/>
-          <p:cNvSpPr/>
-          <p:nvPr/>
-        </p:nvSpPr>
-        <p:spPr>
-          <a:xfrm>
-            <a:off x="640080" y="1737360"/>
-            <a:ext cx="5227167" cy="4480560"/>
-          </a:xfrm>
-          <a:prstGeom prst="rect">
-            <a:avLst/>
-          </a:prstGeom>
-          <a:solidFill>
-            <a:srgbClr val="F2F2F2"/>
-          </a:solidFill>
-          <a:ln>
-            <a:noFill/>
-          </a:ln>
-          <a:effectLst/>
-        </p:spPr>
-        <p:style>
-          <a:lnRef idx="1">
-            <a:schemeClr val="accent1"/>
-          </a:lnRef>
-          <a:fillRef idx="3">
-            <a:schemeClr val="accent1"/>
-          </a:fillRef>
-          <a:effectRef idx="2">
-            <a:schemeClr val="accent1"/>
-          </a:effectRef>
-          <a:fontRef idx="minor">
-            <a:schemeClr val="lt1"/>
-          </a:fontRef>
-        </p:style>
-        <p:txBody>
-          <a:bodyPr rtlCol="0" anchor="ctr"/>
-          <a:lstStyle/>
-          <a:p>
-            <a:pPr algn="ctr"/>
-          </a:p>
-        </p:txBody>
-      </p:sp>
-      <p:sp>
-        <p:nvSpPr>
-          <p:cNvPr id="6" name="Rectangle 5"/>
-          <p:cNvSpPr/>
-          <p:nvPr/>
-        </p:nvSpPr>
-        <p:spPr>
-          <a:xfrm>
-            <a:off x="640080" y="1737360"/>
-            <a:ext cx="5227167" cy="640080"/>
-          </a:xfrm>
-          <a:prstGeom prst="rect">
-            <a:avLst/>
-          </a:prstGeom>
-          <a:solidFill>
-            <a:srgbClr val="111111"/>
-          </a:solidFill>
-          <a:ln>
-            <a:noFill/>
-          </a:ln>
-          <a:effectLst/>
-        </p:spPr>
-        <p:style>
-          <a:lnRef idx="1">
-            <a:schemeClr val="accent1"/>
-          </a:lnRef>
-          <a:fillRef idx="3">
-            <a:schemeClr val="accent1"/>
-          </a:fillRef>
-          <a:effectRef idx="2">
-            <a:schemeClr val="accent1"/>
-          </a:effectRef>
-          <a:fontRef idx="minor">
-            <a:schemeClr val="lt1"/>
-          </a:fontRef>
-        </p:style>
-        <p:txBody>
-          <a:bodyPr rtlCol="0" anchor="ctr"/>
-          <a:lstStyle/>
-          <a:p>
-            <a:pPr algn="ctr"/>
-          </a:p>
-        </p:txBody>
-      </p:sp>
-      <p:sp>
-        <p:nvSpPr>
-          <p:cNvPr id="7" name="TextBox 6"/>
+              <a:t>The skill does the content design, not just text dumping.</a:t>
+            </a:r>
+          </a:p>
+        </p:txBody>
+      </p:sp>
+      <p:sp>
+        <p:nvSpPr>
+          <p:cNvPr id="6" name="TextBox 5"/>
           <p:cNvSpPr txBox="1"/>
           <p:nvPr/>
         </p:nvSpPr>
         <p:spPr>
           <a:xfrm>
-            <a:off x="914400" y="1737360"/>
-            <a:ext cx="4678527" cy="640080"/>
+            <a:off x="640080" y="1554480"/>
+            <a:ext cx="10911535" cy="4663440"/>
           </a:xfrm>
           <a:prstGeom prst="rect">
             <a:avLst/>
@@ -7118,46 +6919,7 @@
           <a:noFill/>
         </p:spPr>
         <p:txBody>
-          <a:bodyPr wrap="square" anchor="ctr" lIns="0" rIns="0" tIns="0" bIns="0">
-            <a:spAutoFit/>
-          </a:bodyPr>
-          <a:lstStyle/>
-          <a:p>
-            <a:pPr algn="l">
-              <a:lnSpc>
-                <a:spcPct val="105000"/>
-              </a:lnSpc>
-            </a:pPr>
-            <a:r>
-              <a:rPr sz="2600" b="1" i="0">
-                <a:solidFill>
-                  <a:srgbClr val="FFFFFF"/>
-                </a:solidFill>
-                <a:latin typeface="Calibri"/>
-              </a:rPr>
-              <a:t>Content — the spec</a:t>
-            </a:r>
-          </a:p>
-        </p:txBody>
-      </p:sp>
-      <p:sp>
-        <p:nvSpPr>
-          <p:cNvPr id="8" name="TextBox 7"/>
-          <p:cNvSpPr txBox="1"/>
-          <p:nvPr/>
-        </p:nvSpPr>
-        <p:spPr>
-          <a:xfrm>
-            <a:off x="914400" y="2606040"/>
-            <a:ext cx="4678527" cy="3383280"/>
-          </a:xfrm>
-          <a:prstGeom prst="rect">
-            <a:avLst/>
-          </a:prstGeom>
-          <a:noFill/>
-        </p:spPr>
-        <p:txBody>
-          <a:bodyPr wrap="square" anchor="t" lIns="0" rIns="0" tIns="0" bIns="0">
+          <a:bodyPr wrap="square" lIns="0" tIns="0" rIns="0" bIns="0" anchor="t">
             <a:spAutoFit/>
           </a:bodyPr>
           <a:lstStyle/>
@@ -7171,13 +6933,13 @@
               </a:spcAft>
             </a:pPr>
             <a:r>
-              <a:rPr sz="2200" b="0" i="0">
+              <a:rPr sz="2200" b="1" i="0">
                 <a:solidFill>
                   <a:srgbClr val="1A1A1A"/>
                 </a:solidFill>
                 <a:latin typeface="Calibri"/>
               </a:rPr>
-              <a:t>●  Each slide's words</a:t>
+              <a:t>●  Topic, audience, and length</a:t>
             </a:r>
           </a:p>
           <a:p>
@@ -7190,13 +6952,13 @@
               </a:spcAft>
             </a:pPr>
             <a:r>
-              <a:rPr sz="2200" b="0" i="0">
+              <a:rPr sz="2200" b="1" i="0">
                 <a:solidFill>
                   <a:srgbClr val="1A1A1A"/>
                 </a:solidFill>
                 <a:latin typeface="Calibri"/>
               </a:rPr>
-              <a:t>●  Layout per slide</a:t>
+              <a:t>●  Template matched to tone</a:t>
             </a:r>
           </a:p>
           <a:p>
@@ -7209,17 +6971,17 @@
               </a:spcAft>
             </a:pPr>
             <a:r>
-              <a:rPr sz="2200" b="0" i="0">
+              <a:rPr sz="2200" b="1" i="0">
                 <a:solidFill>
                   <a:srgbClr val="1A1A1A"/>
                 </a:solidFill>
                 <a:latin typeface="Calibri"/>
               </a:rPr>
-              <a:t>●  Structure and story</a:t>
-            </a:r>
-          </a:p>
-          <a:p>
-            <a:pPr algn="l">
+              <a:t>●  Slides as a JSON spec</a:t>
+            </a:r>
+          </a:p>
+          <a:p>
+            <a:pPr lvl="1" algn="l">
               <a:lnSpc>
                 <a:spcPct val="110000"/>
               </a:lnSpc>
@@ -7228,165 +6990,15 @@
               </a:spcAft>
             </a:pPr>
             <a:r>
-              <a:rPr sz="2200" b="0" i="0">
-                <a:solidFill>
-                  <a:srgbClr val="1A1A1A"/>
-                </a:solidFill>
-                <a:latin typeface="Calibri"/>
-              </a:rPr>
-              <a:t>●  Written once, stable</a:t>
-            </a:r>
-          </a:p>
-        </p:txBody>
-      </p:sp>
-      <p:sp>
-        <p:nvSpPr>
-          <p:cNvPr id="9" name="Rectangle 8"/>
-          <p:cNvSpPr/>
-          <p:nvPr/>
-        </p:nvSpPr>
-        <p:spPr>
-          <a:xfrm>
-            <a:off x="6324447" y="1737360"/>
-            <a:ext cx="5227167" cy="4480560"/>
-          </a:xfrm>
-          <a:prstGeom prst="rect">
-            <a:avLst/>
-          </a:prstGeom>
-          <a:solidFill>
-            <a:srgbClr val="F2F2F2"/>
-          </a:solidFill>
-          <a:ln>
-            <a:noFill/>
-          </a:ln>
-          <a:effectLst/>
-        </p:spPr>
-        <p:style>
-          <a:lnRef idx="1">
-            <a:schemeClr val="accent1"/>
-          </a:lnRef>
-          <a:fillRef idx="3">
-            <a:schemeClr val="accent1"/>
-          </a:fillRef>
-          <a:effectRef idx="2">
-            <a:schemeClr val="accent1"/>
-          </a:effectRef>
-          <a:fontRef idx="minor">
-            <a:schemeClr val="lt1"/>
-          </a:fontRef>
-        </p:style>
-        <p:txBody>
-          <a:bodyPr rtlCol="0" anchor="ctr"/>
-          <a:lstStyle/>
-          <a:p>
-            <a:pPr algn="ctr"/>
-          </a:p>
-        </p:txBody>
-      </p:sp>
-      <p:sp>
-        <p:nvSpPr>
-          <p:cNvPr id="10" name="Rectangle 9"/>
-          <p:cNvSpPr/>
-          <p:nvPr/>
-        </p:nvSpPr>
-        <p:spPr>
-          <a:xfrm>
-            <a:off x="6324447" y="1737360"/>
-            <a:ext cx="5227167" cy="640080"/>
-          </a:xfrm>
-          <a:prstGeom prst="rect">
-            <a:avLst/>
-          </a:prstGeom>
-          <a:solidFill>
-            <a:srgbClr val="2F5597"/>
-          </a:solidFill>
-          <a:ln>
-            <a:noFill/>
-          </a:ln>
-          <a:effectLst/>
-        </p:spPr>
-        <p:style>
-          <a:lnRef idx="1">
-            <a:schemeClr val="accent1"/>
-          </a:lnRef>
-          <a:fillRef idx="3">
-            <a:schemeClr val="accent1"/>
-          </a:fillRef>
-          <a:effectRef idx="2">
-            <a:schemeClr val="accent1"/>
-          </a:effectRef>
-          <a:fontRef idx="minor">
-            <a:schemeClr val="lt1"/>
-          </a:fontRef>
-        </p:style>
-        <p:txBody>
-          <a:bodyPr rtlCol="0" anchor="ctr"/>
-          <a:lstStyle/>
-          <a:p>
-            <a:pPr algn="ctr"/>
-          </a:p>
-        </p:txBody>
-      </p:sp>
-      <p:sp>
-        <p:nvSpPr>
-          <p:cNvPr id="11" name="TextBox 10"/>
-          <p:cNvSpPr txBox="1"/>
-          <p:nvPr/>
-        </p:nvSpPr>
-        <p:spPr>
-          <a:xfrm>
-            <a:off x="6598767" y="1737360"/>
-            <a:ext cx="4678527" cy="640080"/>
-          </a:xfrm>
-          <a:prstGeom prst="rect">
-            <a:avLst/>
-          </a:prstGeom>
-          <a:noFill/>
-        </p:spPr>
-        <p:txBody>
-          <a:bodyPr wrap="square" anchor="ctr" lIns="0" rIns="0" tIns="0" bIns="0">
-            <a:spAutoFit/>
-          </a:bodyPr>
-          <a:lstStyle/>
-          <a:p>
-            <a:pPr algn="l">
-              <a:lnSpc>
-                <a:spcPct val="105000"/>
-              </a:lnSpc>
-            </a:pPr>
-            <a:r>
-              <a:rPr sz="2600" b="1" i="0">
-                <a:solidFill>
-                  <a:srgbClr val="FFFFFF"/>
-                </a:solidFill>
-                <a:latin typeface="Calibri"/>
-              </a:rPr>
-              <a:t>Look — the template</a:t>
-            </a:r>
-          </a:p>
-        </p:txBody>
-      </p:sp>
-      <p:sp>
-        <p:nvSpPr>
-          <p:cNvPr id="12" name="TextBox 11"/>
-          <p:cNvSpPr txBox="1"/>
-          <p:nvPr/>
-        </p:nvSpPr>
-        <p:spPr>
-          <a:xfrm>
-            <a:off x="6598767" y="2606040"/>
-            <a:ext cx="4678527" cy="3383280"/>
-          </a:xfrm>
-          <a:prstGeom prst="rect">
-            <a:avLst/>
-          </a:prstGeom>
-          <a:noFill/>
-        </p:spPr>
-        <p:txBody>
-          <a:bodyPr wrap="square" anchor="t" lIns="0" rIns="0" tIns="0" bIns="0">
-            <a:spAutoFit/>
-          </a:bodyPr>
-          <a:lstStyle/>
+              <a:rPr sz="2000" b="0" i="0">
+                <a:solidFill>
+                  <a:srgbClr val="7F7F7F"/>
+                </a:solidFill>
+                <a:latin typeface="Calibri"/>
+              </a:rPr>
+              <a:t>–  Right layout per slide — the craft</a:t>
+            </a:r>
+          </a:p>
           <a:p>
             <a:pPr algn="l">
               <a:lnSpc>
@@ -7397,13 +7009,13 @@
               </a:spcAft>
             </a:pPr>
             <a:r>
-              <a:rPr sz="2200" b="0" i="0">
+              <a:rPr sz="2200" b="1" i="0">
                 <a:solidFill>
                   <a:srgbClr val="1A1A1A"/>
                 </a:solidFill>
                 <a:latin typeface="Calibri"/>
               </a:rPr>
-              <a:t>●  Color palette and fonts</a:t>
+              <a:t>●  Validation, then render</a:t>
             </a:r>
           </a:p>
           <a:p>
@@ -7416,58 +7028,20 @@
               </a:spcAft>
             </a:pPr>
             <a:r>
-              <a:rPr sz="2200" b="0" i="0">
+              <a:rPr sz="2200" b="1" i="0">
                 <a:solidFill>
                   <a:srgbClr val="1A1A1A"/>
                 </a:solidFill>
                 <a:latin typeface="Calibri"/>
               </a:rPr>
-              <a:t>●  Accent treatment</a:t>
-            </a:r>
-          </a:p>
-          <a:p>
-            <a:pPr algn="l">
-              <a:lnSpc>
-                <a:spcPct val="110000"/>
-              </a:lnSpc>
-              <a:spcAft>
-                <a:spcPts val="1000"/>
-              </a:spcAft>
-            </a:pPr>
-            <a:r>
-              <a:rPr sz="2200" b="0" i="0">
-                <a:solidFill>
-                  <a:srgbClr val="1A1A1A"/>
-                </a:solidFill>
-                <a:latin typeface="Calibri"/>
-              </a:rPr>
-              <a:t>●  Uniform across all slides</a:t>
-            </a:r>
-          </a:p>
-          <a:p>
-            <a:pPr algn="l">
-              <a:lnSpc>
-                <a:spcPct val="110000"/>
-              </a:lnSpc>
-              <a:spcAft>
-                <a:spcPts val="1000"/>
-              </a:spcAft>
-            </a:pPr>
-            <a:r>
-              <a:rPr sz="2200" b="0" i="0">
-                <a:solidFill>
-                  <a:srgbClr val="1A1A1A"/>
-                </a:solidFill>
-                <a:latin typeface="Calibri"/>
-              </a:rPr>
-              <a:t>●  One-field swap</a:t>
-            </a:r>
-          </a:p>
-        </p:txBody>
-      </p:sp>
-      <p:sp>
-        <p:nvSpPr>
-          <p:cNvPr id="13" name="TextBox 12"/>
+              <a:t>●  Fast restyle and refinement</a:t>
+            </a:r>
+          </a:p>
+        </p:txBody>
+      </p:sp>
+      <p:sp>
+        <p:nvSpPr>
+          <p:cNvPr id="7" name="TextBox 6"/>
           <p:cNvSpPr txBox="1"/>
           <p:nvPr/>
         </p:nvSpPr>
@@ -7482,7 +7056,7 @@
           <a:noFill/>
         </p:spPr>
         <p:txBody>
-          <a:bodyPr wrap="square" anchor="t" lIns="0" rIns="0" tIns="0" bIns="0">
+          <a:bodyPr wrap="square" lIns="0" tIns="0" rIns="0" bIns="0" anchor="t">
             <a:spAutoFit/>
           </a:bodyPr>
           <a:lstStyle/>
@@ -7499,14 +7073,14 @@
                 </a:solidFill>
                 <a:latin typeface="Calibri"/>
               </a:rPr>
-              <a:t>6</a:t>
-            </a:r>
-          </a:p>
-        </p:txBody>
-      </p:sp>
-      <p:sp>
-        <p:nvSpPr>
-          <p:cNvPr id="14" name="TextBox 13"/>
+              <a:t>4</a:t>
+            </a:r>
+          </a:p>
+        </p:txBody>
+      </p:sp>
+      <p:sp>
+        <p:nvSpPr>
+          <p:cNvPr id="8" name="TextBox 7"/>
           <p:cNvSpPr txBox="1"/>
           <p:nvPr/>
         </p:nvSpPr>
@@ -7521,7 +7095,7 @@
           <a:noFill/>
         </p:spPr>
         <p:txBody>
-          <a:bodyPr wrap="square" anchor="t" lIns="0" rIns="0" tIns="0" bIns="0">
+          <a:bodyPr wrap="square" lIns="0" tIns="0" rIns="0" bIns="0" anchor="t">
             <a:spAutoFit/>
           </a:bodyPr>
           <a:lstStyle/>
@@ -7552,7 +7126,7 @@
 </file>
 
 <file path=ppt/slides/slide7.xml><?xml version="1.0" encoding="utf-8"?>
-<p:sld xmlns:a="http://schemas.openxmlformats.org/drawingml/2006/main" xmlns:p="http://schemas.openxmlformats.org/presentationml/2006/main" xmlns:r="http://schemas.openxmlformats.org/officeDocument/2006/relationships">
+<p:sld xmlns:a="http://schemas.openxmlformats.org/drawingml/2006/main" xmlns:r="http://schemas.openxmlformats.org/officeDocument/2006/relationships" xmlns:p="http://schemas.openxmlformats.org/presentationml/2006/main">
   <p:cSld>
     <p:spTree>
       <p:nvGrpSpPr>
@@ -7560,7 +7134,14 @@
         <p:cNvGrpSpPr/>
         <p:nvPr/>
       </p:nvGrpSpPr>
-      <p:grpSpPr/>
+      <p:grpSpPr>
+        <a:xfrm>
+          <a:off x="0" y="0"/>
+          <a:ext cx="0" cy="0"/>
+          <a:chOff x="0" y="0"/>
+          <a:chExt cx="0" cy="0"/>
+        </a:xfrm>
+      </p:grpSpPr>
       <p:sp>
         <p:nvSpPr>
           <p:cNvPr id="2" name="Rectangle 1"/>
@@ -7602,6 +7183,7 @@
           <a:lstStyle/>
           <a:p>
             <a:pPr algn="ctr"/>
+            <a:endParaRPr/>
           </a:p>
         </p:txBody>
       </p:sp>
@@ -7622,7 +7204,7 @@
           <a:noFill/>
         </p:spPr>
         <p:txBody>
-          <a:bodyPr wrap="square" anchor="t" lIns="0" rIns="0" tIns="0" bIns="0">
+          <a:bodyPr wrap="square" lIns="0" tIns="0" rIns="0" bIns="0" anchor="t">
             <a:spAutoFit/>
           </a:bodyPr>
           <a:lstStyle/>
@@ -7639,7 +7221,7 @@
                 </a:solidFill>
                 <a:latin typeface="Calibri"/>
               </a:rPr>
-              <a:t>TEMPLATES</a:t>
+              <a:t>WORKFLOW</a:t>
             </a:r>
           </a:p>
         </p:txBody>
@@ -7661,7 +7243,7 @@
           <a:noFill/>
         </p:spPr>
         <p:txBody>
-          <a:bodyPr wrap="square" anchor="t" lIns="0" rIns="0" tIns="0" bIns="0">
+          <a:bodyPr wrap="square" lIns="0" tIns="0" rIns="0" bIns="0" anchor="t">
             <a:spAutoFit/>
           </a:bodyPr>
           <a:lstStyle/>
@@ -7678,7 +7260,7 @@
                 </a:solidFill>
                 <a:latin typeface="Calibri"/>
               </a:rPr>
-              <a:t>A Look for Every Room</a:t>
+              <a:t>The Five-Step Workflow</a:t>
             </a:r>
           </a:p>
         </p:txBody>
@@ -7700,7 +7282,1479 @@
           <a:noFill/>
         </p:spPr>
         <p:txBody>
-          <a:bodyPr wrap="square" anchor="t" lIns="0" rIns="0" tIns="0" bIns="0">
+          <a:bodyPr wrap="square" lIns="0" tIns="0" rIns="0" bIns="0" anchor="t">
+            <a:spAutoFit/>
+          </a:bodyPr>
+          <a:lstStyle/>
+          <a:p>
+            <a:pPr algn="l">
+              <a:lnSpc>
+                <a:spcPct val="105000"/>
+              </a:lnSpc>
+            </a:pPr>
+            <a:r>
+              <a:rPr sz="2600" b="0" i="1">
+                <a:solidFill>
+                  <a:srgbClr val="595959"/>
+                </a:solidFill>
+                <a:latin typeface="Calibri"/>
+              </a:rPr>
+              <a:t>Drawn as real PowerPoint shapes, so every box stays editable.</a:t>
+            </a:r>
+          </a:p>
+        </p:txBody>
+      </p:sp>
+      <p:sp>
+        <p:nvSpPr>
+          <p:cNvPr id="6" name="Rounded Rectangle 5"/>
+          <p:cNvSpPr/>
+          <p:nvPr/>
+        </p:nvSpPr>
+        <p:spPr>
+          <a:xfrm>
+            <a:off x="640080" y="3246120"/>
+            <a:ext cx="1816547" cy="1554480"/>
+          </a:xfrm>
+          <a:prstGeom prst="roundRect">
+            <a:avLst/>
+          </a:prstGeom>
+          <a:solidFill>
+            <a:srgbClr val="111111"/>
+          </a:solidFill>
+          <a:ln>
+            <a:noFill/>
+          </a:ln>
+          <a:effectLst/>
+        </p:spPr>
+        <p:style>
+          <a:lnRef idx="1">
+            <a:schemeClr val="accent1"/>
+          </a:lnRef>
+          <a:fillRef idx="3">
+            <a:schemeClr val="accent1"/>
+          </a:fillRef>
+          <a:effectRef idx="2">
+            <a:schemeClr val="accent1"/>
+          </a:effectRef>
+          <a:fontRef idx="minor">
+            <a:schemeClr val="lt1"/>
+          </a:fontRef>
+        </p:style>
+        <p:txBody>
+          <a:bodyPr wrap="square" lIns="73152" tIns="27432" rIns="73152" bIns="27432" rtlCol="0" anchor="ctr"/>
+          <a:lstStyle/>
+          <a:p>
+            <a:pPr algn="ctr"/>
+            <a:r>
+              <a:rPr sz="1500" b="1">
+                <a:solidFill>
+                  <a:srgbClr val="FFFFFF"/>
+                </a:solidFill>
+                <a:latin typeface="Calibri"/>
+              </a:rPr>
+              <a:t>Understand</a:t>
+            </a:r>
+          </a:p>
+          <a:p>
+            <a:pPr algn="ctr">
+              <a:spcBef>
+                <a:spcPts val="200"/>
+              </a:spcBef>
+            </a:pPr>
+            <a:r>
+              <a:rPr sz="1100">
+                <a:solidFill>
+                  <a:srgbClr val="FFFFFF"/>
+                </a:solidFill>
+                <a:latin typeface="Calibri"/>
+              </a:rPr>
+              <a:t>Topic &amp; audience</a:t>
+            </a:r>
+          </a:p>
+        </p:txBody>
+      </p:sp>
+      <p:sp>
+        <p:nvSpPr>
+          <p:cNvPr id="7" name="Right Arrow 6"/>
+          <p:cNvSpPr/>
+          <p:nvPr/>
+        </p:nvSpPr>
+        <p:spPr>
+          <a:xfrm>
+            <a:off x="2502347" y="3858768"/>
+            <a:ext cx="365760" cy="329184"/>
+          </a:xfrm>
+          <a:prstGeom prst="rightArrow">
+            <a:avLst/>
+          </a:prstGeom>
+          <a:solidFill>
+            <a:srgbClr val="2F5597"/>
+          </a:solidFill>
+          <a:ln>
+            <a:noFill/>
+          </a:ln>
+          <a:effectLst/>
+        </p:spPr>
+        <p:style>
+          <a:lnRef idx="1">
+            <a:schemeClr val="accent1"/>
+          </a:lnRef>
+          <a:fillRef idx="3">
+            <a:schemeClr val="accent1"/>
+          </a:fillRef>
+          <a:effectRef idx="2">
+            <a:schemeClr val="accent1"/>
+          </a:effectRef>
+          <a:fontRef idx="minor">
+            <a:schemeClr val="lt1"/>
+          </a:fontRef>
+        </p:style>
+        <p:txBody>
+          <a:bodyPr rtlCol="0" anchor="ctr"/>
+          <a:lstStyle/>
+          <a:p>
+            <a:pPr algn="ctr"/>
+            <a:endParaRPr/>
+          </a:p>
+        </p:txBody>
+      </p:sp>
+      <p:sp>
+        <p:nvSpPr>
+          <p:cNvPr id="8" name="Rounded Rectangle 7"/>
+          <p:cNvSpPr/>
+          <p:nvPr/>
+        </p:nvSpPr>
+        <p:spPr>
+          <a:xfrm>
+            <a:off x="2913827" y="3246120"/>
+            <a:ext cx="1816547" cy="1554480"/>
+          </a:xfrm>
+          <a:prstGeom prst="roundRect">
+            <a:avLst/>
+          </a:prstGeom>
+          <a:solidFill>
+            <a:srgbClr val="595959"/>
+          </a:solidFill>
+          <a:ln>
+            <a:noFill/>
+          </a:ln>
+          <a:effectLst/>
+        </p:spPr>
+        <p:style>
+          <a:lnRef idx="1">
+            <a:schemeClr val="accent1"/>
+          </a:lnRef>
+          <a:fillRef idx="3">
+            <a:schemeClr val="accent1"/>
+          </a:fillRef>
+          <a:effectRef idx="2">
+            <a:schemeClr val="accent1"/>
+          </a:effectRef>
+          <a:fontRef idx="minor">
+            <a:schemeClr val="lt1"/>
+          </a:fontRef>
+        </p:style>
+        <p:txBody>
+          <a:bodyPr wrap="square" lIns="73152" tIns="27432" rIns="73152" bIns="27432" rtlCol="0" anchor="ctr"/>
+          <a:lstStyle/>
+          <a:p>
+            <a:pPr algn="ctr"/>
+            <a:r>
+              <a:rPr sz="1500" b="1">
+                <a:solidFill>
+                  <a:srgbClr val="FFFFFF"/>
+                </a:solidFill>
+                <a:latin typeface="Calibri"/>
+              </a:rPr>
+              <a:t>Template</a:t>
+            </a:r>
+          </a:p>
+          <a:p>
+            <a:pPr algn="ctr">
+              <a:spcBef>
+                <a:spcPts val="200"/>
+              </a:spcBef>
+            </a:pPr>
+            <a:r>
+              <a:rPr sz="1100">
+                <a:solidFill>
+                  <a:srgbClr val="FFFFFF"/>
+                </a:solidFill>
+                <a:latin typeface="Calibri"/>
+              </a:rPr>
+              <a:t>Pick the look</a:t>
+            </a:r>
+          </a:p>
+        </p:txBody>
+      </p:sp>
+      <p:sp>
+        <p:nvSpPr>
+          <p:cNvPr id="9" name="Right Arrow 8"/>
+          <p:cNvSpPr/>
+          <p:nvPr/>
+        </p:nvSpPr>
+        <p:spPr>
+          <a:xfrm>
+            <a:off x="4776094" y="3858768"/>
+            <a:ext cx="365760" cy="329184"/>
+          </a:xfrm>
+          <a:prstGeom prst="rightArrow">
+            <a:avLst/>
+          </a:prstGeom>
+          <a:solidFill>
+            <a:srgbClr val="2F5597"/>
+          </a:solidFill>
+          <a:ln>
+            <a:noFill/>
+          </a:ln>
+          <a:effectLst/>
+        </p:spPr>
+        <p:style>
+          <a:lnRef idx="1">
+            <a:schemeClr val="accent1"/>
+          </a:lnRef>
+          <a:fillRef idx="3">
+            <a:schemeClr val="accent1"/>
+          </a:fillRef>
+          <a:effectRef idx="2">
+            <a:schemeClr val="accent1"/>
+          </a:effectRef>
+          <a:fontRef idx="minor">
+            <a:schemeClr val="lt1"/>
+          </a:fontRef>
+        </p:style>
+        <p:txBody>
+          <a:bodyPr rtlCol="0" anchor="ctr"/>
+          <a:lstStyle/>
+          <a:p>
+            <a:pPr algn="ctr"/>
+            <a:endParaRPr/>
+          </a:p>
+        </p:txBody>
+      </p:sp>
+      <p:sp>
+        <p:nvSpPr>
+          <p:cNvPr id="10" name="Rounded Rectangle 9"/>
+          <p:cNvSpPr/>
+          <p:nvPr/>
+        </p:nvSpPr>
+        <p:spPr>
+          <a:xfrm>
+            <a:off x="5187574" y="3246120"/>
+            <a:ext cx="1816547" cy="1554480"/>
+          </a:xfrm>
+          <a:prstGeom prst="roundRect">
+            <a:avLst/>
+          </a:prstGeom>
+          <a:solidFill>
+            <a:srgbClr val="111111"/>
+          </a:solidFill>
+          <a:ln>
+            <a:noFill/>
+          </a:ln>
+          <a:effectLst/>
+        </p:spPr>
+        <p:style>
+          <a:lnRef idx="1">
+            <a:schemeClr val="accent1"/>
+          </a:lnRef>
+          <a:fillRef idx="3">
+            <a:schemeClr val="accent1"/>
+          </a:fillRef>
+          <a:effectRef idx="2">
+            <a:schemeClr val="accent1"/>
+          </a:effectRef>
+          <a:fontRef idx="minor">
+            <a:schemeClr val="lt1"/>
+          </a:fontRef>
+        </p:style>
+        <p:txBody>
+          <a:bodyPr wrap="square" lIns="73152" tIns="27432" rIns="73152" bIns="27432" rtlCol="0" anchor="ctr"/>
+          <a:lstStyle/>
+          <a:p>
+            <a:pPr algn="ctr"/>
+            <a:r>
+              <a:rPr sz="1500" b="1">
+                <a:solidFill>
+                  <a:srgbClr val="FFFFFF"/>
+                </a:solidFill>
+                <a:latin typeface="Calibri"/>
+              </a:rPr>
+              <a:t>Design</a:t>
+            </a:r>
+          </a:p>
+          <a:p>
+            <a:pPr algn="ctr">
+              <a:spcBef>
+                <a:spcPts val="200"/>
+              </a:spcBef>
+            </a:pPr>
+            <a:r>
+              <a:rPr sz="1100">
+                <a:solidFill>
+                  <a:srgbClr val="FFFFFF"/>
+                </a:solidFill>
+                <a:latin typeface="Calibri"/>
+              </a:rPr>
+              <a:t>Author the spec</a:t>
+            </a:r>
+          </a:p>
+        </p:txBody>
+      </p:sp>
+      <p:sp>
+        <p:nvSpPr>
+          <p:cNvPr id="11" name="Right Arrow 10"/>
+          <p:cNvSpPr/>
+          <p:nvPr/>
+        </p:nvSpPr>
+        <p:spPr>
+          <a:xfrm>
+            <a:off x="7049841" y="3858768"/>
+            <a:ext cx="365760" cy="329184"/>
+          </a:xfrm>
+          <a:prstGeom prst="rightArrow">
+            <a:avLst/>
+          </a:prstGeom>
+          <a:solidFill>
+            <a:srgbClr val="2F5597"/>
+          </a:solidFill>
+          <a:ln>
+            <a:noFill/>
+          </a:ln>
+          <a:effectLst/>
+        </p:spPr>
+        <p:style>
+          <a:lnRef idx="1">
+            <a:schemeClr val="accent1"/>
+          </a:lnRef>
+          <a:fillRef idx="3">
+            <a:schemeClr val="accent1"/>
+          </a:fillRef>
+          <a:effectRef idx="2">
+            <a:schemeClr val="accent1"/>
+          </a:effectRef>
+          <a:fontRef idx="minor">
+            <a:schemeClr val="lt1"/>
+          </a:fontRef>
+        </p:style>
+        <p:txBody>
+          <a:bodyPr rtlCol="0" anchor="ctr"/>
+          <a:lstStyle/>
+          <a:p>
+            <a:pPr algn="ctr"/>
+            <a:endParaRPr/>
+          </a:p>
+        </p:txBody>
+      </p:sp>
+      <p:sp>
+        <p:nvSpPr>
+          <p:cNvPr id="12" name="Rounded Rectangle 11"/>
+          <p:cNvSpPr/>
+          <p:nvPr/>
+        </p:nvSpPr>
+        <p:spPr>
+          <a:xfrm>
+            <a:off x="7461321" y="3246120"/>
+            <a:ext cx="1816547" cy="1554480"/>
+          </a:xfrm>
+          <a:prstGeom prst="roundRect">
+            <a:avLst/>
+          </a:prstGeom>
+          <a:solidFill>
+            <a:srgbClr val="595959"/>
+          </a:solidFill>
+          <a:ln>
+            <a:noFill/>
+          </a:ln>
+          <a:effectLst/>
+        </p:spPr>
+        <p:style>
+          <a:lnRef idx="1">
+            <a:schemeClr val="accent1"/>
+          </a:lnRef>
+          <a:fillRef idx="3">
+            <a:schemeClr val="accent1"/>
+          </a:fillRef>
+          <a:effectRef idx="2">
+            <a:schemeClr val="accent1"/>
+          </a:effectRef>
+          <a:fontRef idx="minor">
+            <a:schemeClr val="lt1"/>
+          </a:fontRef>
+        </p:style>
+        <p:txBody>
+          <a:bodyPr wrap="square" lIns="73152" tIns="27432" rIns="73152" bIns="27432" rtlCol="0" anchor="ctr"/>
+          <a:lstStyle/>
+          <a:p>
+            <a:pPr algn="ctr"/>
+            <a:r>
+              <a:rPr sz="1500" b="1">
+                <a:solidFill>
+                  <a:srgbClr val="FFFFFF"/>
+                </a:solidFill>
+                <a:latin typeface="Calibri"/>
+              </a:rPr>
+              <a:t>Render</a:t>
+            </a:r>
+          </a:p>
+          <a:p>
+            <a:pPr algn="ctr">
+              <a:spcBef>
+                <a:spcPts val="200"/>
+              </a:spcBef>
+            </a:pPr>
+            <a:r>
+              <a:rPr sz="1100">
+                <a:solidFill>
+                  <a:srgbClr val="FFFFFF"/>
+                </a:solidFill>
+                <a:latin typeface="Calibri"/>
+              </a:rPr>
+              <a:t>Validate &amp; build</a:t>
+            </a:r>
+          </a:p>
+        </p:txBody>
+      </p:sp>
+      <p:sp>
+        <p:nvSpPr>
+          <p:cNvPr id="13" name="Right Arrow 12"/>
+          <p:cNvSpPr/>
+          <p:nvPr/>
+        </p:nvSpPr>
+        <p:spPr>
+          <a:xfrm>
+            <a:off x="9323588" y="3858768"/>
+            <a:ext cx="365760" cy="329184"/>
+          </a:xfrm>
+          <a:prstGeom prst="rightArrow">
+            <a:avLst/>
+          </a:prstGeom>
+          <a:solidFill>
+            <a:srgbClr val="2F5597"/>
+          </a:solidFill>
+          <a:ln>
+            <a:noFill/>
+          </a:ln>
+          <a:effectLst/>
+        </p:spPr>
+        <p:style>
+          <a:lnRef idx="1">
+            <a:schemeClr val="accent1"/>
+          </a:lnRef>
+          <a:fillRef idx="3">
+            <a:schemeClr val="accent1"/>
+          </a:fillRef>
+          <a:effectRef idx="2">
+            <a:schemeClr val="accent1"/>
+          </a:effectRef>
+          <a:fontRef idx="minor">
+            <a:schemeClr val="lt1"/>
+          </a:fontRef>
+        </p:style>
+        <p:txBody>
+          <a:bodyPr rtlCol="0" anchor="ctr"/>
+          <a:lstStyle/>
+          <a:p>
+            <a:pPr algn="ctr"/>
+            <a:endParaRPr/>
+          </a:p>
+        </p:txBody>
+      </p:sp>
+      <p:sp>
+        <p:nvSpPr>
+          <p:cNvPr id="14" name="Rounded Rectangle 13"/>
+          <p:cNvSpPr/>
+          <p:nvPr/>
+        </p:nvSpPr>
+        <p:spPr>
+          <a:xfrm>
+            <a:off x="9735068" y="3246120"/>
+            <a:ext cx="1816547" cy="1554480"/>
+          </a:xfrm>
+          <a:prstGeom prst="roundRect">
+            <a:avLst/>
+          </a:prstGeom>
+          <a:solidFill>
+            <a:srgbClr val="111111"/>
+          </a:solidFill>
+          <a:ln>
+            <a:noFill/>
+          </a:ln>
+          <a:effectLst/>
+        </p:spPr>
+        <p:style>
+          <a:lnRef idx="1">
+            <a:schemeClr val="accent1"/>
+          </a:lnRef>
+          <a:fillRef idx="3">
+            <a:schemeClr val="accent1"/>
+          </a:fillRef>
+          <a:effectRef idx="2">
+            <a:schemeClr val="accent1"/>
+          </a:effectRef>
+          <a:fontRef idx="minor">
+            <a:schemeClr val="lt1"/>
+          </a:fontRef>
+        </p:style>
+        <p:txBody>
+          <a:bodyPr wrap="square" lIns="73152" tIns="27432" rIns="73152" bIns="27432" rtlCol="0" anchor="ctr"/>
+          <a:lstStyle/>
+          <a:p>
+            <a:pPr algn="ctr"/>
+            <a:r>
+              <a:rPr sz="1500" b="1">
+                <a:solidFill>
+                  <a:srgbClr val="FFFFFF"/>
+                </a:solidFill>
+                <a:latin typeface="Calibri"/>
+              </a:rPr>
+              <a:t>Iterate</a:t>
+            </a:r>
+          </a:p>
+          <a:p>
+            <a:pPr algn="ctr">
+              <a:spcBef>
+                <a:spcPts val="200"/>
+              </a:spcBef>
+            </a:pPr>
+            <a:r>
+              <a:rPr sz="1100">
+                <a:solidFill>
+                  <a:srgbClr val="FFFFFF"/>
+                </a:solidFill>
+                <a:latin typeface="Calibri"/>
+              </a:rPr>
+              <a:t>Restyle &amp; refine</a:t>
+            </a:r>
+          </a:p>
+        </p:txBody>
+      </p:sp>
+      <p:sp>
+        <p:nvSpPr>
+          <p:cNvPr id="15" name="TextBox 14"/>
+          <p:cNvSpPr txBox="1"/>
+          <p:nvPr/>
+        </p:nvSpPr>
+        <p:spPr>
+          <a:xfrm>
+            <a:off x="10454335" y="6291072"/>
+            <a:ext cx="1097280" cy="384048"/>
+          </a:xfrm>
+          <a:prstGeom prst="rect">
+            <a:avLst/>
+          </a:prstGeom>
+          <a:noFill/>
+        </p:spPr>
+        <p:txBody>
+          <a:bodyPr wrap="square" lIns="0" tIns="0" rIns="0" bIns="0" anchor="t">
+            <a:spAutoFit/>
+          </a:bodyPr>
+          <a:lstStyle/>
+          <a:p>
+            <a:pPr algn="r">
+              <a:lnSpc>
+                <a:spcPct val="105000"/>
+              </a:lnSpc>
+            </a:pPr>
+            <a:r>
+              <a:rPr sz="1600" b="0" i="0">
+                <a:solidFill>
+                  <a:srgbClr val="7F7F7F"/>
+                </a:solidFill>
+                <a:latin typeface="Calibri"/>
+              </a:rPr>
+              <a:t>5</a:t>
+            </a:r>
+          </a:p>
+        </p:txBody>
+      </p:sp>
+      <p:sp>
+        <p:nvSpPr>
+          <p:cNvPr id="16" name="TextBox 15"/>
+          <p:cNvSpPr txBox="1"/>
+          <p:nvPr/>
+        </p:nvSpPr>
+        <p:spPr>
+          <a:xfrm>
+            <a:off x="8808415" y="182880"/>
+            <a:ext cx="2743200" cy="548640"/>
+          </a:xfrm>
+          <a:prstGeom prst="rect">
+            <a:avLst/>
+          </a:prstGeom>
+          <a:noFill/>
+        </p:spPr>
+        <p:txBody>
+          <a:bodyPr wrap="square" lIns="0" tIns="0" rIns="0" bIns="0" anchor="t">
+            <a:spAutoFit/>
+          </a:bodyPr>
+          <a:lstStyle/>
+          <a:p>
+            <a:pPr algn="r">
+              <a:lnSpc>
+                <a:spcPct val="105000"/>
+              </a:lnSpc>
+            </a:pPr>
+            <a:r>
+              <a:rPr sz="1800" b="1" i="0">
+                <a:solidFill>
+                  <a:srgbClr val="FFFFFF"/>
+                </a:solidFill>
+                <a:latin typeface="Calibri"/>
+              </a:rPr>
+              <a:t>Confidential</a:t>
+            </a:r>
+          </a:p>
+        </p:txBody>
+      </p:sp>
+    </p:spTree>
+  </p:cSld>
+  <p:clrMapOvr>
+    <a:masterClrMapping/>
+  </p:clrMapOvr>
+</p:sld>
+</file>
+
+<file path=ppt/slides/slide8.xml><?xml version="1.0" encoding="utf-8"?>
+<p:sld xmlns:a="http://schemas.openxmlformats.org/drawingml/2006/main" xmlns:r="http://schemas.openxmlformats.org/officeDocument/2006/relationships" xmlns:p="http://schemas.openxmlformats.org/presentationml/2006/main">
+  <p:cSld>
+    <p:spTree>
+      <p:nvGrpSpPr>
+        <p:cNvPr id="1" name=""/>
+        <p:cNvGrpSpPr/>
+        <p:nvPr/>
+      </p:nvGrpSpPr>
+      <p:grpSpPr>
+        <a:xfrm>
+          <a:off x="0" y="0"/>
+          <a:ext cx="0" cy="0"/>
+          <a:chOff x="0" y="0"/>
+          <a:chExt cx="0" cy="0"/>
+        </a:xfrm>
+      </p:grpSpPr>
+      <p:sp>
+        <p:nvSpPr>
+          <p:cNvPr id="2" name="Rectangle 1"/>
+          <p:cNvSpPr/>
+          <p:nvPr/>
+        </p:nvSpPr>
+        <p:spPr>
+          <a:xfrm>
+            <a:off x="0" y="0"/>
+            <a:ext cx="12191695" cy="914400"/>
+          </a:xfrm>
+          <a:prstGeom prst="rect">
+            <a:avLst/>
+          </a:prstGeom>
+          <a:solidFill>
+            <a:srgbClr val="111111"/>
+          </a:solidFill>
+          <a:ln>
+            <a:noFill/>
+          </a:ln>
+          <a:effectLst/>
+        </p:spPr>
+        <p:style>
+          <a:lnRef idx="1">
+            <a:schemeClr val="accent1"/>
+          </a:lnRef>
+          <a:fillRef idx="3">
+            <a:schemeClr val="accent1"/>
+          </a:fillRef>
+          <a:effectRef idx="2">
+            <a:schemeClr val="accent1"/>
+          </a:effectRef>
+          <a:fontRef idx="minor">
+            <a:schemeClr val="lt1"/>
+          </a:fontRef>
+        </p:style>
+        <p:txBody>
+          <a:bodyPr rtlCol="0" anchor="ctr"/>
+          <a:lstStyle/>
+          <a:p>
+            <a:pPr algn="ctr"/>
+            <a:endParaRPr/>
+          </a:p>
+        </p:txBody>
+      </p:sp>
+      <p:sp>
+        <p:nvSpPr>
+          <p:cNvPr id="3" name="TextBox 2"/>
+          <p:cNvSpPr txBox="1"/>
+          <p:nvPr/>
+        </p:nvSpPr>
+        <p:spPr>
+          <a:xfrm>
+            <a:off x="640080" y="0"/>
+            <a:ext cx="8168335" cy="914400"/>
+          </a:xfrm>
+          <a:prstGeom prst="rect">
+            <a:avLst/>
+          </a:prstGeom>
+          <a:noFill/>
+        </p:spPr>
+        <p:txBody>
+          <a:bodyPr wrap="square" lIns="0" tIns="0" rIns="0" bIns="0" anchor="ctr">
+            <a:spAutoFit/>
+          </a:bodyPr>
+          <a:lstStyle/>
+          <a:p>
+            <a:pPr algn="l">
+              <a:lnSpc>
+                <a:spcPct val="105000"/>
+              </a:lnSpc>
+            </a:pPr>
+            <a:r>
+              <a:rPr sz="3000" b="1" i="0">
+                <a:solidFill>
+                  <a:srgbClr val="FFFFFF"/>
+                </a:solidFill>
+                <a:latin typeface="Calibri"/>
+              </a:rPr>
+              <a:t>Two Halves of Every Deck</a:t>
+            </a:r>
+          </a:p>
+        </p:txBody>
+      </p:sp>
+      <p:sp>
+        <p:nvSpPr>
+          <p:cNvPr id="4" name="TextBox 3"/>
+          <p:cNvSpPr txBox="1"/>
+          <p:nvPr/>
+        </p:nvSpPr>
+        <p:spPr>
+          <a:xfrm>
+            <a:off x="640080" y="1024128"/>
+            <a:ext cx="10911535" cy="457200"/>
+          </a:xfrm>
+          <a:prstGeom prst="rect">
+            <a:avLst/>
+          </a:prstGeom>
+          <a:noFill/>
+        </p:spPr>
+        <p:txBody>
+          <a:bodyPr wrap="square" lIns="0" tIns="0" rIns="0" bIns="0" anchor="t">
+            <a:spAutoFit/>
+          </a:bodyPr>
+          <a:lstStyle/>
+          <a:p>
+            <a:pPr algn="l">
+              <a:lnSpc>
+                <a:spcPct val="105000"/>
+              </a:lnSpc>
+            </a:pPr>
+            <a:r>
+              <a:rPr sz="2600" b="0" i="1">
+                <a:solidFill>
+                  <a:srgbClr val="595959"/>
+                </a:solidFill>
+                <a:latin typeface="Calibri"/>
+              </a:rPr>
+              <a:t>Content stays put; the template carries the design.</a:t>
+            </a:r>
+          </a:p>
+        </p:txBody>
+      </p:sp>
+      <p:sp>
+        <p:nvSpPr>
+          <p:cNvPr id="5" name="Rectangle 4"/>
+          <p:cNvSpPr/>
+          <p:nvPr/>
+        </p:nvSpPr>
+        <p:spPr>
+          <a:xfrm>
+            <a:off x="640080" y="1737360"/>
+            <a:ext cx="5227167" cy="4480560"/>
+          </a:xfrm>
+          <a:prstGeom prst="rect">
+            <a:avLst/>
+          </a:prstGeom>
+          <a:solidFill>
+            <a:srgbClr val="F2F2F2"/>
+          </a:solidFill>
+          <a:ln>
+            <a:noFill/>
+          </a:ln>
+          <a:effectLst/>
+        </p:spPr>
+        <p:style>
+          <a:lnRef idx="1">
+            <a:schemeClr val="accent1"/>
+          </a:lnRef>
+          <a:fillRef idx="3">
+            <a:schemeClr val="accent1"/>
+          </a:fillRef>
+          <a:effectRef idx="2">
+            <a:schemeClr val="accent1"/>
+          </a:effectRef>
+          <a:fontRef idx="minor">
+            <a:schemeClr val="lt1"/>
+          </a:fontRef>
+        </p:style>
+        <p:txBody>
+          <a:bodyPr rtlCol="0" anchor="ctr"/>
+          <a:lstStyle/>
+          <a:p>
+            <a:pPr algn="ctr"/>
+            <a:endParaRPr/>
+          </a:p>
+        </p:txBody>
+      </p:sp>
+      <p:sp>
+        <p:nvSpPr>
+          <p:cNvPr id="6" name="Rectangle 5"/>
+          <p:cNvSpPr/>
+          <p:nvPr/>
+        </p:nvSpPr>
+        <p:spPr>
+          <a:xfrm>
+            <a:off x="640080" y="1737360"/>
+            <a:ext cx="5227167" cy="640080"/>
+          </a:xfrm>
+          <a:prstGeom prst="rect">
+            <a:avLst/>
+          </a:prstGeom>
+          <a:solidFill>
+            <a:srgbClr val="111111"/>
+          </a:solidFill>
+          <a:ln>
+            <a:noFill/>
+          </a:ln>
+          <a:effectLst/>
+        </p:spPr>
+        <p:style>
+          <a:lnRef idx="1">
+            <a:schemeClr val="accent1"/>
+          </a:lnRef>
+          <a:fillRef idx="3">
+            <a:schemeClr val="accent1"/>
+          </a:fillRef>
+          <a:effectRef idx="2">
+            <a:schemeClr val="accent1"/>
+          </a:effectRef>
+          <a:fontRef idx="minor">
+            <a:schemeClr val="lt1"/>
+          </a:fontRef>
+        </p:style>
+        <p:txBody>
+          <a:bodyPr rtlCol="0" anchor="ctr"/>
+          <a:lstStyle/>
+          <a:p>
+            <a:pPr algn="ctr"/>
+            <a:endParaRPr/>
+          </a:p>
+        </p:txBody>
+      </p:sp>
+      <p:sp>
+        <p:nvSpPr>
+          <p:cNvPr id="7" name="TextBox 6"/>
+          <p:cNvSpPr txBox="1"/>
+          <p:nvPr/>
+        </p:nvSpPr>
+        <p:spPr>
+          <a:xfrm>
+            <a:off x="914400" y="1737360"/>
+            <a:ext cx="4678527" cy="640080"/>
+          </a:xfrm>
+          <a:prstGeom prst="rect">
+            <a:avLst/>
+          </a:prstGeom>
+          <a:noFill/>
+        </p:spPr>
+        <p:txBody>
+          <a:bodyPr wrap="square" lIns="0" tIns="0" rIns="0" bIns="0" anchor="ctr">
+            <a:spAutoFit/>
+          </a:bodyPr>
+          <a:lstStyle/>
+          <a:p>
+            <a:pPr algn="l">
+              <a:lnSpc>
+                <a:spcPct val="105000"/>
+              </a:lnSpc>
+            </a:pPr>
+            <a:r>
+              <a:rPr sz="2600" b="1" i="0">
+                <a:solidFill>
+                  <a:srgbClr val="FFFFFF"/>
+                </a:solidFill>
+                <a:latin typeface="Calibri"/>
+              </a:rPr>
+              <a:t>Content — the spec</a:t>
+            </a:r>
+          </a:p>
+        </p:txBody>
+      </p:sp>
+      <p:sp>
+        <p:nvSpPr>
+          <p:cNvPr id="8" name="TextBox 7"/>
+          <p:cNvSpPr txBox="1"/>
+          <p:nvPr/>
+        </p:nvSpPr>
+        <p:spPr>
+          <a:xfrm>
+            <a:off x="914400" y="2606040"/>
+            <a:ext cx="4678527" cy="3383280"/>
+          </a:xfrm>
+          <a:prstGeom prst="rect">
+            <a:avLst/>
+          </a:prstGeom>
+          <a:noFill/>
+        </p:spPr>
+        <p:txBody>
+          <a:bodyPr wrap="square" lIns="0" tIns="0" rIns="0" bIns="0" anchor="t">
+            <a:spAutoFit/>
+          </a:bodyPr>
+          <a:lstStyle/>
+          <a:p>
+            <a:pPr algn="l">
+              <a:lnSpc>
+                <a:spcPct val="110000"/>
+              </a:lnSpc>
+              <a:spcAft>
+                <a:spcPts val="1000"/>
+              </a:spcAft>
+            </a:pPr>
+            <a:r>
+              <a:rPr sz="2200" b="0" i="0">
+                <a:solidFill>
+                  <a:srgbClr val="1A1A1A"/>
+                </a:solidFill>
+                <a:latin typeface="Calibri"/>
+              </a:rPr>
+              <a:t>●  Each slide's words</a:t>
+            </a:r>
+          </a:p>
+          <a:p>
+            <a:pPr algn="l">
+              <a:lnSpc>
+                <a:spcPct val="110000"/>
+              </a:lnSpc>
+              <a:spcAft>
+                <a:spcPts val="1000"/>
+              </a:spcAft>
+            </a:pPr>
+            <a:r>
+              <a:rPr sz="2200" b="0" i="0">
+                <a:solidFill>
+                  <a:srgbClr val="1A1A1A"/>
+                </a:solidFill>
+                <a:latin typeface="Calibri"/>
+              </a:rPr>
+              <a:t>●  Layout per slide</a:t>
+            </a:r>
+          </a:p>
+          <a:p>
+            <a:pPr algn="l">
+              <a:lnSpc>
+                <a:spcPct val="110000"/>
+              </a:lnSpc>
+              <a:spcAft>
+                <a:spcPts val="1000"/>
+              </a:spcAft>
+            </a:pPr>
+            <a:r>
+              <a:rPr sz="2200" b="0" i="0">
+                <a:solidFill>
+                  <a:srgbClr val="1A1A1A"/>
+                </a:solidFill>
+                <a:latin typeface="Calibri"/>
+              </a:rPr>
+              <a:t>●  Structure and story</a:t>
+            </a:r>
+          </a:p>
+          <a:p>
+            <a:pPr algn="l">
+              <a:lnSpc>
+                <a:spcPct val="110000"/>
+              </a:lnSpc>
+              <a:spcAft>
+                <a:spcPts val="1000"/>
+              </a:spcAft>
+            </a:pPr>
+            <a:r>
+              <a:rPr sz="2200" b="0" i="0">
+                <a:solidFill>
+                  <a:srgbClr val="1A1A1A"/>
+                </a:solidFill>
+                <a:latin typeface="Calibri"/>
+              </a:rPr>
+              <a:t>●  Written once, stable</a:t>
+            </a:r>
+          </a:p>
+        </p:txBody>
+      </p:sp>
+      <p:sp>
+        <p:nvSpPr>
+          <p:cNvPr id="9" name="Rectangle 8"/>
+          <p:cNvSpPr/>
+          <p:nvPr/>
+        </p:nvSpPr>
+        <p:spPr>
+          <a:xfrm>
+            <a:off x="6324447" y="1737360"/>
+            <a:ext cx="5227167" cy="4480560"/>
+          </a:xfrm>
+          <a:prstGeom prst="rect">
+            <a:avLst/>
+          </a:prstGeom>
+          <a:solidFill>
+            <a:srgbClr val="F2F2F2"/>
+          </a:solidFill>
+          <a:ln>
+            <a:noFill/>
+          </a:ln>
+          <a:effectLst/>
+        </p:spPr>
+        <p:style>
+          <a:lnRef idx="1">
+            <a:schemeClr val="accent1"/>
+          </a:lnRef>
+          <a:fillRef idx="3">
+            <a:schemeClr val="accent1"/>
+          </a:fillRef>
+          <a:effectRef idx="2">
+            <a:schemeClr val="accent1"/>
+          </a:effectRef>
+          <a:fontRef idx="minor">
+            <a:schemeClr val="lt1"/>
+          </a:fontRef>
+        </p:style>
+        <p:txBody>
+          <a:bodyPr rtlCol="0" anchor="ctr"/>
+          <a:lstStyle/>
+          <a:p>
+            <a:pPr algn="ctr"/>
+            <a:endParaRPr/>
+          </a:p>
+        </p:txBody>
+      </p:sp>
+      <p:sp>
+        <p:nvSpPr>
+          <p:cNvPr id="10" name="Rectangle 9"/>
+          <p:cNvSpPr/>
+          <p:nvPr/>
+        </p:nvSpPr>
+        <p:spPr>
+          <a:xfrm>
+            <a:off x="6324447" y="1737360"/>
+            <a:ext cx="5227167" cy="640080"/>
+          </a:xfrm>
+          <a:prstGeom prst="rect">
+            <a:avLst/>
+          </a:prstGeom>
+          <a:solidFill>
+            <a:srgbClr val="2F5597"/>
+          </a:solidFill>
+          <a:ln>
+            <a:noFill/>
+          </a:ln>
+          <a:effectLst/>
+        </p:spPr>
+        <p:style>
+          <a:lnRef idx="1">
+            <a:schemeClr val="accent1"/>
+          </a:lnRef>
+          <a:fillRef idx="3">
+            <a:schemeClr val="accent1"/>
+          </a:fillRef>
+          <a:effectRef idx="2">
+            <a:schemeClr val="accent1"/>
+          </a:effectRef>
+          <a:fontRef idx="minor">
+            <a:schemeClr val="lt1"/>
+          </a:fontRef>
+        </p:style>
+        <p:txBody>
+          <a:bodyPr rtlCol="0" anchor="ctr"/>
+          <a:lstStyle/>
+          <a:p>
+            <a:pPr algn="ctr"/>
+            <a:endParaRPr/>
+          </a:p>
+        </p:txBody>
+      </p:sp>
+      <p:sp>
+        <p:nvSpPr>
+          <p:cNvPr id="11" name="TextBox 10"/>
+          <p:cNvSpPr txBox="1"/>
+          <p:nvPr/>
+        </p:nvSpPr>
+        <p:spPr>
+          <a:xfrm>
+            <a:off x="6598767" y="1737360"/>
+            <a:ext cx="4678527" cy="640080"/>
+          </a:xfrm>
+          <a:prstGeom prst="rect">
+            <a:avLst/>
+          </a:prstGeom>
+          <a:noFill/>
+        </p:spPr>
+        <p:txBody>
+          <a:bodyPr wrap="square" lIns="0" tIns="0" rIns="0" bIns="0" anchor="ctr">
+            <a:spAutoFit/>
+          </a:bodyPr>
+          <a:lstStyle/>
+          <a:p>
+            <a:pPr algn="l">
+              <a:lnSpc>
+                <a:spcPct val="105000"/>
+              </a:lnSpc>
+            </a:pPr>
+            <a:r>
+              <a:rPr sz="2600" b="1" i="0">
+                <a:solidFill>
+                  <a:srgbClr val="FFFFFF"/>
+                </a:solidFill>
+                <a:latin typeface="Calibri"/>
+              </a:rPr>
+              <a:t>Look — the template</a:t>
+            </a:r>
+          </a:p>
+        </p:txBody>
+      </p:sp>
+      <p:sp>
+        <p:nvSpPr>
+          <p:cNvPr id="12" name="TextBox 11"/>
+          <p:cNvSpPr txBox="1"/>
+          <p:nvPr/>
+        </p:nvSpPr>
+        <p:spPr>
+          <a:xfrm>
+            <a:off x="6598767" y="2606040"/>
+            <a:ext cx="4678527" cy="3383280"/>
+          </a:xfrm>
+          <a:prstGeom prst="rect">
+            <a:avLst/>
+          </a:prstGeom>
+          <a:noFill/>
+        </p:spPr>
+        <p:txBody>
+          <a:bodyPr wrap="square" lIns="0" tIns="0" rIns="0" bIns="0" anchor="t">
+            <a:spAutoFit/>
+          </a:bodyPr>
+          <a:lstStyle/>
+          <a:p>
+            <a:pPr algn="l">
+              <a:lnSpc>
+                <a:spcPct val="110000"/>
+              </a:lnSpc>
+              <a:spcAft>
+                <a:spcPts val="1000"/>
+              </a:spcAft>
+            </a:pPr>
+            <a:r>
+              <a:rPr sz="2200" b="0" i="0">
+                <a:solidFill>
+                  <a:srgbClr val="1A1A1A"/>
+                </a:solidFill>
+                <a:latin typeface="Calibri"/>
+              </a:rPr>
+              <a:t>●  Color palette and fonts</a:t>
+            </a:r>
+          </a:p>
+          <a:p>
+            <a:pPr algn="l">
+              <a:lnSpc>
+                <a:spcPct val="110000"/>
+              </a:lnSpc>
+              <a:spcAft>
+                <a:spcPts val="1000"/>
+              </a:spcAft>
+            </a:pPr>
+            <a:r>
+              <a:rPr sz="2200" b="0" i="0">
+                <a:solidFill>
+                  <a:srgbClr val="1A1A1A"/>
+                </a:solidFill>
+                <a:latin typeface="Calibri"/>
+              </a:rPr>
+              <a:t>●  Accent treatment</a:t>
+            </a:r>
+          </a:p>
+          <a:p>
+            <a:pPr algn="l">
+              <a:lnSpc>
+                <a:spcPct val="110000"/>
+              </a:lnSpc>
+              <a:spcAft>
+                <a:spcPts val="1000"/>
+              </a:spcAft>
+            </a:pPr>
+            <a:r>
+              <a:rPr sz="2200" b="0" i="0">
+                <a:solidFill>
+                  <a:srgbClr val="1A1A1A"/>
+                </a:solidFill>
+                <a:latin typeface="Calibri"/>
+              </a:rPr>
+              <a:t>●  Uniform across all slides</a:t>
+            </a:r>
+          </a:p>
+          <a:p>
+            <a:pPr algn="l">
+              <a:lnSpc>
+                <a:spcPct val="110000"/>
+              </a:lnSpc>
+              <a:spcAft>
+                <a:spcPts val="1000"/>
+              </a:spcAft>
+            </a:pPr>
+            <a:r>
+              <a:rPr sz="2200" b="0" i="0">
+                <a:solidFill>
+                  <a:srgbClr val="1A1A1A"/>
+                </a:solidFill>
+                <a:latin typeface="Calibri"/>
+              </a:rPr>
+              <a:t>●  One-field swap</a:t>
+            </a:r>
+          </a:p>
+        </p:txBody>
+      </p:sp>
+      <p:sp>
+        <p:nvSpPr>
+          <p:cNvPr id="13" name="TextBox 12"/>
+          <p:cNvSpPr txBox="1"/>
+          <p:nvPr/>
+        </p:nvSpPr>
+        <p:spPr>
+          <a:xfrm>
+            <a:off x="10454335" y="6291072"/>
+            <a:ext cx="1097280" cy="384048"/>
+          </a:xfrm>
+          <a:prstGeom prst="rect">
+            <a:avLst/>
+          </a:prstGeom>
+          <a:noFill/>
+        </p:spPr>
+        <p:txBody>
+          <a:bodyPr wrap="square" lIns="0" tIns="0" rIns="0" bIns="0" anchor="t">
+            <a:spAutoFit/>
+          </a:bodyPr>
+          <a:lstStyle/>
+          <a:p>
+            <a:pPr algn="r">
+              <a:lnSpc>
+                <a:spcPct val="105000"/>
+              </a:lnSpc>
+            </a:pPr>
+            <a:r>
+              <a:rPr sz="1600" b="0" i="0">
+                <a:solidFill>
+                  <a:srgbClr val="7F7F7F"/>
+                </a:solidFill>
+                <a:latin typeface="Calibri"/>
+              </a:rPr>
+              <a:t>6</a:t>
+            </a:r>
+          </a:p>
+        </p:txBody>
+      </p:sp>
+      <p:sp>
+        <p:nvSpPr>
+          <p:cNvPr id="14" name="TextBox 13"/>
+          <p:cNvSpPr txBox="1"/>
+          <p:nvPr/>
+        </p:nvSpPr>
+        <p:spPr>
+          <a:xfrm>
+            <a:off x="8808415" y="182880"/>
+            <a:ext cx="2743200" cy="548640"/>
+          </a:xfrm>
+          <a:prstGeom prst="rect">
+            <a:avLst/>
+          </a:prstGeom>
+          <a:noFill/>
+        </p:spPr>
+        <p:txBody>
+          <a:bodyPr wrap="square" lIns="0" tIns="0" rIns="0" bIns="0" anchor="t">
+            <a:spAutoFit/>
+          </a:bodyPr>
+          <a:lstStyle/>
+          <a:p>
+            <a:pPr algn="r">
+              <a:lnSpc>
+                <a:spcPct val="105000"/>
+              </a:lnSpc>
+            </a:pPr>
+            <a:r>
+              <a:rPr sz="1800" b="1" i="0">
+                <a:solidFill>
+                  <a:srgbClr val="FFFFFF"/>
+                </a:solidFill>
+                <a:latin typeface="Calibri"/>
+              </a:rPr>
+              <a:t>Confidential</a:t>
+            </a:r>
+          </a:p>
+        </p:txBody>
+      </p:sp>
+    </p:spTree>
+  </p:cSld>
+  <p:clrMapOvr>
+    <a:masterClrMapping/>
+  </p:clrMapOvr>
+</p:sld>
+</file>
+
+<file path=ppt/slides/slide9.xml><?xml version="1.0" encoding="utf-8"?>
+<p:sld xmlns:a="http://schemas.openxmlformats.org/drawingml/2006/main" xmlns:r="http://schemas.openxmlformats.org/officeDocument/2006/relationships" xmlns:p="http://schemas.openxmlformats.org/presentationml/2006/main">
+  <p:cSld>
+    <p:spTree>
+      <p:nvGrpSpPr>
+        <p:cNvPr id="1" name=""/>
+        <p:cNvGrpSpPr/>
+        <p:nvPr/>
+      </p:nvGrpSpPr>
+      <p:grpSpPr>
+        <a:xfrm>
+          <a:off x="0" y="0"/>
+          <a:ext cx="0" cy="0"/>
+          <a:chOff x="0" y="0"/>
+          <a:chExt cx="0" cy="0"/>
+        </a:xfrm>
+      </p:grpSpPr>
+      <p:sp>
+        <p:nvSpPr>
+          <p:cNvPr id="2" name="Rectangle 1"/>
+          <p:cNvSpPr/>
+          <p:nvPr/>
+        </p:nvSpPr>
+        <p:spPr>
+          <a:xfrm>
+            <a:off x="0" y="0"/>
+            <a:ext cx="12191695" cy="914400"/>
+          </a:xfrm>
+          <a:prstGeom prst="rect">
+            <a:avLst/>
+          </a:prstGeom>
+          <a:solidFill>
+            <a:srgbClr val="111111"/>
+          </a:solidFill>
+          <a:ln>
+            <a:noFill/>
+          </a:ln>
+          <a:effectLst/>
+        </p:spPr>
+        <p:style>
+          <a:lnRef idx="1">
+            <a:schemeClr val="accent1"/>
+          </a:lnRef>
+          <a:fillRef idx="3">
+            <a:schemeClr val="accent1"/>
+          </a:fillRef>
+          <a:effectRef idx="2">
+            <a:schemeClr val="accent1"/>
+          </a:effectRef>
+          <a:fontRef idx="minor">
+            <a:schemeClr val="lt1"/>
+          </a:fontRef>
+        </p:style>
+        <p:txBody>
+          <a:bodyPr rtlCol="0" anchor="ctr"/>
+          <a:lstStyle/>
+          <a:p>
+            <a:pPr algn="ctr"/>
+            <a:endParaRPr/>
+          </a:p>
+        </p:txBody>
+      </p:sp>
+      <p:sp>
+        <p:nvSpPr>
+          <p:cNvPr id="3" name="TextBox 2"/>
+          <p:cNvSpPr txBox="1"/>
+          <p:nvPr/>
+        </p:nvSpPr>
+        <p:spPr>
+          <a:xfrm>
+            <a:off x="640080" y="118872"/>
+            <a:ext cx="8168335" cy="219456"/>
+          </a:xfrm>
+          <a:prstGeom prst="rect">
+            <a:avLst/>
+          </a:prstGeom>
+          <a:noFill/>
+        </p:spPr>
+        <p:txBody>
+          <a:bodyPr wrap="square" lIns="0" tIns="0" rIns="0" bIns="0" anchor="t">
+            <a:spAutoFit/>
+          </a:bodyPr>
+          <a:lstStyle/>
+          <a:p>
+            <a:pPr algn="l">
+              <a:lnSpc>
+                <a:spcPct val="105000"/>
+              </a:lnSpc>
+            </a:pPr>
+            <a:r>
+              <a:rPr sz="1100" b="1" i="0">
+                <a:solidFill>
+                  <a:srgbClr val="FFFFFF"/>
+                </a:solidFill>
+                <a:latin typeface="Calibri"/>
+              </a:rPr>
+              <a:t>TEMPLATES</a:t>
+            </a:r>
+          </a:p>
+        </p:txBody>
+      </p:sp>
+      <p:sp>
+        <p:nvSpPr>
+          <p:cNvPr id="4" name="TextBox 3"/>
+          <p:cNvSpPr txBox="1"/>
+          <p:nvPr/>
+        </p:nvSpPr>
+        <p:spPr>
+          <a:xfrm>
+            <a:off x="640080" y="347472"/>
+            <a:ext cx="8168335" cy="493776"/>
+          </a:xfrm>
+          <a:prstGeom prst="rect">
+            <a:avLst/>
+          </a:prstGeom>
+          <a:noFill/>
+        </p:spPr>
+        <p:txBody>
+          <a:bodyPr wrap="square" lIns="0" tIns="0" rIns="0" bIns="0" anchor="t">
+            <a:spAutoFit/>
+          </a:bodyPr>
+          <a:lstStyle/>
+          <a:p>
+            <a:pPr algn="l">
+              <a:lnSpc>
+                <a:spcPct val="105000"/>
+              </a:lnSpc>
+            </a:pPr>
+            <a:r>
+              <a:rPr sz="3000" b="1" i="0">
+                <a:solidFill>
+                  <a:srgbClr val="FFFFFF"/>
+                </a:solidFill>
+                <a:latin typeface="Calibri"/>
+              </a:rPr>
+              <a:t>A Look for Every Room</a:t>
+            </a:r>
+          </a:p>
+        </p:txBody>
+      </p:sp>
+      <p:sp>
+        <p:nvSpPr>
+          <p:cNvPr id="5" name="TextBox 4"/>
+          <p:cNvSpPr txBox="1"/>
+          <p:nvPr/>
+        </p:nvSpPr>
+        <p:spPr>
+          <a:xfrm>
+            <a:off x="640080" y="1024128"/>
+            <a:ext cx="10911535" cy="457200"/>
+          </a:xfrm>
+          <a:prstGeom prst="rect">
+            <a:avLst/>
+          </a:prstGeom>
+          <a:noFill/>
+        </p:spPr>
+        <p:txBody>
+          <a:bodyPr wrap="square" lIns="0" tIns="0" rIns="0" bIns="0" anchor="t">
             <a:spAutoFit/>
           </a:bodyPr>
           <a:lstStyle/>
@@ -7741,9 +8795,27 @@
                 <a:tableStyleId>{5C22544A-7EE6-4342-B048-85BDC9FD1C3A}</a:tableStyleId>
               </a:tblPr>
               <a:tblGrid>
-                <a:gridCol w="3637178"/>
-                <a:gridCol w="3637178"/>
-                <a:gridCol w="3637179"/>
+                <a:gridCol w="3637178">
+                  <a:extLst>
+                    <a:ext uri="{9D8B030D-6E8A-4147-A177-3AD203B41FA5}">
+                      <a16:colId xmlns:a16="http://schemas.microsoft.com/office/drawing/2014/main" val="20000"/>
+                    </a:ext>
+                  </a:extLst>
+                </a:gridCol>
+                <a:gridCol w="3637178">
+                  <a:extLst>
+                    <a:ext uri="{9D8B030D-6E8A-4147-A177-3AD203B41FA5}">
+                      <a16:colId xmlns:a16="http://schemas.microsoft.com/office/drawing/2014/main" val="20001"/>
+                    </a:ext>
+                  </a:extLst>
+                </a:gridCol>
+                <a:gridCol w="3637179">
+                  <a:extLst>
+                    <a:ext uri="{9D8B030D-6E8A-4147-A177-3AD203B41FA5}">
+                      <a16:colId xmlns:a16="http://schemas.microsoft.com/office/drawing/2014/main" val="20002"/>
+                    </a:ext>
+                  </a:extLst>
+                </a:gridCol>
               </a:tblGrid>
               <a:tr h="496388">
                 <a:tc>
@@ -7762,7 +8834,7 @@
                       </a:r>
                     </a:p>
                   </a:txBody>
-                  <a:tcPr anchor="ctr" marL="109728" marR="109728" marT="36576" marB="36576">
+                  <a:tcPr marL="109728" marR="109728" marT="36576" marB="36576" anchor="ctr">
                     <a:solidFill>
                       <a:srgbClr val="111111"/>
                     </a:solidFill>
@@ -7784,7 +8856,7 @@
                       </a:r>
                     </a:p>
                   </a:txBody>
-                  <a:tcPr anchor="ctr" marL="109728" marR="109728" marT="36576" marB="36576">
+                  <a:tcPr marL="109728" marR="109728" marT="36576" marB="36576" anchor="ctr">
                     <a:solidFill>
                       <a:srgbClr val="111111"/>
                     </a:solidFill>
@@ -7806,12 +8878,17 @@
                       </a:r>
                     </a:p>
                   </a:txBody>
-                  <a:tcPr anchor="ctr" marL="109728" marR="109728" marT="36576" marB="36576">
+                  <a:tcPr marL="109728" marR="109728" marT="36576" marB="36576" anchor="ctr">
                     <a:solidFill>
                       <a:srgbClr val="111111"/>
                     </a:solidFill>
                   </a:tcPr>
                 </a:tc>
+                <a:extLst>
+                  <a:ext uri="{0D108BD9-81ED-4DB2-BD59-A6C34878D82A}">
+                    <a16:rowId xmlns:a16="http://schemas.microsoft.com/office/drawing/2014/main" val="10000"/>
+                  </a:ext>
+                </a:extLst>
               </a:tr>
               <a:tr h="496388">
                 <a:tc>
@@ -7830,7 +8907,7 @@
                       </a:r>
                     </a:p>
                   </a:txBody>
-                  <a:tcPr anchor="ctr" marL="109728" marR="109728" marT="36576" marB="36576">
+                  <a:tcPr marL="109728" marR="109728" marT="36576" marB="36576" anchor="ctr">
                     <a:solidFill>
                       <a:srgbClr val="FFFFFF"/>
                     </a:solidFill>
@@ -7852,7 +8929,7 @@
                       </a:r>
                     </a:p>
                   </a:txBody>
-                  <a:tcPr anchor="ctr" marL="109728" marR="109728" marT="36576" marB="36576">
+                  <a:tcPr marL="109728" marR="109728" marT="36576" marB="36576" anchor="ctr">
                     <a:solidFill>
                       <a:srgbClr val="FFFFFF"/>
                     </a:solidFill>
@@ -7874,12 +8951,17 @@
                       </a:r>
                     </a:p>
                   </a:txBody>
-                  <a:tcPr anchor="ctr" marL="109728" marR="109728" marT="36576" marB="36576">
+                  <a:tcPr marL="109728" marR="109728" marT="36576" marB="36576" anchor="ctr">
                     <a:solidFill>
                       <a:srgbClr val="FFFFFF"/>
                     </a:solidFill>
                   </a:tcPr>
                 </a:tc>
+                <a:extLst>
+                  <a:ext uri="{0D108BD9-81ED-4DB2-BD59-A6C34878D82A}">
+                    <a16:rowId xmlns:a16="http://schemas.microsoft.com/office/drawing/2014/main" val="10001"/>
+                  </a:ext>
+                </a:extLst>
               </a:tr>
               <a:tr h="496388">
                 <a:tc>
@@ -7898,7 +8980,7 @@
                       </a:r>
                     </a:p>
                   </a:txBody>
-                  <a:tcPr anchor="ctr" marL="109728" marR="109728" marT="36576" marB="36576">
+                  <a:tcPr marL="109728" marR="109728" marT="36576" marB="36576" anchor="ctr">
                     <a:solidFill>
                       <a:srgbClr val="F2F2F2"/>
                     </a:solidFill>
@@ -7920,7 +9002,7 @@
                       </a:r>
                     </a:p>
                   </a:txBody>
-                  <a:tcPr anchor="ctr" marL="109728" marR="109728" marT="36576" marB="36576">
+                  <a:tcPr marL="109728" marR="109728" marT="36576" marB="36576" anchor="ctr">
                     <a:solidFill>
                       <a:srgbClr val="F2F2F2"/>
                     </a:solidFill>
@@ -7942,12 +9024,17 @@
                       </a:r>
                     </a:p>
                   </a:txBody>
-                  <a:tcPr anchor="ctr" marL="109728" marR="109728" marT="36576" marB="36576">
+                  <a:tcPr marL="109728" marR="109728" marT="36576" marB="36576" anchor="ctr">
                     <a:solidFill>
                       <a:srgbClr val="F2F2F2"/>
                     </a:solidFill>
                   </a:tcPr>
                 </a:tc>
+                <a:extLst>
+                  <a:ext uri="{0D108BD9-81ED-4DB2-BD59-A6C34878D82A}">
+                    <a16:rowId xmlns:a16="http://schemas.microsoft.com/office/drawing/2014/main" val="10002"/>
+                  </a:ext>
+                </a:extLst>
               </a:tr>
               <a:tr h="496388">
                 <a:tc>
@@ -7966,7 +9053,7 @@
                       </a:r>
                     </a:p>
                   </a:txBody>
-                  <a:tcPr anchor="ctr" marL="109728" marR="109728" marT="36576" marB="36576">
+                  <a:tcPr marL="109728" marR="109728" marT="36576" marB="36576" anchor="ctr">
                     <a:solidFill>
                       <a:srgbClr val="FFFFFF"/>
                     </a:solidFill>
@@ -7988,7 +9075,7 @@
                       </a:r>
                     </a:p>
                   </a:txBody>
-                  <a:tcPr anchor="ctr" marL="109728" marR="109728" marT="36576" marB="36576">
+                  <a:tcPr marL="109728" marR="109728" marT="36576" marB="36576" anchor="ctr">
                     <a:solidFill>
                       <a:srgbClr val="FFFFFF"/>
                     </a:solidFill>
@@ -8010,12 +9097,17 @@
                       </a:r>
                     </a:p>
                   </a:txBody>
-                  <a:tcPr anchor="ctr" marL="109728" marR="109728" marT="36576" marB="36576">
+                  <a:tcPr marL="109728" marR="109728" marT="36576" marB="36576" anchor="ctr">
                     <a:solidFill>
                       <a:srgbClr val="FFFFFF"/>
                     </a:solidFill>
                   </a:tcPr>
                 </a:tc>
+                <a:extLst>
+                  <a:ext uri="{0D108BD9-81ED-4DB2-BD59-A6C34878D82A}">
+                    <a16:rowId xmlns:a16="http://schemas.microsoft.com/office/drawing/2014/main" val="10003"/>
+                  </a:ext>
+                </a:extLst>
               </a:tr>
               <a:tr h="496388">
                 <a:tc>
@@ -8034,7 +9126,7 @@
                       </a:r>
                     </a:p>
                   </a:txBody>
-                  <a:tcPr anchor="ctr" marL="109728" marR="109728" marT="36576" marB="36576">
+                  <a:tcPr marL="109728" marR="109728" marT="36576" marB="36576" anchor="ctr">
                     <a:solidFill>
                       <a:srgbClr val="F2F2F2"/>
                     </a:solidFill>
@@ -8056,7 +9148,7 @@
                       </a:r>
                     </a:p>
                   </a:txBody>
-                  <a:tcPr anchor="ctr" marL="109728" marR="109728" marT="36576" marB="36576">
+                  <a:tcPr marL="109728" marR="109728" marT="36576" marB="36576" anchor="ctr">
                     <a:solidFill>
                       <a:srgbClr val="F2F2F2"/>
                     </a:solidFill>
@@ -8078,12 +9170,17 @@
                       </a:r>
                     </a:p>
                   </a:txBody>
-                  <a:tcPr anchor="ctr" marL="109728" marR="109728" marT="36576" marB="36576">
+                  <a:tcPr marL="109728" marR="109728" marT="36576" marB="36576" anchor="ctr">
                     <a:solidFill>
                       <a:srgbClr val="F2F2F2"/>
                     </a:solidFill>
                   </a:tcPr>
                 </a:tc>
+                <a:extLst>
+                  <a:ext uri="{0D108BD9-81ED-4DB2-BD59-A6C34878D82A}">
+                    <a16:rowId xmlns:a16="http://schemas.microsoft.com/office/drawing/2014/main" val="10004"/>
+                  </a:ext>
+                </a:extLst>
               </a:tr>
               <a:tr h="496388">
                 <a:tc>
@@ -8102,7 +9199,7 @@
                       </a:r>
                     </a:p>
                   </a:txBody>
-                  <a:tcPr anchor="ctr" marL="109728" marR="109728" marT="36576" marB="36576">
+                  <a:tcPr marL="109728" marR="109728" marT="36576" marB="36576" anchor="ctr">
                     <a:solidFill>
                       <a:srgbClr val="FFFFFF"/>
                     </a:solidFill>
@@ -8124,7 +9221,7 @@
                       </a:r>
                     </a:p>
                   </a:txBody>
-                  <a:tcPr anchor="ctr" marL="109728" marR="109728" marT="36576" marB="36576">
+                  <a:tcPr marL="109728" marR="109728" marT="36576" marB="36576" anchor="ctr">
                     <a:solidFill>
                       <a:srgbClr val="FFFFFF"/>
                     </a:solidFill>
@@ -8146,12 +9243,17 @@
                       </a:r>
                     </a:p>
                   </a:txBody>
-                  <a:tcPr anchor="ctr" marL="109728" marR="109728" marT="36576" marB="36576">
+                  <a:tcPr marL="109728" marR="109728" marT="36576" marB="36576" anchor="ctr">
                     <a:solidFill>
                       <a:srgbClr val="FFFFFF"/>
                     </a:solidFill>
                   </a:tcPr>
                 </a:tc>
+                <a:extLst>
+                  <a:ext uri="{0D108BD9-81ED-4DB2-BD59-A6C34878D82A}">
+                    <a16:rowId xmlns:a16="http://schemas.microsoft.com/office/drawing/2014/main" val="10005"/>
+                  </a:ext>
+                </a:extLst>
               </a:tr>
               <a:tr h="496392">
                 <a:tc>
@@ -8170,7 +9272,7 @@
                       </a:r>
                     </a:p>
                   </a:txBody>
-                  <a:tcPr anchor="ctr" marL="109728" marR="109728" marT="36576" marB="36576">
+                  <a:tcPr marL="109728" marR="109728" marT="36576" marB="36576" anchor="ctr">
                     <a:solidFill>
                       <a:srgbClr val="F2F2F2"/>
                     </a:solidFill>
@@ -8192,7 +9294,7 @@
                       </a:r>
                     </a:p>
                   </a:txBody>
-                  <a:tcPr anchor="ctr" marL="109728" marR="109728" marT="36576" marB="36576">
+                  <a:tcPr marL="109728" marR="109728" marT="36576" marB="36576" anchor="ctr">
                     <a:solidFill>
                       <a:srgbClr val="F2F2F2"/>
                     </a:solidFill>
@@ -8214,12 +9316,17 @@
                       </a:r>
                     </a:p>
                   </a:txBody>
-                  <a:tcPr anchor="ctr" marL="109728" marR="109728" marT="36576" marB="36576">
+                  <a:tcPr marL="109728" marR="109728" marT="36576" marB="36576" anchor="ctr">
                     <a:solidFill>
                       <a:srgbClr val="F2F2F2"/>
                     </a:solidFill>
                   </a:tcPr>
                 </a:tc>
+                <a:extLst>
+                  <a:ext uri="{0D108BD9-81ED-4DB2-BD59-A6C34878D82A}">
+                    <a16:rowId xmlns:a16="http://schemas.microsoft.com/office/drawing/2014/main" val="10006"/>
+                  </a:ext>
+                </a:extLst>
               </a:tr>
             </a:tbl>
           </a:graphicData>
@@ -8242,7 +9349,7 @@
           <a:noFill/>
         </p:spPr>
         <p:txBody>
-          <a:bodyPr wrap="square" anchor="t" lIns="0" rIns="0" tIns="0" bIns="0">
+          <a:bodyPr wrap="square" lIns="0" tIns="0" rIns="0" bIns="0" anchor="t">
             <a:spAutoFit/>
           </a:bodyPr>
           <a:lstStyle/>
@@ -8281,815 +9388,7 @@
           <a:noFill/>
         </p:spPr>
         <p:txBody>
-          <a:bodyPr wrap="square" anchor="t" lIns="0" rIns="0" tIns="0" bIns="0">
-            <a:spAutoFit/>
-          </a:bodyPr>
-          <a:lstStyle/>
-          <a:p>
-            <a:pPr algn="r">
-              <a:lnSpc>
-                <a:spcPct val="105000"/>
-              </a:lnSpc>
-            </a:pPr>
-            <a:r>
-              <a:rPr sz="1800" b="1" i="0">
-                <a:solidFill>
-                  <a:srgbClr val="FFFFFF"/>
-                </a:solidFill>
-                <a:latin typeface="Calibri"/>
-              </a:rPr>
-              <a:t>Confidential</a:t>
-            </a:r>
-          </a:p>
-        </p:txBody>
-      </p:sp>
-    </p:spTree>
-  </p:cSld>
-  <p:clrMapOvr>
-    <a:masterClrMapping/>
-  </p:clrMapOvr>
-</p:sld>
-</file>
-
-<file path=ppt/slides/slide8.xml><?xml version="1.0" encoding="utf-8"?>
-<p:sld xmlns:a="http://schemas.openxmlformats.org/drawingml/2006/main" xmlns:p="http://schemas.openxmlformats.org/presentationml/2006/main" xmlns:r="http://schemas.openxmlformats.org/officeDocument/2006/relationships">
-  <p:cSld>
-    <p:spTree>
-      <p:nvGrpSpPr>
-        <p:cNvPr id="1" name=""/>
-        <p:cNvGrpSpPr/>
-        <p:nvPr/>
-      </p:nvGrpSpPr>
-      <p:grpSpPr/>
-      <p:sp>
-        <p:nvSpPr>
-          <p:cNvPr id="2" name="Rectangle 1"/>
-          <p:cNvSpPr/>
-          <p:nvPr/>
-        </p:nvSpPr>
-        <p:spPr>
-          <a:xfrm>
-            <a:off x="0" y="0"/>
-            <a:ext cx="12191695" cy="914400"/>
-          </a:xfrm>
-          <a:prstGeom prst="rect">
-            <a:avLst/>
-          </a:prstGeom>
-          <a:solidFill>
-            <a:srgbClr val="111111"/>
-          </a:solidFill>
-          <a:ln>
-            <a:noFill/>
-          </a:ln>
-          <a:effectLst/>
-        </p:spPr>
-        <p:style>
-          <a:lnRef idx="1">
-            <a:schemeClr val="accent1"/>
-          </a:lnRef>
-          <a:fillRef idx="3">
-            <a:schemeClr val="accent1"/>
-          </a:fillRef>
-          <a:effectRef idx="2">
-            <a:schemeClr val="accent1"/>
-          </a:effectRef>
-          <a:fontRef idx="minor">
-            <a:schemeClr val="lt1"/>
-          </a:fontRef>
-        </p:style>
-        <p:txBody>
-          <a:bodyPr rtlCol="0" anchor="ctr"/>
-          <a:lstStyle/>
-          <a:p>
-            <a:pPr algn="ctr"/>
-          </a:p>
-        </p:txBody>
-      </p:sp>
-      <p:sp>
-        <p:nvSpPr>
-          <p:cNvPr id="3" name="TextBox 2"/>
-          <p:cNvSpPr txBox="1"/>
-          <p:nvPr/>
-        </p:nvSpPr>
-        <p:spPr>
-          <a:xfrm>
-            <a:off x="640080" y="118872"/>
-            <a:ext cx="8168335" cy="219456"/>
-          </a:xfrm>
-          <a:prstGeom prst="rect">
-            <a:avLst/>
-          </a:prstGeom>
-          <a:noFill/>
-        </p:spPr>
-        <p:txBody>
-          <a:bodyPr wrap="square" anchor="t" lIns="0" rIns="0" tIns="0" bIns="0">
-            <a:spAutoFit/>
-          </a:bodyPr>
-          <a:lstStyle/>
-          <a:p>
-            <a:pPr algn="l">
-              <a:lnSpc>
-                <a:spcPct val="105000"/>
-              </a:lnSpc>
-            </a:pPr>
-            <a:r>
-              <a:rPr sz="1100" b="1" i="0">
-                <a:solidFill>
-                  <a:srgbClr val="FFFFFF"/>
-                </a:solidFill>
-                <a:latin typeface="Calibri"/>
-              </a:rPr>
-              <a:t>LAYOUTS</a:t>
-            </a:r>
-          </a:p>
-        </p:txBody>
-      </p:sp>
-      <p:sp>
-        <p:nvSpPr>
-          <p:cNvPr id="4" name="TextBox 3"/>
-          <p:cNvSpPr txBox="1"/>
-          <p:nvPr/>
-        </p:nvSpPr>
-        <p:spPr>
-          <a:xfrm>
-            <a:off x="640080" y="347472"/>
-            <a:ext cx="8168335" cy="493776"/>
-          </a:xfrm>
-          <a:prstGeom prst="rect">
-            <a:avLst/>
-          </a:prstGeom>
-          <a:noFill/>
-        </p:spPr>
-        <p:txBody>
-          <a:bodyPr wrap="square" anchor="t" lIns="0" rIns="0" tIns="0" bIns="0">
-            <a:spAutoFit/>
-          </a:bodyPr>
-          <a:lstStyle/>
-          <a:p>
-            <a:pPr algn="l">
-              <a:lnSpc>
-                <a:spcPct val="105000"/>
-              </a:lnSpc>
-            </a:pPr>
-            <a:r>
-              <a:rPr sz="3000" b="1" i="0">
-                <a:solidFill>
-                  <a:srgbClr val="FFFFFF"/>
-                </a:solidFill>
-                <a:latin typeface="Calibri"/>
-              </a:rPr>
-              <a:t>A Layout for Every Job</a:t>
-            </a:r>
-          </a:p>
-        </p:txBody>
-      </p:sp>
-      <p:sp>
-        <p:nvSpPr>
-          <p:cNvPr id="5" name="TextBox 4"/>
-          <p:cNvSpPr txBox="1"/>
-          <p:nvPr/>
-        </p:nvSpPr>
-        <p:spPr>
-          <a:xfrm>
-            <a:off x="640080" y="1024128"/>
-            <a:ext cx="10911535" cy="457200"/>
-          </a:xfrm>
-          <a:prstGeom prst="rect">
-            <a:avLst/>
-          </a:prstGeom>
-          <a:noFill/>
-        </p:spPr>
-        <p:txBody>
-          <a:bodyPr wrap="square" anchor="t" lIns="0" rIns="0" tIns="0" bIns="0">
-            <a:spAutoFit/>
-          </a:bodyPr>
-          <a:lstStyle/>
-          <a:p>
-            <a:pPr algn="l">
-              <a:lnSpc>
-                <a:spcPct val="105000"/>
-              </a:lnSpc>
-            </a:pPr>
-            <a:r>
-              <a:rPr sz="2600" b="0" i="1">
-                <a:solidFill>
-                  <a:srgbClr val="595959"/>
-                </a:solidFill>
-                <a:latin typeface="Calibri"/>
-              </a:rPr>
-              <a:t>Thirteen layouts so the slide fits the message, not the reverse.</a:t>
-            </a:r>
-          </a:p>
-        </p:txBody>
-      </p:sp>
-      <p:sp>
-        <p:nvSpPr>
-          <p:cNvPr id="6" name="TextBox 5"/>
-          <p:cNvSpPr txBox="1"/>
-          <p:nvPr/>
-        </p:nvSpPr>
-        <p:spPr>
-          <a:xfrm>
-            <a:off x="640080" y="1737360"/>
-            <a:ext cx="5181447" cy="457200"/>
-          </a:xfrm>
-          <a:prstGeom prst="rect">
-            <a:avLst/>
-          </a:prstGeom>
-          <a:noFill/>
-        </p:spPr>
-        <p:txBody>
-          <a:bodyPr wrap="square" anchor="t" lIns="0" rIns="0" tIns="0" bIns="0">
-            <a:spAutoFit/>
-          </a:bodyPr>
-          <a:lstStyle/>
-          <a:p>
-            <a:pPr algn="l">
-              <a:lnSpc>
-                <a:spcPct val="105000"/>
-              </a:lnSpc>
-            </a:pPr>
-            <a:r>
-              <a:rPr sz="2600" b="1" i="0">
-                <a:solidFill>
-                  <a:srgbClr val="595959"/>
-                </a:solidFill>
-                <a:latin typeface="Calibri"/>
-              </a:rPr>
-              <a:t>Framing &amp; text</a:t>
-            </a:r>
-          </a:p>
-        </p:txBody>
-      </p:sp>
-      <p:sp>
-        <p:nvSpPr>
-          <p:cNvPr id="7" name="TextBox 6"/>
-          <p:cNvSpPr txBox="1"/>
-          <p:nvPr/>
-        </p:nvSpPr>
-        <p:spPr>
-          <a:xfrm>
-            <a:off x="640080" y="2286000"/>
-            <a:ext cx="5181447" cy="3931920"/>
-          </a:xfrm>
-          <a:prstGeom prst="rect">
-            <a:avLst/>
-          </a:prstGeom>
-          <a:noFill/>
-        </p:spPr>
-        <p:txBody>
-          <a:bodyPr wrap="square" anchor="t" lIns="0" rIns="0" tIns="0" bIns="0">
-            <a:spAutoFit/>
-          </a:bodyPr>
-          <a:lstStyle/>
-          <a:p>
-            <a:pPr algn="l">
-              <a:lnSpc>
-                <a:spcPct val="110000"/>
-              </a:lnSpc>
-              <a:spcAft>
-                <a:spcPts val="1000"/>
-              </a:spcAft>
-            </a:pPr>
-            <a:r>
-              <a:rPr sz="2200" b="0" i="0">
-                <a:solidFill>
-                  <a:srgbClr val="1A1A1A"/>
-                </a:solidFill>
-                <a:latin typeface="Calibri"/>
-              </a:rPr>
-              <a:t>●  title, section, closing</a:t>
-            </a:r>
-          </a:p>
-          <a:p>
-            <a:pPr algn="l">
-              <a:lnSpc>
-                <a:spcPct val="110000"/>
-              </a:lnSpc>
-              <a:spcAft>
-                <a:spcPts val="1000"/>
-              </a:spcAft>
-            </a:pPr>
-            <a:r>
-              <a:rPr sz="2200" b="0" i="0">
-                <a:solidFill>
-                  <a:srgbClr val="1A1A1A"/>
-                </a:solidFill>
-                <a:latin typeface="Calibri"/>
-              </a:rPr>
-              <a:t>●  bullets, content</a:t>
-            </a:r>
-          </a:p>
-          <a:p>
-            <a:pPr algn="l">
-              <a:lnSpc>
-                <a:spcPct val="110000"/>
-              </a:lnSpc>
-              <a:spcAft>
-                <a:spcPts val="1000"/>
-              </a:spcAft>
-            </a:pPr>
-            <a:r>
-              <a:rPr sz="2200" b="0" i="0">
-                <a:solidFill>
-                  <a:srgbClr val="1A1A1A"/>
-                </a:solidFill>
-                <a:latin typeface="Calibri"/>
-              </a:rPr>
-              <a:t>●  two_column, comparison</a:t>
-            </a:r>
-          </a:p>
-          <a:p>
-            <a:pPr algn="l">
-              <a:lnSpc>
-                <a:spcPct val="110000"/>
-              </a:lnSpc>
-              <a:spcAft>
-                <a:spcPts val="1000"/>
-              </a:spcAft>
-            </a:pPr>
-            <a:r>
-              <a:rPr sz="2200" b="0" i="0">
-                <a:solidFill>
-                  <a:srgbClr val="1A1A1A"/>
-                </a:solidFill>
-                <a:latin typeface="Calibri"/>
-              </a:rPr>
-              <a:t>●  quote</a:t>
-            </a:r>
-          </a:p>
-        </p:txBody>
-      </p:sp>
-      <p:sp>
-        <p:nvSpPr>
-          <p:cNvPr id="8" name="TextBox 7"/>
-          <p:cNvSpPr txBox="1"/>
-          <p:nvPr/>
-        </p:nvSpPr>
-        <p:spPr>
-          <a:xfrm>
-            <a:off x="6370167" y="1737360"/>
-            <a:ext cx="5181447" cy="457200"/>
-          </a:xfrm>
-          <a:prstGeom prst="rect">
-            <a:avLst/>
-          </a:prstGeom>
-          <a:noFill/>
-        </p:spPr>
-        <p:txBody>
-          <a:bodyPr wrap="square" anchor="t" lIns="0" rIns="0" tIns="0" bIns="0">
-            <a:spAutoFit/>
-          </a:bodyPr>
-          <a:lstStyle/>
-          <a:p>
-            <a:pPr algn="l">
-              <a:lnSpc>
-                <a:spcPct val="105000"/>
-              </a:lnSpc>
-            </a:pPr>
-            <a:r>
-              <a:rPr sz="2600" b="1" i="0">
-                <a:solidFill>
-                  <a:srgbClr val="595959"/>
-                </a:solidFill>
-                <a:latin typeface="Calibri"/>
-              </a:rPr>
-              <a:t>Data &amp; visuals</a:t>
-            </a:r>
-          </a:p>
-        </p:txBody>
-      </p:sp>
-      <p:sp>
-        <p:nvSpPr>
-          <p:cNvPr id="9" name="TextBox 8"/>
-          <p:cNvSpPr txBox="1"/>
-          <p:nvPr/>
-        </p:nvSpPr>
-        <p:spPr>
-          <a:xfrm>
-            <a:off x="6370167" y="2286000"/>
-            <a:ext cx="5181447" cy="3931920"/>
-          </a:xfrm>
-          <a:prstGeom prst="rect">
-            <a:avLst/>
-          </a:prstGeom>
-          <a:noFill/>
-        </p:spPr>
-        <p:txBody>
-          <a:bodyPr wrap="square" anchor="t" lIns="0" rIns="0" tIns="0" bIns="0">
-            <a:spAutoFit/>
-          </a:bodyPr>
-          <a:lstStyle/>
-          <a:p>
-            <a:pPr algn="l">
-              <a:lnSpc>
-                <a:spcPct val="110000"/>
-              </a:lnSpc>
-              <a:spcAft>
-                <a:spcPts val="1000"/>
-              </a:spcAft>
-            </a:pPr>
-            <a:r>
-              <a:rPr sz="2200" b="0" i="0">
-                <a:solidFill>
-                  <a:srgbClr val="1A1A1A"/>
-                </a:solidFill>
-                <a:latin typeface="Calibri"/>
-              </a:rPr>
-              <a:t>●  metrics — KPI cards</a:t>
-            </a:r>
-          </a:p>
-          <a:p>
-            <a:pPr algn="l">
-              <a:lnSpc>
-                <a:spcPct val="110000"/>
-              </a:lnSpc>
-              <a:spcAft>
-                <a:spcPts val="1000"/>
-              </a:spcAft>
-            </a:pPr>
-            <a:r>
-              <a:rPr sz="2200" b="0" i="0">
-                <a:solidFill>
-                  <a:srgbClr val="1A1A1A"/>
-                </a:solidFill>
-                <a:latin typeface="Calibri"/>
-              </a:rPr>
-              <a:t>●  table — data grids</a:t>
-            </a:r>
-          </a:p>
-          <a:p>
-            <a:pPr algn="l">
-              <a:lnSpc>
-                <a:spcPct val="110000"/>
-              </a:lnSpc>
-              <a:spcAft>
-                <a:spcPts val="1000"/>
-              </a:spcAft>
-            </a:pPr>
-            <a:r>
-              <a:rPr sz="2200" b="0" i="0">
-                <a:solidFill>
-                  <a:srgbClr val="1A1A1A"/>
-                </a:solidFill>
-                <a:latin typeface="Calibri"/>
-              </a:rPr>
-              <a:t>●  chart, diagram</a:t>
-            </a:r>
-          </a:p>
-          <a:p>
-            <a:pPr algn="l">
-              <a:lnSpc>
-                <a:spcPct val="110000"/>
-              </a:lnSpc>
-              <a:spcAft>
-                <a:spcPts val="1000"/>
-              </a:spcAft>
-            </a:pPr>
-            <a:r>
-              <a:rPr sz="2200" b="0" i="0">
-                <a:solidFill>
-                  <a:srgbClr val="1A1A1A"/>
-                </a:solidFill>
-                <a:latin typeface="Calibri"/>
-              </a:rPr>
-              <a:t>●  image — pictures + text</a:t>
-            </a:r>
-          </a:p>
-        </p:txBody>
-      </p:sp>
-      <p:sp>
-        <p:nvSpPr>
-          <p:cNvPr id="10" name="TextBox 9"/>
-          <p:cNvSpPr txBox="1"/>
-          <p:nvPr/>
-        </p:nvSpPr>
-        <p:spPr>
-          <a:xfrm>
-            <a:off x="10454335" y="6291072"/>
-            <a:ext cx="1097280" cy="384048"/>
-          </a:xfrm>
-          <a:prstGeom prst="rect">
-            <a:avLst/>
-          </a:prstGeom>
-          <a:noFill/>
-        </p:spPr>
-        <p:txBody>
-          <a:bodyPr wrap="square" anchor="t" lIns="0" rIns="0" tIns="0" bIns="0">
-            <a:spAutoFit/>
-          </a:bodyPr>
-          <a:lstStyle/>
-          <a:p>
-            <a:pPr algn="r">
-              <a:lnSpc>
-                <a:spcPct val="105000"/>
-              </a:lnSpc>
-            </a:pPr>
-            <a:r>
-              <a:rPr sz="1600" b="0" i="0">
-                <a:solidFill>
-                  <a:srgbClr val="7F7F7F"/>
-                </a:solidFill>
-                <a:latin typeface="Calibri"/>
-              </a:rPr>
-              <a:t>8</a:t>
-            </a:r>
-          </a:p>
-        </p:txBody>
-      </p:sp>
-      <p:sp>
-        <p:nvSpPr>
-          <p:cNvPr id="11" name="TextBox 10"/>
-          <p:cNvSpPr txBox="1"/>
-          <p:nvPr/>
-        </p:nvSpPr>
-        <p:spPr>
-          <a:xfrm>
-            <a:off x="8808415" y="182880"/>
-            <a:ext cx="2743200" cy="548640"/>
-          </a:xfrm>
-          <a:prstGeom prst="rect">
-            <a:avLst/>
-          </a:prstGeom>
-          <a:noFill/>
-        </p:spPr>
-        <p:txBody>
-          <a:bodyPr wrap="square" anchor="t" lIns="0" rIns="0" tIns="0" bIns="0">
-            <a:spAutoFit/>
-          </a:bodyPr>
-          <a:lstStyle/>
-          <a:p>
-            <a:pPr algn="r">
-              <a:lnSpc>
-                <a:spcPct val="105000"/>
-              </a:lnSpc>
-            </a:pPr>
-            <a:r>
-              <a:rPr sz="1800" b="1" i="0">
-                <a:solidFill>
-                  <a:srgbClr val="FFFFFF"/>
-                </a:solidFill>
-                <a:latin typeface="Calibri"/>
-              </a:rPr>
-              <a:t>Confidential</a:t>
-            </a:r>
-          </a:p>
-        </p:txBody>
-      </p:sp>
-    </p:spTree>
-  </p:cSld>
-  <p:clrMapOvr>
-    <a:masterClrMapping/>
-  </p:clrMapOvr>
-</p:sld>
-</file>
-
-<file path=ppt/slides/slide9.xml><?xml version="1.0" encoding="utf-8"?>
-<p:sld xmlns:a="http://schemas.openxmlformats.org/drawingml/2006/main" xmlns:p="http://schemas.openxmlformats.org/presentationml/2006/main" xmlns:r="http://schemas.openxmlformats.org/officeDocument/2006/relationships">
-  <p:cSld>
-    <p:spTree>
-      <p:nvGrpSpPr>
-        <p:cNvPr id="1" name=""/>
-        <p:cNvGrpSpPr/>
-        <p:nvPr/>
-      </p:nvGrpSpPr>
-      <p:grpSpPr/>
-      <p:sp>
-        <p:nvSpPr>
-          <p:cNvPr id="2" name="Rectangle 1"/>
-          <p:cNvSpPr/>
-          <p:nvPr/>
-        </p:nvSpPr>
-        <p:spPr>
-          <a:xfrm>
-            <a:off x="0" y="0"/>
-            <a:ext cx="12191695" cy="914400"/>
-          </a:xfrm>
-          <a:prstGeom prst="rect">
-            <a:avLst/>
-          </a:prstGeom>
-          <a:solidFill>
-            <a:srgbClr val="111111"/>
-          </a:solidFill>
-          <a:ln>
-            <a:noFill/>
-          </a:ln>
-          <a:effectLst/>
-        </p:spPr>
-        <p:style>
-          <a:lnRef idx="1">
-            <a:schemeClr val="accent1"/>
-          </a:lnRef>
-          <a:fillRef idx="3">
-            <a:schemeClr val="accent1"/>
-          </a:fillRef>
-          <a:effectRef idx="2">
-            <a:schemeClr val="accent1"/>
-          </a:effectRef>
-          <a:fontRef idx="minor">
-            <a:schemeClr val="lt1"/>
-          </a:fontRef>
-        </p:style>
-        <p:txBody>
-          <a:bodyPr rtlCol="0" anchor="ctr"/>
-          <a:lstStyle/>
-          <a:p>
-            <a:pPr algn="ctr"/>
-          </a:p>
-        </p:txBody>
-      </p:sp>
-      <p:sp>
-        <p:nvSpPr>
-          <p:cNvPr id="3" name="TextBox 2"/>
-          <p:cNvSpPr txBox="1"/>
-          <p:nvPr/>
-        </p:nvSpPr>
-        <p:spPr>
-          <a:xfrm>
-            <a:off x="640080" y="118872"/>
-            <a:ext cx="8168335" cy="219456"/>
-          </a:xfrm>
-          <a:prstGeom prst="rect">
-            <a:avLst/>
-          </a:prstGeom>
-          <a:noFill/>
-        </p:spPr>
-        <p:txBody>
-          <a:bodyPr wrap="square" anchor="t" lIns="0" rIns="0" tIns="0" bIns="0">
-            <a:spAutoFit/>
-          </a:bodyPr>
-          <a:lstStyle/>
-          <a:p>
-            <a:pPr algn="l">
-              <a:lnSpc>
-                <a:spcPct val="105000"/>
-              </a:lnSpc>
-            </a:pPr>
-            <a:r>
-              <a:rPr sz="1100" b="1" i="0">
-                <a:solidFill>
-                  <a:srgbClr val="FFFFFF"/>
-                </a:solidFill>
-                <a:latin typeface="Calibri"/>
-              </a:rPr>
-              <a:t>COVERAGE</a:t>
-            </a:r>
-          </a:p>
-        </p:txBody>
-      </p:sp>
-      <p:sp>
-        <p:nvSpPr>
-          <p:cNvPr id="4" name="TextBox 3"/>
-          <p:cNvSpPr txBox="1"/>
-          <p:nvPr/>
-        </p:nvSpPr>
-        <p:spPr>
-          <a:xfrm>
-            <a:off x="640080" y="347472"/>
-            <a:ext cx="8168335" cy="493776"/>
-          </a:xfrm>
-          <a:prstGeom prst="rect">
-            <a:avLst/>
-          </a:prstGeom>
-          <a:noFill/>
-        </p:spPr>
-        <p:txBody>
-          <a:bodyPr wrap="square" anchor="t" lIns="0" rIns="0" tIns="0" bIns="0">
-            <a:spAutoFit/>
-          </a:bodyPr>
-          <a:lstStyle/>
-          <a:p>
-            <a:pPr algn="l">
-              <a:lnSpc>
-                <a:spcPct val="105000"/>
-              </a:lnSpc>
-            </a:pPr>
-            <a:r>
-              <a:rPr sz="3000" b="1" i="0">
-                <a:solidFill>
-                  <a:srgbClr val="FFFFFF"/>
-                </a:solidFill>
-                <a:latin typeface="Calibri"/>
-              </a:rPr>
-              <a:t>Layouts Across Three Jobs</a:t>
-            </a:r>
-          </a:p>
-        </p:txBody>
-      </p:sp>
-      <p:sp>
-        <p:nvSpPr>
-          <p:cNvPr id="5" name="TextBox 4"/>
-          <p:cNvSpPr txBox="1"/>
-          <p:nvPr/>
-        </p:nvSpPr>
-        <p:spPr>
-          <a:xfrm>
-            <a:off x="640080" y="1024128"/>
-            <a:ext cx="10911535" cy="457200"/>
-          </a:xfrm>
-          <a:prstGeom prst="rect">
-            <a:avLst/>
-          </a:prstGeom>
-          <a:noFill/>
-        </p:spPr>
-        <p:txBody>
-          <a:bodyPr wrap="square" anchor="t" lIns="0" rIns="0" tIns="0" bIns="0">
-            <a:spAutoFit/>
-          </a:bodyPr>
-          <a:lstStyle/>
-          <a:p>
-            <a:pPr algn="l">
-              <a:lnSpc>
-                <a:spcPct val="105000"/>
-              </a:lnSpc>
-            </a:pPr>
-            <a:r>
-              <a:rPr sz="2600" b="0" i="1">
-                <a:solidFill>
-                  <a:srgbClr val="595959"/>
-                </a:solidFill>
-                <a:latin typeface="Calibri"/>
-              </a:rPr>
-              <a:t>Framing, text, and data — all covered from one spec.</a:t>
-            </a:r>
-          </a:p>
-        </p:txBody>
-      </p:sp>
-      <p:graphicFrame>
-        <p:nvGraphicFramePr>
-          <p:cNvPr id="6" name="Chart 5"/>
-          <p:cNvGraphicFramePr>
-            <a:graphicFrameLocks noGrp="1"/>
-          </p:cNvGraphicFramePr>
-          <p:nvPr/>
-        </p:nvGraphicFramePr>
-        <p:xfrm>
-          <a:off x="640080" y="1737360"/>
-          <a:ext cx="10911535" cy="4480560"/>
-        </p:xfrm>
-        <a:graphic>
-          <a:graphicData uri="http://schemas.openxmlformats.org/drawingml/2006/chart">
-            <c:chart xmlns:c="http://schemas.openxmlformats.org/drawingml/2006/chart" r:id="rId2"/>
-          </a:graphicData>
-        </a:graphic>
-      </p:graphicFrame>
-      <p:sp>
-        <p:nvSpPr>
-          <p:cNvPr id="7" name="TextBox 6"/>
-          <p:cNvSpPr txBox="1"/>
-          <p:nvPr/>
-        </p:nvSpPr>
-        <p:spPr>
-          <a:xfrm>
-            <a:off x="10454335" y="6291072"/>
-            <a:ext cx="1097280" cy="384048"/>
-          </a:xfrm>
-          <a:prstGeom prst="rect">
-            <a:avLst/>
-          </a:prstGeom>
-          <a:noFill/>
-        </p:spPr>
-        <p:txBody>
-          <a:bodyPr wrap="square" anchor="t" lIns="0" rIns="0" tIns="0" bIns="0">
-            <a:spAutoFit/>
-          </a:bodyPr>
-          <a:lstStyle/>
-          <a:p>
-            <a:pPr algn="r">
-              <a:lnSpc>
-                <a:spcPct val="105000"/>
-              </a:lnSpc>
-            </a:pPr>
-            <a:r>
-              <a:rPr sz="1600" b="0" i="0">
-                <a:solidFill>
-                  <a:srgbClr val="7F7F7F"/>
-                </a:solidFill>
-                <a:latin typeface="Calibri"/>
-              </a:rPr>
-              <a:t>9</a:t>
-            </a:r>
-          </a:p>
-        </p:txBody>
-      </p:sp>
-      <p:sp>
-        <p:nvSpPr>
-          <p:cNvPr id="8" name="TextBox 7"/>
-          <p:cNvSpPr txBox="1"/>
-          <p:nvPr/>
-        </p:nvSpPr>
-        <p:spPr>
-          <a:xfrm>
-            <a:off x="8808415" y="182880"/>
-            <a:ext cx="2743200" cy="548640"/>
-          </a:xfrm>
-          <a:prstGeom prst="rect">
-            <a:avLst/>
-          </a:prstGeom>
-          <a:noFill/>
-        </p:spPr>
-        <p:txBody>
-          <a:bodyPr wrap="square" anchor="t" lIns="0" rIns="0" tIns="0" bIns="0">
+          <a:bodyPr wrap="square" lIns="0" tIns="0" rIns="0" bIns="0" anchor="t">
             <a:spAutoFit/>
           </a:bodyPr>
           <a:lstStyle/>
